--- a/proposals/機種分析/まどか外伝/madoka_guide_v1.pptx
+++ b/proposals/機種分析/まどか外伝/madoka_guide_v1.pptx
@@ -3172,22 +3172,22 @@
         <p:spPr>
           <a:xfrm>
             <a:off x="137160" y="73152"/>
-            <a:ext cx="6858000" cy="502920"/>
-          </a:xfrm>
-          <a:prstGeom prst="rect">
-            <a:avLst/>
-          </a:prstGeom>
-          <a:noFill/>
-        </p:spPr>
-        <p:txBody>
-          <a:bodyPr wrap="square">
-            <a:spAutoFit/>
-          </a:bodyPr>
-          <a:lstStyle/>
-          <a:p>
-            <a:pPr algn="l"/>
-            <a:r>
-              <a:rPr sz="2000" b="1">
+            <a:ext cx="7772400" cy="502920"/>
+          </a:xfrm>
+          <a:prstGeom prst="rect">
+            <a:avLst/>
+          </a:prstGeom>
+          <a:noFill/>
+        </p:spPr>
+        <p:txBody>
+          <a:bodyPr wrap="square">
+            <a:spAutoFit/>
+          </a:bodyPr>
+          <a:lstStyle/>
+          <a:p>
+            <a:pPr algn="l"/>
+            <a:r>
+              <a:rPr sz="1600" b="1">
                 <a:solidFill>
                   <a:srgbClr val="FFFFFF"/>
                 </a:solidFill>
@@ -4930,22 +4930,22 @@
         <p:spPr>
           <a:xfrm>
             <a:off x="137160" y="73152"/>
-            <a:ext cx="6858000" cy="502920"/>
-          </a:xfrm>
-          <a:prstGeom prst="rect">
-            <a:avLst/>
-          </a:prstGeom>
-          <a:noFill/>
-        </p:spPr>
-        <p:txBody>
-          <a:bodyPr wrap="square">
-            <a:spAutoFit/>
-          </a:bodyPr>
-          <a:lstStyle/>
-          <a:p>
-            <a:pPr algn="l"/>
-            <a:r>
-              <a:rPr sz="2000" b="1">
+            <a:ext cx="7772400" cy="502920"/>
+          </a:xfrm>
+          <a:prstGeom prst="rect">
+            <a:avLst/>
+          </a:prstGeom>
+          <a:noFill/>
+        </p:spPr>
+        <p:txBody>
+          <a:bodyPr wrap="square">
+            <a:spAutoFit/>
+          </a:bodyPr>
+          <a:lstStyle/>
+          <a:p>
+            <a:pPr algn="l"/>
+            <a:r>
+              <a:rPr sz="1600" b="1">
                 <a:solidFill>
                   <a:srgbClr val="FFFFFF"/>
                 </a:solidFill>
@@ -4999,8 +4999,8 @@
         </p:nvSpPr>
         <p:spPr>
           <a:xfrm>
-            <a:off x="182880" y="658368"/>
-            <a:ext cx="3657600" cy="274320"/>
+            <a:off x="109728" y="658368"/>
+            <a:ext cx="4572000" cy="237744"/>
           </a:xfrm>
           <a:prstGeom prst="rect">
             <a:avLst/>
@@ -5034,8 +5034,8 @@
         </p:nvSpPr>
         <p:spPr>
           <a:xfrm>
-            <a:off x="137160" y="960120"/>
-            <a:ext cx="1463040" cy="658368"/>
+            <a:off x="109728" y="896112"/>
+            <a:ext cx="1371600" cy="731520"/>
           </a:xfrm>
           <a:prstGeom prst="rect">
             <a:avLst/>
@@ -5079,8 +5079,8 @@
         </p:nvSpPr>
         <p:spPr>
           <a:xfrm>
-            <a:off x="192024" y="1014984"/>
-            <a:ext cx="1353312" cy="548640"/>
+            <a:off x="164592" y="969264"/>
+            <a:ext cx="1261872" cy="603504"/>
           </a:xfrm>
           <a:prstGeom prst="rect">
             <a:avLst/>
@@ -5095,7 +5095,7 @@
           <a:p>
             <a:pPr algn="ctr"/>
             <a:r>
-              <a:rPr sz="850" b="0">
+              <a:rPr sz="950" b="0">
                 <a:solidFill>
                   <a:srgbClr val="FFFFFF"/>
                 </a:solidFill>
@@ -5115,8 +5115,8 @@
         </p:nvSpPr>
         <p:spPr>
           <a:xfrm>
-            <a:off x="1737360" y="960120"/>
-            <a:ext cx="1463040" cy="658368"/>
+            <a:off x="1600200" y="896112"/>
+            <a:ext cx="1371600" cy="731520"/>
           </a:xfrm>
           <a:prstGeom prst="rect">
             <a:avLst/>
@@ -5160,8 +5160,8 @@
         </p:nvSpPr>
         <p:spPr>
           <a:xfrm>
-            <a:off x="1792224" y="1014984"/>
-            <a:ext cx="1353312" cy="548640"/>
+            <a:off x="1655064" y="969264"/>
+            <a:ext cx="1261872" cy="603504"/>
           </a:xfrm>
           <a:prstGeom prst="rect">
             <a:avLst/>
@@ -5176,14 +5176,14 @@
           <a:p>
             <a:pPr algn="ctr"/>
             <a:r>
-              <a:rPr sz="850" b="0">
+              <a:rPr sz="950" b="0">
                 <a:solidFill>
                   <a:srgbClr val="FFFFFF"/>
                 </a:solidFill>
                 <a:latin typeface="メイリオ"/>
               </a:rPr>
               <a:t>マギア
-チャレンジ(CZ)</a:t>
+チャレンジCZ</a:t>
             </a:r>
           </a:p>
         </p:txBody>
@@ -5196,8 +5196,8 @@
         </p:nvSpPr>
         <p:spPr>
           <a:xfrm>
-            <a:off x="3337560" y="960120"/>
-            <a:ext cx="1463040" cy="658368"/>
+            <a:off x="3090672" y="896112"/>
+            <a:ext cx="1371600" cy="731520"/>
           </a:xfrm>
           <a:prstGeom prst="rect">
             <a:avLst/>
@@ -5241,8 +5241,8 @@
         </p:nvSpPr>
         <p:spPr>
           <a:xfrm>
-            <a:off x="3392424" y="1014984"/>
-            <a:ext cx="1353312" cy="548640"/>
+            <a:off x="3145536" y="969264"/>
+            <a:ext cx="1261872" cy="603504"/>
           </a:xfrm>
           <a:prstGeom prst="rect">
             <a:avLst/>
@@ -5257,7 +5257,7 @@
           <a:p>
             <a:pPr algn="ctr"/>
             <a:r>
-              <a:rPr sz="850" b="0">
+              <a:rPr sz="950" b="0">
                 <a:solidFill>
                   <a:srgbClr val="FFFFFF"/>
                 </a:solidFill>
@@ -5277,8 +5277,8 @@
         </p:nvSpPr>
         <p:spPr>
           <a:xfrm>
-            <a:off x="4937760" y="960120"/>
-            <a:ext cx="1463040" cy="658368"/>
+            <a:off x="4581144" y="896112"/>
+            <a:ext cx="1371600" cy="731520"/>
           </a:xfrm>
           <a:prstGeom prst="rect">
             <a:avLst/>
@@ -5322,8 +5322,8 @@
         </p:nvSpPr>
         <p:spPr>
           <a:xfrm>
-            <a:off x="4992624" y="1014984"/>
-            <a:ext cx="1353312" cy="548640"/>
+            <a:off x="4636007" y="969264"/>
+            <a:ext cx="1261872" cy="603504"/>
           </a:xfrm>
           <a:prstGeom prst="rect">
             <a:avLst/>
@@ -5338,14 +5338,14 @@
           <a:p>
             <a:pPr algn="ctr"/>
             <a:r>
-              <a:rPr sz="850" b="0">
+              <a:rPr sz="950" b="0">
                 <a:solidFill>
                   <a:srgbClr val="FFFFFF"/>
                 </a:solidFill>
                 <a:latin typeface="メイリオ"/>
               </a:rPr>
-              <a:t>マギアラッシュ
-(AT)</a:t>
+              <a:t>マギア
+ラッシュAT</a:t>
             </a:r>
           </a:p>
         </p:txBody>
@@ -5358,8 +5358,8 @@
         </p:nvSpPr>
         <p:spPr>
           <a:xfrm>
-            <a:off x="6537960" y="960120"/>
-            <a:ext cx="1463040" cy="658368"/>
+            <a:off x="6071616" y="896112"/>
+            <a:ext cx="1371600" cy="731520"/>
           </a:xfrm>
           <a:prstGeom prst="rect">
             <a:avLst/>
@@ -5403,8 +5403,8 @@
         </p:nvSpPr>
         <p:spPr>
           <a:xfrm>
-            <a:off x="6592824" y="1014984"/>
-            <a:ext cx="1353312" cy="548640"/>
+            <a:off x="6126479" y="969264"/>
+            <a:ext cx="1261872" cy="603504"/>
           </a:xfrm>
           <a:prstGeom prst="rect">
             <a:avLst/>
@@ -5419,7 +5419,7 @@
           <a:p>
             <a:pPr algn="ctr"/>
             <a:r>
-              <a:rPr sz="850" b="0">
+              <a:rPr sz="950" b="0">
                 <a:solidFill>
                   <a:srgbClr val="FFFFFF"/>
                 </a:solidFill>
@@ -5439,8 +5439,8 @@
         </p:nvSpPr>
         <p:spPr>
           <a:xfrm>
-            <a:off x="8138160" y="960120"/>
-            <a:ext cx="1463040" cy="658368"/>
+            <a:off x="7562087" y="896112"/>
+            <a:ext cx="1371600" cy="731520"/>
           </a:xfrm>
           <a:prstGeom prst="rect">
             <a:avLst/>
@@ -5484,8 +5484,8 @@
         </p:nvSpPr>
         <p:spPr>
           <a:xfrm>
-            <a:off x="8193024" y="1014984"/>
-            <a:ext cx="1353312" cy="548640"/>
+            <a:off x="7616951" y="969264"/>
+            <a:ext cx="1261872" cy="603504"/>
           </a:xfrm>
           <a:prstGeom prst="rect">
             <a:avLst/>
@@ -5500,7 +5500,7 @@
           <a:p>
             <a:pPr algn="ctr"/>
             <a:r>
-              <a:rPr sz="850" b="0">
+              <a:rPr sz="950" b="0">
                 <a:solidFill>
                   <a:srgbClr val="FFFFFF"/>
                 </a:solidFill>
@@ -5514,14 +5514,49 @@
       </p:sp>
       <p:sp>
         <p:nvSpPr>
-          <p:cNvPr id="19" name="Rectangle 18"/>
+          <p:cNvPr id="19" name="TextBox 18"/>
+          <p:cNvSpPr txBox="1"/>
+          <p:nvPr/>
+        </p:nvSpPr>
+        <p:spPr>
+          <a:xfrm>
+            <a:off x="109728" y="1664208"/>
+            <a:ext cx="1371600" cy="201168"/>
+          </a:xfrm>
+          <a:prstGeom prst="rect">
+            <a:avLst/>
+          </a:prstGeom>
+          <a:noFill/>
+        </p:spPr>
+        <p:txBody>
+          <a:bodyPr wrap="square">
+            <a:spAutoFit/>
+          </a:bodyPr>
+          <a:lstStyle/>
+          <a:p>
+            <a:pPr algn="ctr"/>
+            <a:r>
+              <a:rPr sz="800" b="1">
+                <a:solidFill>
+                  <a:srgbClr val="FFD700"/>
+                </a:solidFill>
+                <a:latin typeface="メイリオ"/>
+              </a:rPr>
+              <a:t>▼ 天井 950pt+α</a:t>
+            </a:r>
+          </a:p>
+        </p:txBody>
+      </p:sp>
+      <p:sp>
+        <p:nvSpPr>
+          <p:cNvPr id="20" name="Rectangle 19"/>
           <p:cNvSpPr/>
           <p:nvPr/>
         </p:nvSpPr>
         <p:spPr>
           <a:xfrm>
-            <a:off x="1600200" y="1234440"/>
-            <a:ext cx="96012" cy="82296"/>
+            <a:off x="1490472" y="1225295"/>
+            <a:ext cx="75438" cy="82296"/>
           </a:xfrm>
           <a:prstGeom prst="rect">
             <a:avLst/>
@@ -5557,14 +5592,14 @@
       </p:sp>
       <p:sp>
         <p:nvSpPr>
-          <p:cNvPr id="20" name="Rectangle 19"/>
+          <p:cNvPr id="21" name="Rectangle 20"/>
           <p:cNvSpPr/>
           <p:nvPr/>
         </p:nvSpPr>
         <p:spPr>
           <a:xfrm>
-            <a:off x="1692371" y="1161288"/>
-            <a:ext cx="35844" cy="228600"/>
+            <a:off x="1562892" y="1152143"/>
+            <a:ext cx="28163" cy="228600"/>
           </a:xfrm>
           <a:prstGeom prst="rect">
             <a:avLst/>
@@ -5600,14 +5635,14 @@
       </p:sp>
       <p:sp>
         <p:nvSpPr>
-          <p:cNvPr id="21" name="Rectangle 20"/>
+          <p:cNvPr id="22" name="Rectangle 21"/>
           <p:cNvSpPr/>
           <p:nvPr/>
         </p:nvSpPr>
         <p:spPr>
           <a:xfrm>
-            <a:off x="3200400" y="1234440"/>
-            <a:ext cx="96012" cy="82296"/>
+            <a:off x="2980944" y="1225295"/>
+            <a:ext cx="75438" cy="82296"/>
           </a:xfrm>
           <a:prstGeom prst="rect">
             <a:avLst/>
@@ -5643,14 +5678,14 @@
       </p:sp>
       <p:sp>
         <p:nvSpPr>
-          <p:cNvPr id="22" name="Rectangle 21"/>
+          <p:cNvPr id="23" name="Rectangle 22"/>
           <p:cNvSpPr/>
           <p:nvPr/>
         </p:nvSpPr>
         <p:spPr>
           <a:xfrm>
-            <a:off x="3292571" y="1161288"/>
-            <a:ext cx="35844" cy="228600"/>
+            <a:off x="3053364" y="1152143"/>
+            <a:ext cx="28163" cy="228600"/>
           </a:xfrm>
           <a:prstGeom prst="rect">
             <a:avLst/>
@@ -5686,14 +5721,14 @@
       </p:sp>
       <p:sp>
         <p:nvSpPr>
-          <p:cNvPr id="23" name="Rectangle 22"/>
+          <p:cNvPr id="24" name="Rectangle 23"/>
           <p:cNvSpPr/>
           <p:nvPr/>
         </p:nvSpPr>
         <p:spPr>
           <a:xfrm>
-            <a:off x="4800600" y="1234440"/>
-            <a:ext cx="96012" cy="82296"/>
+            <a:off x="4471416" y="1225295"/>
+            <a:ext cx="75438" cy="82296"/>
           </a:xfrm>
           <a:prstGeom prst="rect">
             <a:avLst/>
@@ -5729,14 +5764,14 @@
       </p:sp>
       <p:sp>
         <p:nvSpPr>
-          <p:cNvPr id="24" name="Rectangle 23"/>
+          <p:cNvPr id="25" name="Rectangle 24"/>
           <p:cNvSpPr/>
           <p:nvPr/>
         </p:nvSpPr>
         <p:spPr>
           <a:xfrm>
-            <a:off x="4892771" y="1161288"/>
-            <a:ext cx="35844" cy="228600"/>
+            <a:off x="4543836" y="1152143"/>
+            <a:ext cx="28163" cy="228600"/>
           </a:xfrm>
           <a:prstGeom prst="rect">
             <a:avLst/>
@@ -5772,14 +5807,14 @@
       </p:sp>
       <p:sp>
         <p:nvSpPr>
-          <p:cNvPr id="25" name="Rectangle 24"/>
+          <p:cNvPr id="26" name="Rectangle 25"/>
           <p:cNvSpPr/>
           <p:nvPr/>
         </p:nvSpPr>
         <p:spPr>
           <a:xfrm>
-            <a:off x="6400800" y="1234440"/>
-            <a:ext cx="96012" cy="82296"/>
+            <a:off x="5961888" y="1225295"/>
+            <a:ext cx="75438" cy="82296"/>
           </a:xfrm>
           <a:prstGeom prst="rect">
             <a:avLst/>
@@ -5815,14 +5850,14 @@
       </p:sp>
       <p:sp>
         <p:nvSpPr>
-          <p:cNvPr id="26" name="Rectangle 25"/>
+          <p:cNvPr id="27" name="Rectangle 26"/>
           <p:cNvSpPr/>
           <p:nvPr/>
         </p:nvSpPr>
         <p:spPr>
           <a:xfrm>
-            <a:off x="6492971" y="1161288"/>
-            <a:ext cx="35844" cy="228600"/>
+            <a:off x="6034308" y="1152143"/>
+            <a:ext cx="28163" cy="228600"/>
           </a:xfrm>
           <a:prstGeom prst="rect">
             <a:avLst/>
@@ -5858,14 +5893,14 @@
       </p:sp>
       <p:sp>
         <p:nvSpPr>
-          <p:cNvPr id="27" name="Rectangle 26"/>
+          <p:cNvPr id="28" name="Rectangle 27"/>
           <p:cNvSpPr/>
           <p:nvPr/>
         </p:nvSpPr>
         <p:spPr>
           <a:xfrm>
-            <a:off x="8001000" y="1234440"/>
-            <a:ext cx="96012" cy="82296"/>
+            <a:off x="7452360" y="1225295"/>
+            <a:ext cx="75438" cy="82296"/>
           </a:xfrm>
           <a:prstGeom prst="rect">
             <a:avLst/>
@@ -5901,14 +5936,14 @@
       </p:sp>
       <p:sp>
         <p:nvSpPr>
-          <p:cNvPr id="28" name="Rectangle 27"/>
+          <p:cNvPr id="29" name="Rectangle 28"/>
           <p:cNvSpPr/>
           <p:nvPr/>
         </p:nvSpPr>
         <p:spPr>
           <a:xfrm>
-            <a:off x="8093171" y="1161288"/>
-            <a:ext cx="35844" cy="228600"/>
+            <a:off x="7524780" y="1152143"/>
+            <a:ext cx="28163" cy="228600"/>
           </a:xfrm>
           <a:prstGeom prst="rect">
             <a:avLst/>
@@ -5944,14 +5979,14 @@
       </p:sp>
       <p:sp>
         <p:nvSpPr>
-          <p:cNvPr id="29" name="Rectangle 28"/>
+          <p:cNvPr id="30" name="Rectangle 29"/>
           <p:cNvSpPr/>
           <p:nvPr/>
         </p:nvSpPr>
         <p:spPr>
           <a:xfrm>
-            <a:off x="8915400" y="1481328"/>
-            <a:ext cx="109728" cy="594360"/>
+            <a:off x="8933687" y="1261872"/>
+            <a:ext cx="109728" cy="640080"/>
           </a:xfrm>
           <a:prstGeom prst="rect">
             <a:avLst/>
@@ -5987,14 +6022,14 @@
       </p:sp>
       <p:sp>
         <p:nvSpPr>
-          <p:cNvPr id="30" name="Rectangle 29"/>
+          <p:cNvPr id="31" name="Rectangle 30"/>
           <p:cNvSpPr/>
           <p:nvPr/>
         </p:nvSpPr>
         <p:spPr>
           <a:xfrm>
-            <a:off x="137160" y="1938528"/>
-            <a:ext cx="8887968" cy="109728"/>
+            <a:off x="109728" y="1901952"/>
+            <a:ext cx="8933687" cy="91440"/>
           </a:xfrm>
           <a:prstGeom prst="rect">
             <a:avLst/>
@@ -6030,14 +6065,14 @@
       </p:sp>
       <p:sp>
         <p:nvSpPr>
-          <p:cNvPr id="31" name="TextBox 30"/>
-          <p:cNvSpPr txBox="1"/>
-          <p:nvPr/>
-        </p:nvSpPr>
-        <p:spPr>
-          <a:xfrm>
-            <a:off x="3657600" y="1828800"/>
-            <a:ext cx="1828800" cy="201168"/>
+          <p:cNvPr id="32" name="TextBox 31"/>
+          <p:cNvSpPr txBox="1"/>
+          <p:nvPr/>
+        </p:nvSpPr>
+        <p:spPr>
+          <a:xfrm>
+            <a:off x="3017520" y="1920240"/>
+            <a:ext cx="3200400" cy="201168"/>
           </a:xfrm>
           <a:prstGeom prst="rect">
             <a:avLst/>
@@ -6058,21 +6093,21 @@
                 </a:solidFill>
                 <a:latin typeface="メイリオ"/>
               </a:rPr>
-              <a:t>↩ 折り返し</a:t>
-            </a:r>
-          </a:p>
-        </p:txBody>
-      </p:sp>
-      <p:sp>
-        <p:nvSpPr>
-          <p:cNvPr id="32" name="TextBox 31"/>
-          <p:cNvSpPr txBox="1"/>
-          <p:nvPr/>
-        </p:nvSpPr>
-        <p:spPr>
-          <a:xfrm>
-            <a:off x="182880" y="2121408"/>
-            <a:ext cx="4572000" cy="274320"/>
+              <a:t>↩ 折り返し（エンディング → 上位AT突入）</a:t>
+            </a:r>
+          </a:p>
+        </p:txBody>
+      </p:sp>
+      <p:sp>
+        <p:nvSpPr>
+          <p:cNvPr id="33" name="TextBox 32"/>
+          <p:cNvSpPr txBox="1"/>
+          <p:nvPr/>
+        </p:nvSpPr>
+        <p:spPr>
+          <a:xfrm>
+            <a:off x="109728" y="2185415"/>
+            <a:ext cx="5029200" cy="237744"/>
           </a:xfrm>
           <a:prstGeom prst="rect">
             <a:avLst/>
@@ -6100,14 +6135,14 @@
       </p:sp>
       <p:sp>
         <p:nvSpPr>
-          <p:cNvPr id="33" name="Rectangle 32"/>
+          <p:cNvPr id="34" name="Rectangle 33"/>
           <p:cNvSpPr/>
           <p:nvPr/>
         </p:nvSpPr>
         <p:spPr>
           <a:xfrm>
-            <a:off x="137160" y="2423160"/>
-            <a:ext cx="1463040" cy="749808"/>
+            <a:off x="109728" y="2423160"/>
+            <a:ext cx="1371600" cy="914400"/>
           </a:xfrm>
           <a:prstGeom prst="rect">
             <a:avLst/>
@@ -6145,14 +6180,14 @@
       </p:sp>
       <p:sp>
         <p:nvSpPr>
-          <p:cNvPr id="34" name="TextBox 33"/>
-          <p:cNvSpPr txBox="1"/>
-          <p:nvPr/>
-        </p:nvSpPr>
-        <p:spPr>
-          <a:xfrm>
-            <a:off x="192024" y="2478024"/>
-            <a:ext cx="1353312" cy="640080"/>
+          <p:cNvPr id="35" name="TextBox 34"/>
+          <p:cNvSpPr txBox="1"/>
+          <p:nvPr/>
+        </p:nvSpPr>
+        <p:spPr>
+          <a:xfrm>
+            <a:off x="164592" y="2514600"/>
+            <a:ext cx="1261872" cy="749808"/>
           </a:xfrm>
           <a:prstGeom prst="rect">
             <a:avLst/>
@@ -6167,7 +6202,7 @@
           <a:p>
             <a:pPr algn="ctr"/>
             <a:r>
-              <a:rPr sz="800" b="0">
+              <a:rPr sz="900" b="0">
                 <a:solidFill>
                   <a:srgbClr val="FFFFFF"/>
                 </a:solidFill>
@@ -6182,14 +6217,14 @@
       </p:sp>
       <p:sp>
         <p:nvSpPr>
-          <p:cNvPr id="35" name="Rectangle 34"/>
+          <p:cNvPr id="36" name="Rectangle 35"/>
           <p:cNvSpPr/>
           <p:nvPr/>
         </p:nvSpPr>
         <p:spPr>
           <a:xfrm>
-            <a:off x="1737360" y="2423160"/>
-            <a:ext cx="1463040" cy="749808"/>
+            <a:off x="1600200" y="2423160"/>
+            <a:ext cx="1371600" cy="914400"/>
           </a:xfrm>
           <a:prstGeom prst="rect">
             <a:avLst/>
@@ -6227,14 +6262,14 @@
       </p:sp>
       <p:sp>
         <p:nvSpPr>
-          <p:cNvPr id="36" name="TextBox 35"/>
-          <p:cNvSpPr txBox="1"/>
-          <p:nvPr/>
-        </p:nvSpPr>
-        <p:spPr>
-          <a:xfrm>
-            <a:off x="1792224" y="2478024"/>
-            <a:ext cx="1353312" cy="640080"/>
+          <p:cNvPr id="37" name="TextBox 36"/>
+          <p:cNvSpPr txBox="1"/>
+          <p:nvPr/>
+        </p:nvSpPr>
+        <p:spPr>
+          <a:xfrm>
+            <a:off x="1655064" y="2514600"/>
+            <a:ext cx="1261872" cy="749808"/>
           </a:xfrm>
           <a:prstGeom prst="rect">
             <a:avLst/>
@@ -6249,7 +6284,7 @@
           <a:p>
             <a:pPr algn="ctr"/>
             <a:r>
-              <a:rPr sz="800" b="0">
+              <a:rPr sz="900" b="0">
                 <a:solidFill>
                   <a:srgbClr val="FFFFFF"/>
                 </a:solidFill>
@@ -6264,14 +6299,14 @@
       </p:sp>
       <p:sp>
         <p:nvSpPr>
-          <p:cNvPr id="37" name="Rectangle 36"/>
+          <p:cNvPr id="38" name="Rectangle 37"/>
           <p:cNvSpPr/>
           <p:nvPr/>
         </p:nvSpPr>
         <p:spPr>
           <a:xfrm>
-            <a:off x="3337560" y="2423160"/>
-            <a:ext cx="1463040" cy="749808"/>
+            <a:off x="3090672" y="2423160"/>
+            <a:ext cx="1371600" cy="914400"/>
           </a:xfrm>
           <a:prstGeom prst="rect">
             <a:avLst/>
@@ -6309,14 +6344,14 @@
       </p:sp>
       <p:sp>
         <p:nvSpPr>
-          <p:cNvPr id="38" name="TextBox 37"/>
-          <p:cNvSpPr txBox="1"/>
-          <p:nvPr/>
-        </p:nvSpPr>
-        <p:spPr>
-          <a:xfrm>
-            <a:off x="3392424" y="2478024"/>
-            <a:ext cx="1353312" cy="640080"/>
+          <p:cNvPr id="39" name="TextBox 38"/>
+          <p:cNvSpPr txBox="1"/>
+          <p:nvPr/>
+        </p:nvSpPr>
+        <p:spPr>
+          <a:xfrm>
+            <a:off x="3145536" y="2514600"/>
+            <a:ext cx="1261872" cy="749808"/>
           </a:xfrm>
           <a:prstGeom prst="rect">
             <a:avLst/>
@@ -6331,13 +6366,14 @@
           <a:p>
             <a:pPr algn="ctr"/>
             <a:r>
-              <a:rPr sz="800" b="0">
+              <a:rPr sz="900" b="0">
                 <a:solidFill>
                   <a:srgbClr val="FFFFFF"/>
                 </a:solidFill>
                 <a:latin typeface="メイリオ"/>
               </a:rPr>
-              <a:t>決戦神浜聖女
+              <a:t>決戦
+神浜聖女
 (ST特化)</a:t>
             </a:r>
           </a:p>
@@ -6345,22 +6381,22 @@
       </p:sp>
       <p:sp>
         <p:nvSpPr>
-          <p:cNvPr id="39" name="Rectangle 38"/>
+          <p:cNvPr id="40" name="Rectangle 39"/>
           <p:cNvSpPr/>
           <p:nvPr/>
         </p:nvSpPr>
         <p:spPr>
           <a:xfrm>
-            <a:off x="4937760" y="2423160"/>
-            <a:ext cx="1463040" cy="749808"/>
+            <a:off x="4581144" y="2423160"/>
+            <a:ext cx="1371600" cy="914400"/>
           </a:xfrm>
           <a:prstGeom prst="rect">
             <a:avLst/>
           </a:prstGeom>
           <a:solidFill>
-            <a:srgbClr val="300010"/>
+            <a:srgbClr val="350008"/>
           </a:solidFill>
-          <a:ln w="19050">
+          <a:ln w="31750">
             <a:solidFill>
               <a:srgbClr val="FF5555"/>
             </a:solidFill>
@@ -6390,14 +6426,14 @@
       </p:sp>
       <p:sp>
         <p:nvSpPr>
-          <p:cNvPr id="40" name="TextBox 39"/>
-          <p:cNvSpPr txBox="1"/>
-          <p:nvPr/>
-        </p:nvSpPr>
-        <p:spPr>
-          <a:xfrm>
-            <a:off x="4992624" y="2478024"/>
-            <a:ext cx="1353312" cy="640080"/>
+          <p:cNvPr id="41" name="TextBox 40"/>
+          <p:cNvSpPr txBox="1"/>
+          <p:nvPr/>
+        </p:nvSpPr>
+        <p:spPr>
+          <a:xfrm>
+            <a:off x="4636007" y="2514600"/>
+            <a:ext cx="1261872" cy="749808"/>
           </a:xfrm>
           <a:prstGeom prst="rect">
             <a:avLst/>
@@ -6412,7 +6448,7 @@
           <a:p>
             <a:pPr algn="ctr"/>
             <a:r>
-              <a:rPr sz="800" b="0">
+              <a:rPr sz="900" b="0">
                 <a:solidFill>
                   <a:srgbClr val="FFFFFF"/>
                 </a:solidFill>
@@ -6427,14 +6463,14 @@
       </p:sp>
       <p:sp>
         <p:nvSpPr>
-          <p:cNvPr id="41" name="Rectangle 40"/>
+          <p:cNvPr id="42" name="Rectangle 41"/>
           <p:cNvSpPr/>
           <p:nvPr/>
         </p:nvSpPr>
         <p:spPr>
           <a:xfrm>
-            <a:off x="6537960" y="2423160"/>
-            <a:ext cx="1463040" cy="749808"/>
+            <a:off x="6071616" y="2423160"/>
+            <a:ext cx="1371600" cy="914400"/>
           </a:xfrm>
           <a:prstGeom prst="rect">
             <a:avLst/>
@@ -6472,14 +6508,14 @@
       </p:sp>
       <p:sp>
         <p:nvSpPr>
-          <p:cNvPr id="42" name="TextBox 41"/>
-          <p:cNvSpPr txBox="1"/>
-          <p:nvPr/>
-        </p:nvSpPr>
-        <p:spPr>
-          <a:xfrm>
-            <a:off x="6592824" y="2478024"/>
-            <a:ext cx="1353312" cy="640080"/>
+          <p:cNvPr id="43" name="TextBox 42"/>
+          <p:cNvSpPr txBox="1"/>
+          <p:nvPr/>
+        </p:nvSpPr>
+        <p:spPr>
+          <a:xfrm>
+            <a:off x="6126479" y="2514600"/>
+            <a:ext cx="1261872" cy="749808"/>
           </a:xfrm>
           <a:prstGeom prst="rect">
             <a:avLst/>
@@ -6494,7 +6530,7 @@
           <a:p>
             <a:pPr algn="ctr"/>
             <a:r>
-              <a:rPr sz="800" b="0">
+              <a:rPr sz="900" b="0">
                 <a:solidFill>
                   <a:srgbClr val="FFFFFF"/>
                 </a:solidFill>
@@ -6508,14 +6544,14 @@
       </p:sp>
       <p:sp>
         <p:nvSpPr>
-          <p:cNvPr id="43" name="Rectangle 42"/>
+          <p:cNvPr id="44" name="Rectangle 43"/>
           <p:cNvSpPr/>
           <p:nvPr/>
         </p:nvSpPr>
         <p:spPr>
           <a:xfrm>
-            <a:off x="8138160" y="2423160"/>
-            <a:ext cx="1463040" cy="749808"/>
+            <a:off x="7562087" y="2423160"/>
+            <a:ext cx="1371600" cy="914400"/>
           </a:xfrm>
           <a:prstGeom prst="rect">
             <a:avLst/>
@@ -6553,14 +6589,14 @@
       </p:sp>
       <p:sp>
         <p:nvSpPr>
-          <p:cNvPr id="44" name="TextBox 43"/>
-          <p:cNvSpPr txBox="1"/>
-          <p:nvPr/>
-        </p:nvSpPr>
-        <p:spPr>
-          <a:xfrm>
-            <a:off x="8193024" y="2478024"/>
-            <a:ext cx="1353312" cy="640080"/>
+          <p:cNvPr id="45" name="TextBox 44"/>
+          <p:cNvSpPr txBox="1"/>
+          <p:nvPr/>
+        </p:nvSpPr>
+        <p:spPr>
+          <a:xfrm>
+            <a:off x="7616951" y="2514600"/>
+            <a:ext cx="1261872" cy="749808"/>
           </a:xfrm>
           <a:prstGeom prst="rect">
             <a:avLst/>
@@ -6575,7 +6611,7 @@
           <a:p>
             <a:pPr algn="ctr"/>
             <a:r>
-              <a:rPr sz="800" b="0">
+              <a:rPr sz="900" b="0">
                 <a:solidFill>
                   <a:srgbClr val="FFFFFF"/>
                 </a:solidFill>
@@ -6590,14 +6626,14 @@
       </p:sp>
       <p:sp>
         <p:nvSpPr>
-          <p:cNvPr id="45" name="Rectangle 44"/>
+          <p:cNvPr id="46" name="Rectangle 45"/>
           <p:cNvSpPr/>
           <p:nvPr/>
         </p:nvSpPr>
         <p:spPr>
           <a:xfrm>
-            <a:off x="1600200" y="2798064"/>
-            <a:ext cx="96012" cy="82296"/>
+            <a:off x="1490472" y="2843784"/>
+            <a:ext cx="75438" cy="82296"/>
           </a:xfrm>
           <a:prstGeom prst="rect">
             <a:avLst/>
@@ -6633,14 +6669,14 @@
       </p:sp>
       <p:sp>
         <p:nvSpPr>
-          <p:cNvPr id="46" name="Rectangle 45"/>
+          <p:cNvPr id="47" name="Rectangle 46"/>
           <p:cNvSpPr/>
           <p:nvPr/>
         </p:nvSpPr>
         <p:spPr>
           <a:xfrm>
-            <a:off x="1692371" y="2724912"/>
-            <a:ext cx="35844" cy="228600"/>
+            <a:off x="1562892" y="2770632"/>
+            <a:ext cx="28163" cy="228600"/>
           </a:xfrm>
           <a:prstGeom prst="rect">
             <a:avLst/>
@@ -6676,14 +6712,14 @@
       </p:sp>
       <p:sp>
         <p:nvSpPr>
-          <p:cNvPr id="47" name="Rectangle 46"/>
+          <p:cNvPr id="48" name="Rectangle 47"/>
           <p:cNvSpPr/>
           <p:nvPr/>
         </p:nvSpPr>
         <p:spPr>
           <a:xfrm>
-            <a:off x="3200400" y="2798064"/>
-            <a:ext cx="96012" cy="82296"/>
+            <a:off x="2980944" y="2843784"/>
+            <a:ext cx="75438" cy="82296"/>
           </a:xfrm>
           <a:prstGeom prst="rect">
             <a:avLst/>
@@ -6719,14 +6755,14 @@
       </p:sp>
       <p:sp>
         <p:nvSpPr>
-          <p:cNvPr id="48" name="Rectangle 47"/>
+          <p:cNvPr id="49" name="Rectangle 48"/>
           <p:cNvSpPr/>
           <p:nvPr/>
         </p:nvSpPr>
         <p:spPr>
           <a:xfrm>
-            <a:off x="3292571" y="2724912"/>
-            <a:ext cx="35844" cy="228600"/>
+            <a:off x="3053364" y="2770632"/>
+            <a:ext cx="28163" cy="228600"/>
           </a:xfrm>
           <a:prstGeom prst="rect">
             <a:avLst/>
@@ -6762,14 +6798,14 @@
       </p:sp>
       <p:sp>
         <p:nvSpPr>
-          <p:cNvPr id="49" name="Rectangle 48"/>
+          <p:cNvPr id="50" name="Rectangle 49"/>
           <p:cNvSpPr/>
           <p:nvPr/>
         </p:nvSpPr>
         <p:spPr>
           <a:xfrm>
-            <a:off x="4800600" y="2798064"/>
-            <a:ext cx="96012" cy="82296"/>
+            <a:off x="4471416" y="2843784"/>
+            <a:ext cx="75438" cy="82296"/>
           </a:xfrm>
           <a:prstGeom prst="rect">
             <a:avLst/>
@@ -6805,14 +6841,14 @@
       </p:sp>
       <p:sp>
         <p:nvSpPr>
-          <p:cNvPr id="50" name="Rectangle 49"/>
+          <p:cNvPr id="51" name="Rectangle 50"/>
           <p:cNvSpPr/>
           <p:nvPr/>
         </p:nvSpPr>
         <p:spPr>
           <a:xfrm>
-            <a:off x="4892771" y="2724912"/>
-            <a:ext cx="35844" cy="228600"/>
+            <a:off x="4543836" y="2770632"/>
+            <a:ext cx="28163" cy="228600"/>
           </a:xfrm>
           <a:prstGeom prst="rect">
             <a:avLst/>
@@ -6848,14 +6884,14 @@
       </p:sp>
       <p:sp>
         <p:nvSpPr>
-          <p:cNvPr id="51" name="Rectangle 50"/>
+          <p:cNvPr id="52" name="Rectangle 51"/>
           <p:cNvSpPr/>
           <p:nvPr/>
         </p:nvSpPr>
         <p:spPr>
           <a:xfrm>
-            <a:off x="6400800" y="2798064"/>
-            <a:ext cx="96012" cy="82296"/>
+            <a:off x="5961888" y="2843784"/>
+            <a:ext cx="75438" cy="82296"/>
           </a:xfrm>
           <a:prstGeom prst="rect">
             <a:avLst/>
@@ -6891,14 +6927,14 @@
       </p:sp>
       <p:sp>
         <p:nvSpPr>
-          <p:cNvPr id="52" name="Rectangle 51"/>
+          <p:cNvPr id="53" name="Rectangle 52"/>
           <p:cNvSpPr/>
           <p:nvPr/>
         </p:nvSpPr>
         <p:spPr>
           <a:xfrm>
-            <a:off x="6492971" y="2724912"/>
-            <a:ext cx="35844" cy="228600"/>
+            <a:off x="6034308" y="2770632"/>
+            <a:ext cx="28163" cy="228600"/>
           </a:xfrm>
           <a:prstGeom prst="rect">
             <a:avLst/>
@@ -6934,14 +6970,14 @@
       </p:sp>
       <p:sp>
         <p:nvSpPr>
-          <p:cNvPr id="53" name="Rectangle 52"/>
+          <p:cNvPr id="54" name="Rectangle 53"/>
           <p:cNvSpPr/>
           <p:nvPr/>
         </p:nvSpPr>
         <p:spPr>
           <a:xfrm>
-            <a:off x="8001000" y="2798064"/>
-            <a:ext cx="96012" cy="82296"/>
+            <a:off x="7452360" y="2843784"/>
+            <a:ext cx="75438" cy="82296"/>
           </a:xfrm>
           <a:prstGeom prst="rect">
             <a:avLst/>
@@ -6977,14 +7013,14 @@
       </p:sp>
       <p:sp>
         <p:nvSpPr>
-          <p:cNvPr id="54" name="Rectangle 53"/>
+          <p:cNvPr id="55" name="Rectangle 54"/>
           <p:cNvSpPr/>
           <p:nvPr/>
         </p:nvSpPr>
         <p:spPr>
           <a:xfrm>
-            <a:off x="8093171" y="2724912"/>
-            <a:ext cx="35844" cy="228600"/>
+            <a:off x="7524780" y="2770632"/>
+            <a:ext cx="28163" cy="228600"/>
           </a:xfrm>
           <a:prstGeom prst="rect">
             <a:avLst/>
@@ -7020,14 +7056,14 @@
       </p:sp>
       <p:sp>
         <p:nvSpPr>
-          <p:cNvPr id="55" name="Rectangle 54"/>
+          <p:cNvPr id="56" name="Rectangle 55"/>
           <p:cNvSpPr/>
           <p:nvPr/>
         </p:nvSpPr>
         <p:spPr>
           <a:xfrm>
-            <a:off x="137160" y="3291840"/>
-            <a:ext cx="8869680" cy="1188720"/>
+            <a:off x="109728" y="3566160"/>
+            <a:ext cx="2889504" cy="658368"/>
           </a:xfrm>
           <a:prstGeom prst="rect">
             <a:avLst/>
@@ -7035,9 +7071,9 @@
           <a:solidFill>
             <a:srgbClr val="080820"/>
           </a:solidFill>
-          <a:ln w="10160">
+          <a:ln w="12700">
             <a:solidFill>
-              <a:srgbClr val="BBBBCC"/>
+              <a:srgbClr val="FFD700"/>
             </a:solidFill>
           </a:ln>
         </p:spPr>
@@ -7065,58 +7101,95 @@
       </p:sp>
       <p:sp>
         <p:nvSpPr>
-          <p:cNvPr id="56" name="TextBox 55"/>
-          <p:cNvSpPr txBox="1"/>
-          <p:nvPr/>
-        </p:nvSpPr>
-        <p:spPr>
-          <a:xfrm>
-            <a:off x="274320" y="3319272"/>
-            <a:ext cx="1828800" cy="256032"/>
-          </a:xfrm>
-          <a:prstGeom prst="rect">
-            <a:avLst/>
-          </a:prstGeom>
-          <a:noFill/>
-        </p:spPr>
-        <p:txBody>
-          <a:bodyPr wrap="square">
-            <a:spAutoFit/>
-          </a:bodyPr>
-          <a:lstStyle/>
-          <a:p>
-            <a:pPr algn="l"/>
-            <a:r>
-              <a:rPr sz="900" b="1">
+          <p:cNvPr id="57" name="TextBox 56"/>
+          <p:cNvSpPr txBox="1"/>
+          <p:nvPr/>
+        </p:nvSpPr>
+        <p:spPr>
+          <a:xfrm>
+            <a:off x="192024" y="3611879"/>
+            <a:ext cx="2724912" cy="237744"/>
+          </a:xfrm>
+          <a:prstGeom prst="rect">
+            <a:avLst/>
+          </a:prstGeom>
+          <a:noFill/>
+        </p:spPr>
+        <p:txBody>
+          <a:bodyPr wrap="square">
+            <a:spAutoFit/>
+          </a:bodyPr>
+          <a:lstStyle/>
+          <a:p>
+            <a:pPr algn="l"/>
+            <a:r>
+              <a:rPr sz="950" b="1">
+                <a:solidFill>
+                  <a:srgbClr val="FFD700"/>
+                </a:solidFill>
+                <a:latin typeface="メイリオ"/>
+              </a:rPr>
+              <a:t>天井 950pt+α</a:t>
+            </a:r>
+          </a:p>
+        </p:txBody>
+      </p:sp>
+      <p:sp>
+        <p:nvSpPr>
+          <p:cNvPr id="58" name="TextBox 57"/>
+          <p:cNvSpPr txBox="1"/>
+          <p:nvPr/>
+        </p:nvSpPr>
+        <p:spPr>
+          <a:xfrm>
+            <a:off x="192024" y="3840480"/>
+            <a:ext cx="2724912" cy="347472"/>
+          </a:xfrm>
+          <a:prstGeom prst="rect">
+            <a:avLst/>
+          </a:prstGeom>
+          <a:noFill/>
+        </p:spPr>
+        <p:txBody>
+          <a:bodyPr wrap="square">
+            <a:spAutoFit/>
+          </a:bodyPr>
+          <a:lstStyle/>
+          <a:p>
+            <a:pPr algn="l"/>
+            <a:r>
+              <a:rPr sz="750" b="0">
                 <a:solidFill>
                   <a:srgbClr val="BBBBCC"/>
                 </a:solidFill>
                 <a:latin typeface="メイリオ"/>
               </a:rPr>
-              <a:t>凡例・補足</a:t>
-            </a:r>
-          </a:p>
-        </p:txBody>
-      </p:sp>
-      <p:sp>
-        <p:nvSpPr>
-          <p:cNvPr id="57" name="Rectangle 56"/>
+              <a:t>ポイント蓄積上限で強制ボーナス当選。スルー回数が増えるほど初当たりAT期待値が上昇</a:t>
+            </a:r>
+          </a:p>
+        </p:txBody>
+      </p:sp>
+      <p:sp>
+        <p:nvSpPr>
+          <p:cNvPr id="59" name="Rectangle 58"/>
           <p:cNvSpPr/>
           <p:nvPr/>
         </p:nvSpPr>
         <p:spPr>
           <a:xfrm>
-            <a:off x="228600" y="3648456"/>
-            <a:ext cx="128016" cy="128016"/>
+            <a:off x="3127248" y="3566160"/>
+            <a:ext cx="2889504" cy="658368"/>
           </a:xfrm>
           <a:prstGeom prst="rect">
             <a:avLst/>
           </a:prstGeom>
           <a:solidFill>
-            <a:srgbClr val="CC44AA"/>
+            <a:srgbClr val="080820"/>
           </a:solidFill>
-          <a:ln>
-            <a:noFill/>
+          <a:ln w="12700">
+            <a:solidFill>
+              <a:srgbClr val="FF5555"/>
+            </a:solidFill>
           </a:ln>
         </p:spPr>
         <p:style>
@@ -7143,58 +7216,95 @@
       </p:sp>
       <p:sp>
         <p:nvSpPr>
-          <p:cNvPr id="58" name="TextBox 57"/>
-          <p:cNvSpPr txBox="1"/>
-          <p:nvPr/>
-        </p:nvSpPr>
-        <p:spPr>
-          <a:xfrm>
-            <a:off x="411480" y="3593592"/>
-            <a:ext cx="8503920" cy="256032"/>
-          </a:xfrm>
-          <a:prstGeom prst="rect">
-            <a:avLst/>
-          </a:prstGeom>
-          <a:noFill/>
-        </p:spPr>
-        <p:txBody>
-          <a:bodyPr wrap="square">
-            <a:spAutoFit/>
-          </a:bodyPr>
-          <a:lstStyle/>
-          <a:p>
-            <a:pPr algn="l"/>
-            <a:r>
-              <a:rPr sz="800" b="0">
+          <p:cNvPr id="60" name="TextBox 59"/>
+          <p:cNvSpPr txBox="1"/>
+          <p:nvPr/>
+        </p:nvSpPr>
+        <p:spPr>
+          <a:xfrm>
+            <a:off x="3209544" y="3611879"/>
+            <a:ext cx="2724912" cy="237744"/>
+          </a:xfrm>
+          <a:prstGeom prst="rect">
+            <a:avLst/>
+          </a:prstGeom>
+          <a:noFill/>
+        </p:spPr>
+        <p:txBody>
+          <a:bodyPr wrap="square">
+            <a:spAutoFit/>
+          </a:bodyPr>
+          <a:lstStyle/>
+          <a:p>
+            <a:pPr algn="l"/>
+            <a:r>
+              <a:rPr sz="950" b="1">
+                <a:solidFill>
+                  <a:srgbClr val="FF5555"/>
+                </a:solidFill>
+                <a:latin typeface="メイリオ"/>
+              </a:rPr>
+              <a:t>ドッペル爆発 3000枚超</a:t>
+            </a:r>
+          </a:p>
+        </p:txBody>
+      </p:sp>
+      <p:sp>
+        <p:nvSpPr>
+          <p:cNvPr id="61" name="TextBox 60"/>
+          <p:cNvSpPr txBox="1"/>
+          <p:nvPr/>
+        </p:nvSpPr>
+        <p:spPr>
+          <a:xfrm>
+            <a:off x="3209544" y="3840480"/>
+            <a:ext cx="2724912" cy="347472"/>
+          </a:xfrm>
+          <a:prstGeom prst="rect">
+            <a:avLst/>
+          </a:prstGeom>
+          <a:noFill/>
+        </p:spPr>
+        <p:txBody>
+          <a:bodyPr wrap="square">
+            <a:spAutoFit/>
+          </a:bodyPr>
+          <a:lstStyle/>
+          <a:p>
+            <a:pPr algn="l"/>
+            <a:r>
+              <a:rPr sz="750" b="0">
                 <a:solidFill>
                   <a:srgbClr val="BBBBCC"/>
                 </a:solidFill>
                 <a:latin typeface="メイリオ"/>
               </a:rPr>
-              <a:t>マギアチャレンジ：スイカ/ポイント/黒江CZからCZ突入</a:t>
-            </a:r>
-          </a:p>
-        </p:txBody>
-      </p:sp>
-      <p:sp>
-        <p:nvSpPr>
-          <p:cNvPr id="59" name="Rectangle 58"/>
+              <a:t>穢れ解放で突入。AT終了まで上乗せ倍増。設定6以外でも3000枚超は十分現実的</a:t>
+            </a:r>
+          </a:p>
+        </p:txBody>
+      </p:sp>
+      <p:sp>
+        <p:nvSpPr>
+          <p:cNvPr id="62" name="Rectangle 61"/>
           <p:cNvSpPr/>
           <p:nvPr/>
         </p:nvSpPr>
         <p:spPr>
           <a:xfrm>
-            <a:off x="228600" y="3867911"/>
-            <a:ext cx="128016" cy="128016"/>
+            <a:off x="6144768" y="3566160"/>
+            <a:ext cx="2889504" cy="658368"/>
           </a:xfrm>
           <a:prstGeom prst="rect">
             <a:avLst/>
           </a:prstGeom>
           <a:solidFill>
-            <a:srgbClr val="44CCEE"/>
+            <a:srgbClr val="080820"/>
           </a:solidFill>
-          <a:ln>
-            <a:noFill/>
+          <a:ln w="12700">
+            <a:solidFill>
+              <a:srgbClr val="44CCEE"/>
+            </a:solidFill>
           </a:ln>
         </p:spPr>
         <p:style>
@@ -7221,191 +7331,70 @@
       </p:sp>
       <p:sp>
         <p:nvSpPr>
-          <p:cNvPr id="60" name="TextBox 59"/>
-          <p:cNvSpPr txBox="1"/>
-          <p:nvPr/>
-        </p:nvSpPr>
-        <p:spPr>
-          <a:xfrm>
-            <a:off x="411480" y="3813048"/>
-            <a:ext cx="8503920" cy="256032"/>
-          </a:xfrm>
-          <a:prstGeom prst="rect">
-            <a:avLst/>
-          </a:prstGeom>
-          <a:noFill/>
-        </p:spPr>
-        <p:txBody>
-          <a:bodyPr wrap="square">
-            <a:spAutoFit/>
-          </a:bodyPr>
-          <a:lstStyle/>
-          <a:p>
-            <a:pPr algn="l"/>
-            <a:r>
-              <a:rPr sz="800" b="0">
+          <p:cNvPr id="63" name="TextBox 62"/>
+          <p:cNvSpPr txBox="1"/>
+          <p:nvPr/>
+        </p:nvSpPr>
+        <p:spPr>
+          <a:xfrm>
+            <a:off x="6227064" y="3611879"/>
+            <a:ext cx="2724912" cy="237744"/>
+          </a:xfrm>
+          <a:prstGeom prst="rect">
+            <a:avLst/>
+          </a:prstGeom>
+          <a:noFill/>
+        </p:spPr>
+        <p:txBody>
+          <a:bodyPr wrap="square">
+            <a:spAutoFit/>
+          </a:bodyPr>
+          <a:lstStyle/>
+          <a:p>
+            <a:pPr algn="l"/>
+            <a:r>
+              <a:rPr sz="950" b="1">
+                <a:solidFill>
+                  <a:srgbClr val="44CCEE"/>
+                </a:solidFill>
+                <a:latin typeface="メイリオ"/>
+              </a:rPr>
+              <a:t>コンプ体験</a:t>
+            </a:r>
+          </a:p>
+        </p:txBody>
+      </p:sp>
+      <p:sp>
+        <p:nvSpPr>
+          <p:cNvPr id="64" name="TextBox 63"/>
+          <p:cNvSpPr txBox="1"/>
+          <p:nvPr/>
+        </p:nvSpPr>
+        <p:spPr>
+          <a:xfrm>
+            <a:off x="6227064" y="3840480"/>
+            <a:ext cx="2724912" cy="347472"/>
+          </a:xfrm>
+          <a:prstGeom prst="rect">
+            <a:avLst/>
+          </a:prstGeom>
+          <a:noFill/>
+        </p:spPr>
+        <p:txBody>
+          <a:bodyPr wrap="square">
+            <a:spAutoFit/>
+          </a:bodyPr>
+          <a:lstStyle/>
+          <a:p>
+            <a:pPr algn="l"/>
+            <a:r>
+              <a:rPr sz="750" b="0">
                 <a:solidFill>
                   <a:srgbClr val="BBBBCC"/>
                 </a:solidFill>
                 <a:latin typeface="メイリオ"/>
               </a:rPr>
-              <a:t>ボーナス4種：50G・30G+α・ベルナビ8回・30Gの4タイプ</a:t>
-            </a:r>
-          </a:p>
-        </p:txBody>
-      </p:sp>
-      <p:sp>
-        <p:nvSpPr>
-          <p:cNvPr id="61" name="Rectangle 60"/>
-          <p:cNvSpPr/>
-          <p:nvPr/>
-        </p:nvSpPr>
-        <p:spPr>
-          <a:xfrm>
-            <a:off x="228600" y="4087368"/>
-            <a:ext cx="128016" cy="128016"/>
-          </a:xfrm>
-          <a:prstGeom prst="rect">
-            <a:avLst/>
-          </a:prstGeom>
-          <a:solidFill>
-            <a:srgbClr val="FFD700"/>
-          </a:solidFill>
-          <a:ln>
-            <a:noFill/>
-          </a:ln>
-        </p:spPr>
-        <p:style>
-          <a:lnRef idx="1">
-            <a:schemeClr val="accent1"/>
-          </a:lnRef>
-          <a:fillRef idx="3">
-            <a:schemeClr val="accent1"/>
-          </a:fillRef>
-          <a:effectRef idx="2">
-            <a:schemeClr val="accent1"/>
-          </a:effectRef>
-          <a:fontRef idx="minor">
-            <a:schemeClr val="lt1"/>
-          </a:fontRef>
-        </p:style>
-        <p:txBody>
-          <a:bodyPr rtlCol="0" anchor="ctr"/>
-          <a:lstStyle/>
-          <a:p>
-            <a:pPr algn="ctr"/>
-          </a:p>
-        </p:txBody>
-      </p:sp>
-      <p:sp>
-        <p:nvSpPr>
-          <p:cNvPr id="62" name="TextBox 61"/>
-          <p:cNvSpPr txBox="1"/>
-          <p:nvPr/>
-        </p:nvSpPr>
-        <p:spPr>
-          <a:xfrm>
-            <a:off x="411480" y="4032504"/>
-            <a:ext cx="8503920" cy="256032"/>
-          </a:xfrm>
-          <a:prstGeom prst="rect">
-            <a:avLst/>
-          </a:prstGeom>
-          <a:noFill/>
-        </p:spPr>
-        <p:txBody>
-          <a:bodyPr wrap="square">
-            <a:spAutoFit/>
-          </a:bodyPr>
-          <a:lstStyle/>
-          <a:p>
-            <a:pPr algn="l"/>
-            <a:r>
-              <a:rPr sz="800" b="0">
-                <a:solidFill>
-                  <a:srgbClr val="BBBBCC"/>
-                </a:solidFill>
-                <a:latin typeface="メイリオ"/>
-              </a:rPr>
-              <a:t>エンブリオイブ覚醒：ストーリー8種コンプ後に突入する上位AT</a:t>
-            </a:r>
-          </a:p>
-        </p:txBody>
-      </p:sp>
-      <p:sp>
-        <p:nvSpPr>
-          <p:cNvPr id="63" name="Rectangle 62"/>
-          <p:cNvSpPr/>
-          <p:nvPr/>
-        </p:nvSpPr>
-        <p:spPr>
-          <a:xfrm>
-            <a:off x="228600" y="4306824"/>
-            <a:ext cx="128016" cy="128016"/>
-          </a:xfrm>
-          <a:prstGeom prst="rect">
-            <a:avLst/>
-          </a:prstGeom>
-          <a:solidFill>
-            <a:srgbClr val="FF5555"/>
-          </a:solidFill>
-          <a:ln>
-            <a:noFill/>
-          </a:ln>
-        </p:spPr>
-        <p:style>
-          <a:lnRef idx="1">
-            <a:schemeClr val="accent1"/>
-          </a:lnRef>
-          <a:fillRef idx="3">
-            <a:schemeClr val="accent1"/>
-          </a:fillRef>
-          <a:effectRef idx="2">
-            <a:schemeClr val="accent1"/>
-          </a:effectRef>
-          <a:fontRef idx="minor">
-            <a:schemeClr val="lt1"/>
-          </a:fontRef>
-        </p:style>
-        <p:txBody>
-          <a:bodyPr rtlCol="0" anchor="ctr"/>
-          <a:lstStyle/>
-          <a:p>
-            <a:pPr algn="ctr"/>
-          </a:p>
-        </p:txBody>
-      </p:sp>
-      <p:sp>
-        <p:nvSpPr>
-          <p:cNvPr id="64" name="TextBox 63"/>
-          <p:cNvSpPr txBox="1"/>
-          <p:nvPr/>
-        </p:nvSpPr>
-        <p:spPr>
-          <a:xfrm>
-            <a:off x="411480" y="4251960"/>
-            <a:ext cx="8503920" cy="256032"/>
-          </a:xfrm>
-          <a:prstGeom prst="rect">
-            <a:avLst/>
-          </a:prstGeom>
-          <a:noFill/>
-        </p:spPr>
-        <p:txBody>
-          <a:bodyPr wrap="square">
-            <a:spAutoFit/>
-          </a:bodyPr>
-          <a:lstStyle/>
-          <a:p>
-            <a:pPr algn="l"/>
-            <a:r>
-              <a:rPr sz="800" b="0">
-                <a:solidFill>
-                  <a:srgbClr val="BBBBCC"/>
-                </a:solidFill>
-                <a:latin typeface="メイリオ"/>
-              </a:rPr>
-              <a:t>ドッペルモード：穢れ解放で突入。AT終了まで高上乗せ継続</a:t>
+              <a:t>8ストーリーをATで収集してエンディングへ。明確なゴールがAT継続モチベを維持</a:t>
             </a:r>
           </a:p>
         </p:txBody>
@@ -7617,22 +7606,22 @@
         <p:spPr>
           <a:xfrm>
             <a:off x="137160" y="73152"/>
-            <a:ext cx="6858000" cy="502920"/>
-          </a:xfrm>
-          <a:prstGeom prst="rect">
-            <a:avLst/>
-          </a:prstGeom>
-          <a:noFill/>
-        </p:spPr>
-        <p:txBody>
-          <a:bodyPr wrap="square">
-            <a:spAutoFit/>
-          </a:bodyPr>
-          <a:lstStyle/>
-          <a:p>
-            <a:pPr algn="l"/>
-            <a:r>
-              <a:rPr sz="2000" b="1">
+            <a:ext cx="7772400" cy="502920"/>
+          </a:xfrm>
+          <a:prstGeom prst="rect">
+            <a:avLst/>
+          </a:prstGeom>
+          <a:noFill/>
+        </p:spPr>
+        <p:txBody>
+          <a:bodyPr wrap="square">
+            <a:spAutoFit/>
+          </a:bodyPr>
+          <a:lstStyle/>
+          <a:p>
+            <a:pPr algn="l"/>
+            <a:r>
+              <a:rPr sz="1600" b="1">
                 <a:solidFill>
                   <a:srgbClr val="FFFFFF"/>
                 </a:solidFill>
@@ -9020,22 +9009,22 @@
         <p:spPr>
           <a:xfrm>
             <a:off x="137160" y="73152"/>
-            <a:ext cx="6858000" cy="502920"/>
-          </a:xfrm>
-          <a:prstGeom prst="rect">
-            <a:avLst/>
-          </a:prstGeom>
-          <a:noFill/>
-        </p:spPr>
-        <p:txBody>
-          <a:bodyPr wrap="square">
-            <a:spAutoFit/>
-          </a:bodyPr>
-          <a:lstStyle/>
-          <a:p>
-            <a:pPr algn="l"/>
-            <a:r>
-              <a:rPr sz="2000" b="1">
+            <a:ext cx="7772400" cy="502920"/>
+          </a:xfrm>
+          <a:prstGeom prst="rect">
+            <a:avLst/>
+          </a:prstGeom>
+          <a:noFill/>
+        </p:spPr>
+        <p:txBody>
+          <a:bodyPr wrap="square">
+            <a:spAutoFit/>
+          </a:bodyPr>
+          <a:lstStyle/>
+          <a:p>
+            <a:pPr algn="l"/>
+            <a:r>
+              <a:rPr sz="1600" b="1">
                 <a:solidFill>
                   <a:srgbClr val="FFFFFF"/>
                 </a:solidFill>
@@ -10562,22 +10551,22 @@
         <p:spPr>
           <a:xfrm>
             <a:off x="137160" y="73152"/>
-            <a:ext cx="6858000" cy="502920"/>
-          </a:xfrm>
-          <a:prstGeom prst="rect">
-            <a:avLst/>
-          </a:prstGeom>
-          <a:noFill/>
-        </p:spPr>
-        <p:txBody>
-          <a:bodyPr wrap="square">
-            <a:spAutoFit/>
-          </a:bodyPr>
-          <a:lstStyle/>
-          <a:p>
-            <a:pPr algn="l"/>
-            <a:r>
-              <a:rPr sz="2000" b="1">
+            <a:ext cx="7772400" cy="502920"/>
+          </a:xfrm>
+          <a:prstGeom prst="rect">
+            <a:avLst/>
+          </a:prstGeom>
+          <a:noFill/>
+        </p:spPr>
+        <p:txBody>
+          <a:bodyPr wrap="square">
+            <a:spAutoFit/>
+          </a:bodyPr>
+          <a:lstStyle/>
+          <a:p>
+            <a:pPr algn="l"/>
+            <a:r>
+              <a:rPr sz="1600" b="1">
                 <a:solidFill>
                   <a:srgbClr val="FFFFFF"/>
                 </a:solidFill>
@@ -12685,22 +12674,22 @@
         <p:spPr>
           <a:xfrm>
             <a:off x="137160" y="73152"/>
-            <a:ext cx="6858000" cy="502920"/>
-          </a:xfrm>
-          <a:prstGeom prst="rect">
-            <a:avLst/>
-          </a:prstGeom>
-          <a:noFill/>
-        </p:spPr>
-        <p:txBody>
-          <a:bodyPr wrap="square">
-            <a:spAutoFit/>
-          </a:bodyPr>
-          <a:lstStyle/>
-          <a:p>
-            <a:pPr algn="l"/>
-            <a:r>
-              <a:rPr sz="2000" b="1">
+            <a:ext cx="7772400" cy="502920"/>
+          </a:xfrm>
+          <a:prstGeom prst="rect">
+            <a:avLst/>
+          </a:prstGeom>
+          <a:noFill/>
+        </p:spPr>
+        <p:txBody>
+          <a:bodyPr wrap="square">
+            <a:spAutoFit/>
+          </a:bodyPr>
+          <a:lstStyle/>
+          <a:p>
+            <a:pPr algn="l"/>
+            <a:r>
+              <a:rPr sz="1600" b="1">
                 <a:solidFill>
                   <a:srgbClr val="FFFFFF"/>
                 </a:solidFill>
@@ -13697,7 +13686,7 @@
         <p:spPr>
           <a:xfrm>
             <a:off x="5532120" y="713232"/>
-            <a:ext cx="3474720" cy="3200400"/>
+            <a:ext cx="3401568" cy="3200400"/>
           </a:xfrm>
           <a:prstGeom prst="rect">
             <a:avLst/>
@@ -13742,7 +13731,7 @@
         <p:spPr>
           <a:xfrm>
             <a:off x="5623560" y="749808"/>
-            <a:ext cx="3291840" cy="347472"/>
+            <a:ext cx="3218688" cy="347472"/>
           </a:xfrm>
           <a:prstGeom prst="rect">
             <a:avLst/>
@@ -13787,7 +13776,7 @@
         <p:spPr>
           <a:xfrm>
             <a:off x="5669280" y="768096"/>
-            <a:ext cx="3200400" cy="310896"/>
+            <a:ext cx="3127248" cy="310896"/>
           </a:xfrm>
           <a:prstGeom prst="rect">
             <a:avLst/>
@@ -13857,7 +13846,7 @@
         <p:spPr>
           <a:xfrm>
             <a:off x="7040880" y="1170432"/>
-            <a:ext cx="1920240" cy="274320"/>
+            <a:ext cx="1828800" cy="274320"/>
           </a:xfrm>
           <a:prstGeom prst="rect">
             <a:avLst/>
@@ -13927,7 +13916,7 @@
         <p:spPr>
           <a:xfrm>
             <a:off x="7040880" y="1508760"/>
-            <a:ext cx="1920240" cy="274320"/>
+            <a:ext cx="1828800" cy="274320"/>
           </a:xfrm>
           <a:prstGeom prst="rect">
             <a:avLst/>
@@ -13997,7 +13986,7 @@
         <p:spPr>
           <a:xfrm>
             <a:off x="7040880" y="1847088"/>
-            <a:ext cx="1920240" cy="274320"/>
+            <a:ext cx="1828800" cy="274320"/>
           </a:xfrm>
           <a:prstGeom prst="rect">
             <a:avLst/>
@@ -14067,7 +14056,7 @@
         <p:spPr>
           <a:xfrm>
             <a:off x="7040880" y="2185416"/>
-            <a:ext cx="1920240" cy="274320"/>
+            <a:ext cx="1828800" cy="274320"/>
           </a:xfrm>
           <a:prstGeom prst="rect">
             <a:avLst/>
@@ -14137,7 +14126,7 @@
         <p:spPr>
           <a:xfrm>
             <a:off x="7040880" y="2523744"/>
-            <a:ext cx="1920240" cy="274320"/>
+            <a:ext cx="1828800" cy="274320"/>
           </a:xfrm>
           <a:prstGeom prst="rect">
             <a:avLst/>
@@ -14172,7 +14161,7 @@
         <p:spPr>
           <a:xfrm>
             <a:off x="5623560" y="2788920"/>
-            <a:ext cx="3291840" cy="868680"/>
+            <a:ext cx="3218688" cy="868680"/>
           </a:xfrm>
           <a:prstGeom prst="rect">
             <a:avLst/>
@@ -14487,22 +14476,22 @@
         <p:spPr>
           <a:xfrm>
             <a:off x="137160" y="73152"/>
-            <a:ext cx="6858000" cy="502920"/>
-          </a:xfrm>
-          <a:prstGeom prst="rect">
-            <a:avLst/>
-          </a:prstGeom>
-          <a:noFill/>
-        </p:spPr>
-        <p:txBody>
-          <a:bodyPr wrap="square">
-            <a:spAutoFit/>
-          </a:bodyPr>
-          <a:lstStyle/>
-          <a:p>
-            <a:pPr algn="l"/>
-            <a:r>
-              <a:rPr sz="2000" b="1">
+            <a:ext cx="7772400" cy="502920"/>
+          </a:xfrm>
+          <a:prstGeom prst="rect">
+            <a:avLst/>
+          </a:prstGeom>
+          <a:noFill/>
+        </p:spPr>
+        <p:txBody>
+          <a:bodyPr wrap="square">
+            <a:spAutoFit/>
+          </a:bodyPr>
+          <a:lstStyle/>
+          <a:p>
+            <a:pPr algn="l"/>
+            <a:r>
+              <a:rPr sz="1600" b="1">
                 <a:solidFill>
                   <a:srgbClr val="FFFFFF"/>
                 </a:solidFill>
@@ -15410,22 +15399,22 @@
         <p:spPr>
           <a:xfrm>
             <a:off x="137160" y="73152"/>
-            <a:ext cx="6858000" cy="502920"/>
-          </a:xfrm>
-          <a:prstGeom prst="rect">
-            <a:avLst/>
-          </a:prstGeom>
-          <a:noFill/>
-        </p:spPr>
-        <p:txBody>
-          <a:bodyPr wrap="square">
-            <a:spAutoFit/>
-          </a:bodyPr>
-          <a:lstStyle/>
-          <a:p>
-            <a:pPr algn="l"/>
-            <a:r>
-              <a:rPr sz="2000" b="1">
+            <a:ext cx="7772400" cy="502920"/>
+          </a:xfrm>
+          <a:prstGeom prst="rect">
+            <a:avLst/>
+          </a:prstGeom>
+          <a:noFill/>
+        </p:spPr>
+        <p:txBody>
+          <a:bodyPr wrap="square">
+            <a:spAutoFit/>
+          </a:bodyPr>
+          <a:lstStyle/>
+          <a:p>
+            <a:pPr algn="l"/>
+            <a:r>
+              <a:rPr sz="1600" b="1">
                 <a:solidFill>
                   <a:srgbClr val="FFFFFF"/>
                 </a:solidFill>
@@ -17308,22 +17297,22 @@
         <p:spPr>
           <a:xfrm>
             <a:off x="137160" y="73152"/>
-            <a:ext cx="6858000" cy="502920"/>
-          </a:xfrm>
-          <a:prstGeom prst="rect">
-            <a:avLst/>
-          </a:prstGeom>
-          <a:noFill/>
-        </p:spPr>
-        <p:txBody>
-          <a:bodyPr wrap="square">
-            <a:spAutoFit/>
-          </a:bodyPr>
-          <a:lstStyle/>
-          <a:p>
-            <a:pPr algn="l"/>
-            <a:r>
-              <a:rPr sz="2000" b="1">
+            <a:ext cx="7772400" cy="502920"/>
+          </a:xfrm>
+          <a:prstGeom prst="rect">
+            <a:avLst/>
+          </a:prstGeom>
+          <a:noFill/>
+        </p:spPr>
+        <p:txBody>
+          <a:bodyPr wrap="square">
+            <a:spAutoFit/>
+          </a:bodyPr>
+          <a:lstStyle/>
+          <a:p>
+            <a:pPr algn="l"/>
+            <a:r>
+              <a:rPr sz="1600" b="1">
                 <a:solidFill>
                   <a:srgbClr val="FFFFFF"/>
                 </a:solidFill>

--- a/proposals/機種分析/まどか外伝/madoka_guide_v1.pptx
+++ b/proposals/機種分析/まどか外伝/madoka_guide_v1.pptx
@@ -3206,8 +3206,8 @@
         </p:nvSpPr>
         <p:spPr>
           <a:xfrm>
-            <a:off x="6400800" y="91440"/>
-            <a:ext cx="2560320" cy="411480"/>
+            <a:off x="5486400" y="73152"/>
+            <a:ext cx="3474720" cy="475488"/>
           </a:xfrm>
           <a:prstGeom prst="rect">
             <a:avLst/>
@@ -3222,7 +3222,7 @@
           <a:p>
             <a:pPr algn="r"/>
             <a:r>
-              <a:rPr sz="1100" b="0">
+              <a:rPr sz="1000" b="0">
                 <a:solidFill>
                   <a:srgbClr val="EE88CC"/>
                 </a:solidFill>
@@ -3241,8 +3241,798 @@
         </p:nvSpPr>
         <p:spPr>
           <a:xfrm>
-            <a:off x="5943600" y="685800"/>
-            <a:ext cx="3063240" cy="347472"/>
+            <a:off x="182880" y="713232"/>
+            <a:ext cx="4297680" cy="2103120"/>
+          </a:xfrm>
+          <a:prstGeom prst="rect">
+            <a:avLst/>
+          </a:prstGeom>
+          <a:solidFill>
+            <a:srgbClr val="14143A"/>
+          </a:solidFill>
+          <a:ln w="19050">
+            <a:solidFill>
+              <a:srgbClr val="CC44AA"/>
+            </a:solidFill>
+          </a:ln>
+        </p:spPr>
+        <p:style>
+          <a:lnRef idx="1">
+            <a:schemeClr val="accent1"/>
+          </a:lnRef>
+          <a:fillRef idx="3">
+            <a:schemeClr val="accent1"/>
+          </a:fillRef>
+          <a:effectRef idx="2">
+            <a:schemeClr val="accent1"/>
+          </a:effectRef>
+          <a:fontRef idx="minor">
+            <a:schemeClr val="lt1"/>
+          </a:fontRef>
+        </p:style>
+        <p:txBody>
+          <a:bodyPr rtlCol="0" anchor="ctr"/>
+          <a:lstStyle/>
+          <a:p>
+            <a:pPr algn="ctr"/>
+          </a:p>
+        </p:txBody>
+      </p:sp>
+      <p:sp>
+        <p:nvSpPr>
+          <p:cNvPr id="7" name="TextBox 6"/>
+          <p:cNvSpPr txBox="1"/>
+          <p:nvPr/>
+        </p:nvSpPr>
+        <p:spPr>
+          <a:xfrm>
+            <a:off x="320040" y="749808"/>
+            <a:ext cx="1828800" cy="320040"/>
+          </a:xfrm>
+          <a:prstGeom prst="rect">
+            <a:avLst/>
+          </a:prstGeom>
+          <a:noFill/>
+        </p:spPr>
+        <p:txBody>
+          <a:bodyPr wrap="square">
+            <a:spAutoFit/>
+          </a:bodyPr>
+          <a:lstStyle/>
+          <a:p>
+            <a:pPr algn="l"/>
+            <a:r>
+              <a:rPr sz="1200" b="1">
+                <a:solidFill>
+                  <a:srgbClr val="EE88CC"/>
+                </a:solidFill>
+                <a:latin typeface="游明朝"/>
+              </a:rPr>
+              <a:t>基本スペック</a:t>
+            </a:r>
+          </a:p>
+        </p:txBody>
+      </p:sp>
+      <p:sp>
+        <p:nvSpPr>
+          <p:cNvPr id="8" name="TextBox 7"/>
+          <p:cNvSpPr txBox="1"/>
+          <p:nvPr/>
+        </p:nvSpPr>
+        <p:spPr>
+          <a:xfrm>
+            <a:off x="320040" y="1078992"/>
+            <a:ext cx="1417320" cy="256032"/>
+          </a:xfrm>
+          <a:prstGeom prst="rect">
+            <a:avLst/>
+          </a:prstGeom>
+          <a:noFill/>
+        </p:spPr>
+        <p:txBody>
+          <a:bodyPr wrap="square">
+            <a:spAutoFit/>
+          </a:bodyPr>
+          <a:lstStyle/>
+          <a:p>
+            <a:pPr algn="l"/>
+            <a:r>
+              <a:rPr sz="900" b="1">
+                <a:solidFill>
+                  <a:srgbClr val="EE88CC"/>
+                </a:solidFill>
+                <a:latin typeface="メイリオ"/>
+              </a:rPr>
+              <a:t>◆ メーカー：</a:t>
+            </a:r>
+          </a:p>
+        </p:txBody>
+      </p:sp>
+      <p:sp>
+        <p:nvSpPr>
+          <p:cNvPr id="9" name="TextBox 8"/>
+          <p:cNvSpPr txBox="1"/>
+          <p:nvPr/>
+        </p:nvSpPr>
+        <p:spPr>
+          <a:xfrm>
+            <a:off x="1719072" y="1078992"/>
+            <a:ext cx="2606040" cy="256032"/>
+          </a:xfrm>
+          <a:prstGeom prst="rect">
+            <a:avLst/>
+          </a:prstGeom>
+          <a:noFill/>
+        </p:spPr>
+        <p:txBody>
+          <a:bodyPr wrap="square">
+            <a:spAutoFit/>
+          </a:bodyPr>
+          <a:lstStyle/>
+          <a:p>
+            <a:pPr algn="l"/>
+            <a:r>
+              <a:rPr sz="900" b="0">
+                <a:solidFill>
+                  <a:srgbClr val="FFFFFF"/>
+                </a:solidFill>
+                <a:latin typeface="メイリオ"/>
+              </a:rPr>
+              <a:t>ミズホ（ユニバーサルエンタ）</a:t>
+            </a:r>
+          </a:p>
+        </p:txBody>
+      </p:sp>
+      <p:sp>
+        <p:nvSpPr>
+          <p:cNvPr id="10" name="TextBox 9"/>
+          <p:cNvSpPr txBox="1"/>
+          <p:nvPr/>
+        </p:nvSpPr>
+        <p:spPr>
+          <a:xfrm>
+            <a:off x="320040" y="1335024"/>
+            <a:ext cx="1417320" cy="256032"/>
+          </a:xfrm>
+          <a:prstGeom prst="rect">
+            <a:avLst/>
+          </a:prstGeom>
+          <a:noFill/>
+        </p:spPr>
+        <p:txBody>
+          <a:bodyPr wrap="square">
+            <a:spAutoFit/>
+          </a:bodyPr>
+          <a:lstStyle/>
+          <a:p>
+            <a:pPr algn="l"/>
+            <a:r>
+              <a:rPr sz="900" b="1">
+                <a:solidFill>
+                  <a:srgbClr val="EE88CC"/>
+                </a:solidFill>
+                <a:latin typeface="メイリオ"/>
+              </a:rPr>
+              <a:t>◆ 導入日：</a:t>
+            </a:r>
+          </a:p>
+        </p:txBody>
+      </p:sp>
+      <p:sp>
+        <p:nvSpPr>
+          <p:cNvPr id="11" name="TextBox 10"/>
+          <p:cNvSpPr txBox="1"/>
+          <p:nvPr/>
+        </p:nvSpPr>
+        <p:spPr>
+          <a:xfrm>
+            <a:off x="1719072" y="1335024"/>
+            <a:ext cx="2606040" cy="256032"/>
+          </a:xfrm>
+          <a:prstGeom prst="rect">
+            <a:avLst/>
+          </a:prstGeom>
+          <a:noFill/>
+        </p:spPr>
+        <p:txBody>
+          <a:bodyPr wrap="square">
+            <a:spAutoFit/>
+          </a:bodyPr>
+          <a:lstStyle/>
+          <a:p>
+            <a:pPr algn="l"/>
+            <a:r>
+              <a:rPr sz="900" b="0">
+                <a:solidFill>
+                  <a:srgbClr val="FFFFFF"/>
+                </a:solidFill>
+                <a:latin typeface="メイリオ"/>
+              </a:rPr>
+              <a:t>2025年4月7日</a:t>
+            </a:r>
+          </a:p>
+        </p:txBody>
+      </p:sp>
+      <p:sp>
+        <p:nvSpPr>
+          <p:cNvPr id="12" name="TextBox 11"/>
+          <p:cNvSpPr txBox="1"/>
+          <p:nvPr/>
+        </p:nvSpPr>
+        <p:spPr>
+          <a:xfrm>
+            <a:off x="320040" y="1591056"/>
+            <a:ext cx="1417320" cy="256032"/>
+          </a:xfrm>
+          <a:prstGeom prst="rect">
+            <a:avLst/>
+          </a:prstGeom>
+          <a:noFill/>
+        </p:spPr>
+        <p:txBody>
+          <a:bodyPr wrap="square">
+            <a:spAutoFit/>
+          </a:bodyPr>
+          <a:lstStyle/>
+          <a:p>
+            <a:pPr algn="l"/>
+            <a:r>
+              <a:rPr sz="900" b="1">
+                <a:solidFill>
+                  <a:srgbClr val="EE88CC"/>
+                </a:solidFill>
+                <a:latin typeface="メイリオ"/>
+              </a:rPr>
+              <a:t>◆ 純増：</a:t>
+            </a:r>
+          </a:p>
+        </p:txBody>
+      </p:sp>
+      <p:sp>
+        <p:nvSpPr>
+          <p:cNvPr id="13" name="TextBox 12"/>
+          <p:cNvSpPr txBox="1"/>
+          <p:nvPr/>
+        </p:nvSpPr>
+        <p:spPr>
+          <a:xfrm>
+            <a:off x="1719072" y="1591056"/>
+            <a:ext cx="2606040" cy="256032"/>
+          </a:xfrm>
+          <a:prstGeom prst="rect">
+            <a:avLst/>
+          </a:prstGeom>
+          <a:noFill/>
+        </p:spPr>
+        <p:txBody>
+          <a:bodyPr wrap="square">
+            <a:spAutoFit/>
+          </a:bodyPr>
+          <a:lstStyle/>
+          <a:p>
+            <a:pPr algn="l"/>
+            <a:r>
+              <a:rPr sz="900" b="0">
+                <a:solidFill>
+                  <a:srgbClr val="FFFFFF"/>
+                </a:solidFill>
+                <a:latin typeface="メイリオ"/>
+              </a:rPr>
+              <a:t>約2.6枚/G（AT中）</a:t>
+            </a:r>
+          </a:p>
+        </p:txBody>
+      </p:sp>
+      <p:sp>
+        <p:nvSpPr>
+          <p:cNvPr id="14" name="TextBox 13"/>
+          <p:cNvSpPr txBox="1"/>
+          <p:nvPr/>
+        </p:nvSpPr>
+        <p:spPr>
+          <a:xfrm>
+            <a:off x="320040" y="1847088"/>
+            <a:ext cx="1417320" cy="256032"/>
+          </a:xfrm>
+          <a:prstGeom prst="rect">
+            <a:avLst/>
+          </a:prstGeom>
+          <a:noFill/>
+        </p:spPr>
+        <p:txBody>
+          <a:bodyPr wrap="square">
+            <a:spAutoFit/>
+          </a:bodyPr>
+          <a:lstStyle/>
+          <a:p>
+            <a:pPr algn="l"/>
+            <a:r>
+              <a:rPr sz="900" b="1">
+                <a:solidFill>
+                  <a:srgbClr val="EE88CC"/>
+                </a:solidFill>
+                <a:latin typeface="メイリオ"/>
+              </a:rPr>
+              <a:t>◆ 天井：</a:t>
+            </a:r>
+          </a:p>
+        </p:txBody>
+      </p:sp>
+      <p:sp>
+        <p:nvSpPr>
+          <p:cNvPr id="15" name="TextBox 14"/>
+          <p:cNvSpPr txBox="1"/>
+          <p:nvPr/>
+        </p:nvSpPr>
+        <p:spPr>
+          <a:xfrm>
+            <a:off x="1719072" y="1847088"/>
+            <a:ext cx="2606040" cy="256032"/>
+          </a:xfrm>
+          <a:prstGeom prst="rect">
+            <a:avLst/>
+          </a:prstGeom>
+          <a:noFill/>
+        </p:spPr>
+        <p:txBody>
+          <a:bodyPr wrap="square">
+            <a:spAutoFit/>
+          </a:bodyPr>
+          <a:lstStyle/>
+          <a:p>
+            <a:pPr algn="l"/>
+            <a:r>
+              <a:rPr sz="900" b="0">
+                <a:solidFill>
+                  <a:srgbClr val="FFFFFF"/>
+                </a:solidFill>
+                <a:latin typeface="メイリオ"/>
+              </a:rPr>
+              <a:t>ボーナス間950pt+α</a:t>
+            </a:r>
+          </a:p>
+        </p:txBody>
+      </p:sp>
+      <p:sp>
+        <p:nvSpPr>
+          <p:cNvPr id="16" name="TextBox 15"/>
+          <p:cNvSpPr txBox="1"/>
+          <p:nvPr/>
+        </p:nvSpPr>
+        <p:spPr>
+          <a:xfrm>
+            <a:off x="320040" y="2103120"/>
+            <a:ext cx="1417320" cy="256032"/>
+          </a:xfrm>
+          <a:prstGeom prst="rect">
+            <a:avLst/>
+          </a:prstGeom>
+          <a:noFill/>
+        </p:spPr>
+        <p:txBody>
+          <a:bodyPr wrap="square">
+            <a:spAutoFit/>
+          </a:bodyPr>
+          <a:lstStyle/>
+          <a:p>
+            <a:pPr algn="l"/>
+            <a:r>
+              <a:rPr sz="900" b="1">
+                <a:solidFill>
+                  <a:srgbClr val="EE88CC"/>
+                </a:solidFill>
+                <a:latin typeface="メイリオ"/>
+              </a:rPr>
+              <a:t>◆ 機械割：</a:t>
+            </a:r>
+          </a:p>
+        </p:txBody>
+      </p:sp>
+      <p:sp>
+        <p:nvSpPr>
+          <p:cNvPr id="17" name="TextBox 16"/>
+          <p:cNvSpPr txBox="1"/>
+          <p:nvPr/>
+        </p:nvSpPr>
+        <p:spPr>
+          <a:xfrm>
+            <a:off x="1719072" y="2103120"/>
+            <a:ext cx="2606040" cy="256032"/>
+          </a:xfrm>
+          <a:prstGeom prst="rect">
+            <a:avLst/>
+          </a:prstGeom>
+          <a:noFill/>
+        </p:spPr>
+        <p:txBody>
+          <a:bodyPr wrap="square">
+            <a:spAutoFit/>
+          </a:bodyPr>
+          <a:lstStyle/>
+          <a:p>
+            <a:pPr algn="l"/>
+            <a:r>
+              <a:rPr sz="900" b="0">
+                <a:solidFill>
+                  <a:srgbClr val="FFFFFF"/>
+                </a:solidFill>
+                <a:latin typeface="メイリオ"/>
+              </a:rPr>
+              <a:t>97.6〜114.9%（設定1〜6）</a:t>
+            </a:r>
+          </a:p>
+        </p:txBody>
+      </p:sp>
+      <p:sp>
+        <p:nvSpPr>
+          <p:cNvPr id="18" name="TextBox 17"/>
+          <p:cNvSpPr txBox="1"/>
+          <p:nvPr/>
+        </p:nvSpPr>
+        <p:spPr>
+          <a:xfrm>
+            <a:off x="320040" y="2359152"/>
+            <a:ext cx="1417320" cy="256032"/>
+          </a:xfrm>
+          <a:prstGeom prst="rect">
+            <a:avLst/>
+          </a:prstGeom>
+          <a:noFill/>
+        </p:spPr>
+        <p:txBody>
+          <a:bodyPr wrap="square">
+            <a:spAutoFit/>
+          </a:bodyPr>
+          <a:lstStyle/>
+          <a:p>
+            <a:pPr algn="l"/>
+            <a:r>
+              <a:rPr sz="900" b="1">
+                <a:solidFill>
+                  <a:srgbClr val="EE88CC"/>
+                </a:solidFill>
+                <a:latin typeface="メイリオ"/>
+              </a:rPr>
+              <a:t>◆ AT確率：</a:t>
+            </a:r>
+          </a:p>
+        </p:txBody>
+      </p:sp>
+      <p:sp>
+        <p:nvSpPr>
+          <p:cNvPr id="19" name="TextBox 18"/>
+          <p:cNvSpPr txBox="1"/>
+          <p:nvPr/>
+        </p:nvSpPr>
+        <p:spPr>
+          <a:xfrm>
+            <a:off x="1719072" y="2359152"/>
+            <a:ext cx="2606040" cy="256032"/>
+          </a:xfrm>
+          <a:prstGeom prst="rect">
+            <a:avLst/>
+          </a:prstGeom>
+          <a:noFill/>
+        </p:spPr>
+        <p:txBody>
+          <a:bodyPr wrap="square">
+            <a:spAutoFit/>
+          </a:bodyPr>
+          <a:lstStyle/>
+          <a:p>
+            <a:pPr algn="l"/>
+            <a:r>
+              <a:rPr sz="900" b="0">
+                <a:solidFill>
+                  <a:srgbClr val="FFFFFF"/>
+                </a:solidFill>
+                <a:latin typeface="メイリオ"/>
+              </a:rPr>
+              <a:t>1/654.6〜1/416.7</a:t>
+            </a:r>
+          </a:p>
+        </p:txBody>
+      </p:sp>
+      <p:sp>
+        <p:nvSpPr>
+          <p:cNvPr id="20" name="Rectangle 19"/>
+          <p:cNvSpPr/>
+          <p:nvPr/>
+        </p:nvSpPr>
+        <p:spPr>
+          <a:xfrm>
+            <a:off x="4709160" y="713232"/>
+            <a:ext cx="4251960" cy="2103120"/>
+          </a:xfrm>
+          <a:prstGeom prst="rect">
+            <a:avLst/>
+          </a:prstGeom>
+          <a:solidFill>
+            <a:srgbClr val="14143A"/>
+          </a:solidFill>
+          <a:ln w="19050">
+            <a:solidFill>
+              <a:srgbClr val="44CCEE"/>
+            </a:solidFill>
+          </a:ln>
+        </p:spPr>
+        <p:style>
+          <a:lnRef idx="1">
+            <a:schemeClr val="accent1"/>
+          </a:lnRef>
+          <a:fillRef idx="3">
+            <a:schemeClr val="accent1"/>
+          </a:fillRef>
+          <a:effectRef idx="2">
+            <a:schemeClr val="accent1"/>
+          </a:effectRef>
+          <a:fontRef idx="minor">
+            <a:schemeClr val="lt1"/>
+          </a:fontRef>
+        </p:style>
+        <p:txBody>
+          <a:bodyPr rtlCol="0" anchor="ctr"/>
+          <a:lstStyle/>
+          <a:p>
+            <a:pPr algn="ctr"/>
+          </a:p>
+        </p:txBody>
+      </p:sp>
+      <p:sp>
+        <p:nvSpPr>
+          <p:cNvPr id="21" name="TextBox 20"/>
+          <p:cNvSpPr txBox="1"/>
+          <p:nvPr/>
+        </p:nvSpPr>
+        <p:spPr>
+          <a:xfrm>
+            <a:off x="4846320" y="749808"/>
+            <a:ext cx="3200400" cy="320040"/>
+          </a:xfrm>
+          <a:prstGeom prst="rect">
+            <a:avLst/>
+          </a:prstGeom>
+          <a:noFill/>
+        </p:spPr>
+        <p:txBody>
+          <a:bodyPr wrap="square">
+            <a:spAutoFit/>
+          </a:bodyPr>
+          <a:lstStyle/>
+          <a:p>
+            <a:pPr algn="l"/>
+            <a:r>
+              <a:rPr sz="1200" b="1">
+                <a:solidFill>
+                  <a:srgbClr val="44CCEE"/>
+                </a:solidFill>
+                <a:latin typeface="游明朝"/>
+              </a:rPr>
+              <a:t>この台の3ポイント</a:t>
+            </a:r>
+          </a:p>
+        </p:txBody>
+      </p:sp>
+      <p:sp>
+        <p:nvSpPr>
+          <p:cNvPr id="22" name="TextBox 21"/>
+          <p:cNvSpPr txBox="1"/>
+          <p:nvPr/>
+        </p:nvSpPr>
+        <p:spPr>
+          <a:xfrm>
+            <a:off x="4846320" y="1078992"/>
+            <a:ext cx="3931920" cy="256032"/>
+          </a:xfrm>
+          <a:prstGeom prst="rect">
+            <a:avLst/>
+          </a:prstGeom>
+          <a:noFill/>
+        </p:spPr>
+        <p:txBody>
+          <a:bodyPr wrap="square">
+            <a:spAutoFit/>
+          </a:bodyPr>
+          <a:lstStyle/>
+          <a:p>
+            <a:pPr algn="l"/>
+            <a:r>
+              <a:rPr sz="1000" b="1">
+                <a:solidFill>
+                  <a:srgbClr val="FFD700"/>
+                </a:solidFill>
+                <a:latin typeface="メイリオ"/>
+              </a:rPr>
+              <a:t>① ストーリー×コンプリート体験</a:t>
+            </a:r>
+          </a:p>
+        </p:txBody>
+      </p:sp>
+      <p:sp>
+        <p:nvSpPr>
+          <p:cNvPr id="23" name="TextBox 22"/>
+          <p:cNvSpPr txBox="1"/>
+          <p:nvPr/>
+        </p:nvSpPr>
+        <p:spPr>
+          <a:xfrm>
+            <a:off x="4846320" y="1335024"/>
+            <a:ext cx="3931920" cy="237744"/>
+          </a:xfrm>
+          <a:prstGeom prst="rect">
+            <a:avLst/>
+          </a:prstGeom>
+          <a:noFill/>
+        </p:spPr>
+        <p:txBody>
+          <a:bodyPr wrap="square">
+            <a:spAutoFit/>
+          </a:bodyPr>
+          <a:lstStyle/>
+          <a:p>
+            <a:pPr algn="l"/>
+            <a:r>
+              <a:rPr sz="800" b="0">
+                <a:solidFill>
+                  <a:srgbClr val="BBBBCC"/>
+                </a:solidFill>
+                <a:latin typeface="メイリオ"/>
+              </a:rPr>
+              <a:t>8種ストーリーを集めてエンディングへ到達する物語体験型AT</a:t>
+            </a:r>
+          </a:p>
+        </p:txBody>
+      </p:sp>
+      <p:sp>
+        <p:nvSpPr>
+          <p:cNvPr id="24" name="TextBox 23"/>
+          <p:cNvSpPr txBox="1"/>
+          <p:nvPr/>
+        </p:nvSpPr>
+        <p:spPr>
+          <a:xfrm>
+            <a:off x="4846320" y="1572768"/>
+            <a:ext cx="3931920" cy="256032"/>
+          </a:xfrm>
+          <a:prstGeom prst="rect">
+            <a:avLst/>
+          </a:prstGeom>
+          <a:noFill/>
+        </p:spPr>
+        <p:txBody>
+          <a:bodyPr wrap="square">
+            <a:spAutoFit/>
+          </a:bodyPr>
+          <a:lstStyle/>
+          <a:p>
+            <a:pPr algn="l"/>
+            <a:r>
+              <a:rPr sz="1000" b="1">
+                <a:solidFill>
+                  <a:srgbClr val="FFD700"/>
+                </a:solidFill>
+                <a:latin typeface="メイリオ"/>
+              </a:rPr>
+              <a:t>② 穢れシステム「ドッペルモード」</a:t>
+            </a:r>
+          </a:p>
+        </p:txBody>
+      </p:sp>
+      <p:sp>
+        <p:nvSpPr>
+          <p:cNvPr id="25" name="TextBox 24"/>
+          <p:cNvSpPr txBox="1"/>
+          <p:nvPr/>
+        </p:nvSpPr>
+        <p:spPr>
+          <a:xfrm>
+            <a:off x="4846320" y="1828800"/>
+            <a:ext cx="3931920" cy="237744"/>
+          </a:xfrm>
+          <a:prstGeom prst="rect">
+            <a:avLst/>
+          </a:prstGeom>
+          <a:noFill/>
+        </p:spPr>
+        <p:txBody>
+          <a:bodyPr wrap="square">
+            <a:spAutoFit/>
+          </a:bodyPr>
+          <a:lstStyle/>
+          <a:p>
+            <a:pPr algn="l"/>
+            <a:r>
+              <a:rPr sz="800" b="0">
+                <a:solidFill>
+                  <a:srgbClr val="BBBBCC"/>
+                </a:solidFill>
+                <a:latin typeface="メイリオ"/>
+              </a:rPr>
+              <a:t>AT中に穢れが溜まると期待枚数3000枚超の爆発モードへ</a:t>
+            </a:r>
+          </a:p>
+        </p:txBody>
+      </p:sp>
+      <p:sp>
+        <p:nvSpPr>
+          <p:cNvPr id="26" name="TextBox 25"/>
+          <p:cNvSpPr txBox="1"/>
+          <p:nvPr/>
+        </p:nvSpPr>
+        <p:spPr>
+          <a:xfrm>
+            <a:off x="4846320" y="2066543"/>
+            <a:ext cx="3931920" cy="256032"/>
+          </a:xfrm>
+          <a:prstGeom prst="rect">
+            <a:avLst/>
+          </a:prstGeom>
+          <a:noFill/>
+        </p:spPr>
+        <p:txBody>
+          <a:bodyPr wrap="square">
+            <a:spAutoFit/>
+          </a:bodyPr>
+          <a:lstStyle/>
+          <a:p>
+            <a:pPr algn="l"/>
+            <a:r>
+              <a:rPr sz="1000" b="1">
+                <a:solidFill>
+                  <a:srgbClr val="FFD700"/>
+                </a:solidFill>
+                <a:latin typeface="メイリオ"/>
+              </a:rPr>
+              <a:t>③ まどマギ世界観を完全再現</a:t>
+            </a:r>
+          </a:p>
+        </p:txBody>
+      </p:sp>
+      <p:sp>
+        <p:nvSpPr>
+          <p:cNvPr id="27" name="TextBox 26"/>
+          <p:cNvSpPr txBox="1"/>
+          <p:nvPr/>
+        </p:nvSpPr>
+        <p:spPr>
+          <a:xfrm>
+            <a:off x="4846320" y="2322576"/>
+            <a:ext cx="3931920" cy="237744"/>
+          </a:xfrm>
+          <a:prstGeom prst="rect">
+            <a:avLst/>
+          </a:prstGeom>
+          <a:noFill/>
+        </p:spPr>
+        <p:txBody>
+          <a:bodyPr wrap="square">
+            <a:spAutoFit/>
+          </a:bodyPr>
+          <a:lstStyle/>
+          <a:p>
+            <a:pPr algn="l"/>
+            <a:r>
+              <a:rPr sz="800" b="0">
+                <a:solidFill>
+                  <a:srgbClr val="BBBBCC"/>
+                </a:solidFill>
+                <a:latin typeface="メイリオ"/>
+              </a:rPr>
+              <a:t>初代ファン向けサウンド・演出・キャラが深く作り込まれた完成度</a:t>
+            </a:r>
+          </a:p>
+        </p:txBody>
+      </p:sp>
+      <p:sp>
+        <p:nvSpPr>
+          <p:cNvPr id="28" name="Rectangle 27"/>
+          <p:cNvSpPr/>
+          <p:nvPr/>
+        </p:nvSpPr>
+        <p:spPr>
+          <a:xfrm>
+            <a:off x="4800600" y="2596896"/>
+            <a:ext cx="4069080" cy="201168"/>
           </a:xfrm>
           <a:prstGeom prst="rect">
             <a:avLst/>
@@ -3280,14 +4070,14 @@
       </p:sp>
       <p:sp>
         <p:nvSpPr>
-          <p:cNvPr id="7" name="TextBox 6"/>
-          <p:cNvSpPr txBox="1"/>
-          <p:nvPr/>
-        </p:nvSpPr>
-        <p:spPr>
-          <a:xfrm>
-            <a:off x="5989320" y="704088"/>
-            <a:ext cx="2971800" cy="310896"/>
+          <p:cNvPr id="29" name="TextBox 28"/>
+          <p:cNvSpPr txBox="1"/>
+          <p:nvPr/>
+        </p:nvSpPr>
+        <p:spPr>
+          <a:xfrm>
+            <a:off x="4846320" y="2615184"/>
+            <a:ext cx="3977640" cy="164592"/>
           </a:xfrm>
           <a:prstGeom prst="rect">
             <a:avLst/>
@@ -3309,796 +4099,6 @@
                 <a:latin typeface="メイリオ"/>
               </a:rPr>
               <a:t>パチスロアワード 2025 SILVER</a:t>
-            </a:r>
-          </a:p>
-        </p:txBody>
-      </p:sp>
-      <p:sp>
-        <p:nvSpPr>
-          <p:cNvPr id="8" name="Rectangle 7"/>
-          <p:cNvSpPr/>
-          <p:nvPr/>
-        </p:nvSpPr>
-        <p:spPr>
-          <a:xfrm>
-            <a:off x="182880" y="713232"/>
-            <a:ext cx="4297680" cy="1783080"/>
-          </a:xfrm>
-          <a:prstGeom prst="rect">
-            <a:avLst/>
-          </a:prstGeom>
-          <a:solidFill>
-            <a:srgbClr val="14143A"/>
-          </a:solidFill>
-          <a:ln w="19050">
-            <a:solidFill>
-              <a:srgbClr val="CC44AA"/>
-            </a:solidFill>
-          </a:ln>
-        </p:spPr>
-        <p:style>
-          <a:lnRef idx="1">
-            <a:schemeClr val="accent1"/>
-          </a:lnRef>
-          <a:fillRef idx="3">
-            <a:schemeClr val="accent1"/>
-          </a:fillRef>
-          <a:effectRef idx="2">
-            <a:schemeClr val="accent1"/>
-          </a:effectRef>
-          <a:fontRef idx="minor">
-            <a:schemeClr val="lt1"/>
-          </a:fontRef>
-        </p:style>
-        <p:txBody>
-          <a:bodyPr rtlCol="0" anchor="ctr"/>
-          <a:lstStyle/>
-          <a:p>
-            <a:pPr algn="ctr"/>
-          </a:p>
-        </p:txBody>
-      </p:sp>
-      <p:sp>
-        <p:nvSpPr>
-          <p:cNvPr id="9" name="TextBox 8"/>
-          <p:cNvSpPr txBox="1"/>
-          <p:nvPr/>
-        </p:nvSpPr>
-        <p:spPr>
-          <a:xfrm>
-            <a:off x="320040" y="749808"/>
-            <a:ext cx="1828800" cy="320040"/>
-          </a:xfrm>
-          <a:prstGeom prst="rect">
-            <a:avLst/>
-          </a:prstGeom>
-          <a:noFill/>
-        </p:spPr>
-        <p:txBody>
-          <a:bodyPr wrap="square">
-            <a:spAutoFit/>
-          </a:bodyPr>
-          <a:lstStyle/>
-          <a:p>
-            <a:pPr algn="l"/>
-            <a:r>
-              <a:rPr sz="1200" b="1">
-                <a:solidFill>
-                  <a:srgbClr val="EE88CC"/>
-                </a:solidFill>
-                <a:latin typeface="游明朝"/>
-              </a:rPr>
-              <a:t>基本スペック</a:t>
-            </a:r>
-          </a:p>
-        </p:txBody>
-      </p:sp>
-      <p:sp>
-        <p:nvSpPr>
-          <p:cNvPr id="10" name="TextBox 9"/>
-          <p:cNvSpPr txBox="1"/>
-          <p:nvPr/>
-        </p:nvSpPr>
-        <p:spPr>
-          <a:xfrm>
-            <a:off x="320040" y="1078992"/>
-            <a:ext cx="1417320" cy="256032"/>
-          </a:xfrm>
-          <a:prstGeom prst="rect">
-            <a:avLst/>
-          </a:prstGeom>
-          <a:noFill/>
-        </p:spPr>
-        <p:txBody>
-          <a:bodyPr wrap="square">
-            <a:spAutoFit/>
-          </a:bodyPr>
-          <a:lstStyle/>
-          <a:p>
-            <a:pPr algn="l"/>
-            <a:r>
-              <a:rPr sz="900" b="1">
-                <a:solidFill>
-                  <a:srgbClr val="EE88CC"/>
-                </a:solidFill>
-                <a:latin typeface="メイリオ"/>
-              </a:rPr>
-              <a:t>◆ メーカー：</a:t>
-            </a:r>
-          </a:p>
-        </p:txBody>
-      </p:sp>
-      <p:sp>
-        <p:nvSpPr>
-          <p:cNvPr id="11" name="TextBox 10"/>
-          <p:cNvSpPr txBox="1"/>
-          <p:nvPr/>
-        </p:nvSpPr>
-        <p:spPr>
-          <a:xfrm>
-            <a:off x="1719072" y="1078992"/>
-            <a:ext cx="2606040" cy="256032"/>
-          </a:xfrm>
-          <a:prstGeom prst="rect">
-            <a:avLst/>
-          </a:prstGeom>
-          <a:noFill/>
-        </p:spPr>
-        <p:txBody>
-          <a:bodyPr wrap="square">
-            <a:spAutoFit/>
-          </a:bodyPr>
-          <a:lstStyle/>
-          <a:p>
-            <a:pPr algn="l"/>
-            <a:r>
-              <a:rPr sz="900" b="0">
-                <a:solidFill>
-                  <a:srgbClr val="FFFFFF"/>
-                </a:solidFill>
-                <a:latin typeface="メイリオ"/>
-              </a:rPr>
-              <a:t>ミズホ（ユニバーサルエンタ）</a:t>
-            </a:r>
-          </a:p>
-        </p:txBody>
-      </p:sp>
-      <p:sp>
-        <p:nvSpPr>
-          <p:cNvPr id="12" name="TextBox 11"/>
-          <p:cNvSpPr txBox="1"/>
-          <p:nvPr/>
-        </p:nvSpPr>
-        <p:spPr>
-          <a:xfrm>
-            <a:off x="320040" y="1362456"/>
-            <a:ext cx="1417320" cy="256032"/>
-          </a:xfrm>
-          <a:prstGeom prst="rect">
-            <a:avLst/>
-          </a:prstGeom>
-          <a:noFill/>
-        </p:spPr>
-        <p:txBody>
-          <a:bodyPr wrap="square">
-            <a:spAutoFit/>
-          </a:bodyPr>
-          <a:lstStyle/>
-          <a:p>
-            <a:pPr algn="l"/>
-            <a:r>
-              <a:rPr sz="900" b="1">
-                <a:solidFill>
-                  <a:srgbClr val="EE88CC"/>
-                </a:solidFill>
-                <a:latin typeface="メイリオ"/>
-              </a:rPr>
-              <a:t>◆ 導入日：</a:t>
-            </a:r>
-          </a:p>
-        </p:txBody>
-      </p:sp>
-      <p:sp>
-        <p:nvSpPr>
-          <p:cNvPr id="13" name="TextBox 12"/>
-          <p:cNvSpPr txBox="1"/>
-          <p:nvPr/>
-        </p:nvSpPr>
-        <p:spPr>
-          <a:xfrm>
-            <a:off x="1719072" y="1362456"/>
-            <a:ext cx="2606040" cy="256032"/>
-          </a:xfrm>
-          <a:prstGeom prst="rect">
-            <a:avLst/>
-          </a:prstGeom>
-          <a:noFill/>
-        </p:spPr>
-        <p:txBody>
-          <a:bodyPr wrap="square">
-            <a:spAutoFit/>
-          </a:bodyPr>
-          <a:lstStyle/>
-          <a:p>
-            <a:pPr algn="l"/>
-            <a:r>
-              <a:rPr sz="900" b="0">
-                <a:solidFill>
-                  <a:srgbClr val="FFFFFF"/>
-                </a:solidFill>
-                <a:latin typeface="メイリオ"/>
-              </a:rPr>
-              <a:t>2025年4月7日</a:t>
-            </a:r>
-          </a:p>
-        </p:txBody>
-      </p:sp>
-      <p:sp>
-        <p:nvSpPr>
-          <p:cNvPr id="14" name="TextBox 13"/>
-          <p:cNvSpPr txBox="1"/>
-          <p:nvPr/>
-        </p:nvSpPr>
-        <p:spPr>
-          <a:xfrm>
-            <a:off x="320040" y="1645920"/>
-            <a:ext cx="1417320" cy="256032"/>
-          </a:xfrm>
-          <a:prstGeom prst="rect">
-            <a:avLst/>
-          </a:prstGeom>
-          <a:noFill/>
-        </p:spPr>
-        <p:txBody>
-          <a:bodyPr wrap="square">
-            <a:spAutoFit/>
-          </a:bodyPr>
-          <a:lstStyle/>
-          <a:p>
-            <a:pPr algn="l"/>
-            <a:r>
-              <a:rPr sz="900" b="1">
-                <a:solidFill>
-                  <a:srgbClr val="EE88CC"/>
-                </a:solidFill>
-                <a:latin typeface="メイリオ"/>
-              </a:rPr>
-              <a:t>◆ 純増：</a:t>
-            </a:r>
-          </a:p>
-        </p:txBody>
-      </p:sp>
-      <p:sp>
-        <p:nvSpPr>
-          <p:cNvPr id="15" name="TextBox 14"/>
-          <p:cNvSpPr txBox="1"/>
-          <p:nvPr/>
-        </p:nvSpPr>
-        <p:spPr>
-          <a:xfrm>
-            <a:off x="1719072" y="1645920"/>
-            <a:ext cx="2606040" cy="256032"/>
-          </a:xfrm>
-          <a:prstGeom prst="rect">
-            <a:avLst/>
-          </a:prstGeom>
-          <a:noFill/>
-        </p:spPr>
-        <p:txBody>
-          <a:bodyPr wrap="square">
-            <a:spAutoFit/>
-          </a:bodyPr>
-          <a:lstStyle/>
-          <a:p>
-            <a:pPr algn="l"/>
-            <a:r>
-              <a:rPr sz="900" b="0">
-                <a:solidFill>
-                  <a:srgbClr val="FFFFFF"/>
-                </a:solidFill>
-                <a:latin typeface="メイリオ"/>
-              </a:rPr>
-              <a:t>約2.6枚/G（AT中）</a:t>
-            </a:r>
-          </a:p>
-        </p:txBody>
-      </p:sp>
-      <p:sp>
-        <p:nvSpPr>
-          <p:cNvPr id="16" name="TextBox 15"/>
-          <p:cNvSpPr txBox="1"/>
-          <p:nvPr/>
-        </p:nvSpPr>
-        <p:spPr>
-          <a:xfrm>
-            <a:off x="320040" y="1929384"/>
-            <a:ext cx="1417320" cy="256032"/>
-          </a:xfrm>
-          <a:prstGeom prst="rect">
-            <a:avLst/>
-          </a:prstGeom>
-          <a:noFill/>
-        </p:spPr>
-        <p:txBody>
-          <a:bodyPr wrap="square">
-            <a:spAutoFit/>
-          </a:bodyPr>
-          <a:lstStyle/>
-          <a:p>
-            <a:pPr algn="l"/>
-            <a:r>
-              <a:rPr sz="900" b="1">
-                <a:solidFill>
-                  <a:srgbClr val="EE88CC"/>
-                </a:solidFill>
-                <a:latin typeface="メイリオ"/>
-              </a:rPr>
-              <a:t>◆ 天井：</a:t>
-            </a:r>
-          </a:p>
-        </p:txBody>
-      </p:sp>
-      <p:sp>
-        <p:nvSpPr>
-          <p:cNvPr id="17" name="TextBox 16"/>
-          <p:cNvSpPr txBox="1"/>
-          <p:nvPr/>
-        </p:nvSpPr>
-        <p:spPr>
-          <a:xfrm>
-            <a:off x="1719072" y="1929384"/>
-            <a:ext cx="2606040" cy="256032"/>
-          </a:xfrm>
-          <a:prstGeom prst="rect">
-            <a:avLst/>
-          </a:prstGeom>
-          <a:noFill/>
-        </p:spPr>
-        <p:txBody>
-          <a:bodyPr wrap="square">
-            <a:spAutoFit/>
-          </a:bodyPr>
-          <a:lstStyle/>
-          <a:p>
-            <a:pPr algn="l"/>
-            <a:r>
-              <a:rPr sz="900" b="0">
-                <a:solidFill>
-                  <a:srgbClr val="FFFFFF"/>
-                </a:solidFill>
-                <a:latin typeface="メイリオ"/>
-              </a:rPr>
-              <a:t>ボーナス間950pt+α</a:t>
-            </a:r>
-          </a:p>
-        </p:txBody>
-      </p:sp>
-      <p:sp>
-        <p:nvSpPr>
-          <p:cNvPr id="18" name="TextBox 17"/>
-          <p:cNvSpPr txBox="1"/>
-          <p:nvPr/>
-        </p:nvSpPr>
-        <p:spPr>
-          <a:xfrm>
-            <a:off x="320040" y="2212848"/>
-            <a:ext cx="1417320" cy="256032"/>
-          </a:xfrm>
-          <a:prstGeom prst="rect">
-            <a:avLst/>
-          </a:prstGeom>
-          <a:noFill/>
-        </p:spPr>
-        <p:txBody>
-          <a:bodyPr wrap="square">
-            <a:spAutoFit/>
-          </a:bodyPr>
-          <a:lstStyle/>
-          <a:p>
-            <a:pPr algn="l"/>
-            <a:r>
-              <a:rPr sz="900" b="1">
-                <a:solidFill>
-                  <a:srgbClr val="EE88CC"/>
-                </a:solidFill>
-                <a:latin typeface="メイリオ"/>
-              </a:rPr>
-              <a:t>◆ 機械割：</a:t>
-            </a:r>
-          </a:p>
-        </p:txBody>
-      </p:sp>
-      <p:sp>
-        <p:nvSpPr>
-          <p:cNvPr id="19" name="TextBox 18"/>
-          <p:cNvSpPr txBox="1"/>
-          <p:nvPr/>
-        </p:nvSpPr>
-        <p:spPr>
-          <a:xfrm>
-            <a:off x="1719072" y="2212848"/>
-            <a:ext cx="2606040" cy="256032"/>
-          </a:xfrm>
-          <a:prstGeom prst="rect">
-            <a:avLst/>
-          </a:prstGeom>
-          <a:noFill/>
-        </p:spPr>
-        <p:txBody>
-          <a:bodyPr wrap="square">
-            <a:spAutoFit/>
-          </a:bodyPr>
-          <a:lstStyle/>
-          <a:p>
-            <a:pPr algn="l"/>
-            <a:r>
-              <a:rPr sz="900" b="0">
-                <a:solidFill>
-                  <a:srgbClr val="FFFFFF"/>
-                </a:solidFill>
-                <a:latin typeface="メイリオ"/>
-              </a:rPr>
-              <a:t>97.6〜114.9%（設定1〜6）</a:t>
-            </a:r>
-          </a:p>
-        </p:txBody>
-      </p:sp>
-      <p:sp>
-        <p:nvSpPr>
-          <p:cNvPr id="20" name="TextBox 19"/>
-          <p:cNvSpPr txBox="1"/>
-          <p:nvPr/>
-        </p:nvSpPr>
-        <p:spPr>
-          <a:xfrm>
-            <a:off x="320040" y="2496312"/>
-            <a:ext cx="1417320" cy="256032"/>
-          </a:xfrm>
-          <a:prstGeom prst="rect">
-            <a:avLst/>
-          </a:prstGeom>
-          <a:noFill/>
-        </p:spPr>
-        <p:txBody>
-          <a:bodyPr wrap="square">
-            <a:spAutoFit/>
-          </a:bodyPr>
-          <a:lstStyle/>
-          <a:p>
-            <a:pPr algn="l"/>
-            <a:r>
-              <a:rPr sz="900" b="1">
-                <a:solidFill>
-                  <a:srgbClr val="EE88CC"/>
-                </a:solidFill>
-                <a:latin typeface="メイリオ"/>
-              </a:rPr>
-              <a:t>◆ AT確率：</a:t>
-            </a:r>
-          </a:p>
-        </p:txBody>
-      </p:sp>
-      <p:sp>
-        <p:nvSpPr>
-          <p:cNvPr id="21" name="TextBox 20"/>
-          <p:cNvSpPr txBox="1"/>
-          <p:nvPr/>
-        </p:nvSpPr>
-        <p:spPr>
-          <a:xfrm>
-            <a:off x="1719072" y="2496312"/>
-            <a:ext cx="2606040" cy="256032"/>
-          </a:xfrm>
-          <a:prstGeom prst="rect">
-            <a:avLst/>
-          </a:prstGeom>
-          <a:noFill/>
-        </p:spPr>
-        <p:txBody>
-          <a:bodyPr wrap="square">
-            <a:spAutoFit/>
-          </a:bodyPr>
-          <a:lstStyle/>
-          <a:p>
-            <a:pPr algn="l"/>
-            <a:r>
-              <a:rPr sz="900" b="0">
-                <a:solidFill>
-                  <a:srgbClr val="FFFFFF"/>
-                </a:solidFill>
-                <a:latin typeface="メイリオ"/>
-              </a:rPr>
-              <a:t>1/654.6〜1/416.7</a:t>
-            </a:r>
-          </a:p>
-        </p:txBody>
-      </p:sp>
-      <p:sp>
-        <p:nvSpPr>
-          <p:cNvPr id="22" name="Rectangle 21"/>
-          <p:cNvSpPr/>
-          <p:nvPr/>
-        </p:nvSpPr>
-        <p:spPr>
-          <a:xfrm>
-            <a:off x="4709160" y="713232"/>
-            <a:ext cx="4251960" cy="1783080"/>
-          </a:xfrm>
-          <a:prstGeom prst="rect">
-            <a:avLst/>
-          </a:prstGeom>
-          <a:solidFill>
-            <a:srgbClr val="14143A"/>
-          </a:solidFill>
-          <a:ln w="19050">
-            <a:solidFill>
-              <a:srgbClr val="44CCEE"/>
-            </a:solidFill>
-          </a:ln>
-        </p:spPr>
-        <p:style>
-          <a:lnRef idx="1">
-            <a:schemeClr val="accent1"/>
-          </a:lnRef>
-          <a:fillRef idx="3">
-            <a:schemeClr val="accent1"/>
-          </a:fillRef>
-          <a:effectRef idx="2">
-            <a:schemeClr val="accent1"/>
-          </a:effectRef>
-          <a:fontRef idx="minor">
-            <a:schemeClr val="lt1"/>
-          </a:fontRef>
-        </p:style>
-        <p:txBody>
-          <a:bodyPr rtlCol="0" anchor="ctr"/>
-          <a:lstStyle/>
-          <a:p>
-            <a:pPr algn="ctr"/>
-          </a:p>
-        </p:txBody>
-      </p:sp>
-      <p:sp>
-        <p:nvSpPr>
-          <p:cNvPr id="23" name="TextBox 22"/>
-          <p:cNvSpPr txBox="1"/>
-          <p:nvPr/>
-        </p:nvSpPr>
-        <p:spPr>
-          <a:xfrm>
-            <a:off x="4846320" y="749808"/>
-            <a:ext cx="3200400" cy="320040"/>
-          </a:xfrm>
-          <a:prstGeom prst="rect">
-            <a:avLst/>
-          </a:prstGeom>
-          <a:noFill/>
-        </p:spPr>
-        <p:txBody>
-          <a:bodyPr wrap="square">
-            <a:spAutoFit/>
-          </a:bodyPr>
-          <a:lstStyle/>
-          <a:p>
-            <a:pPr algn="l"/>
-            <a:r>
-              <a:rPr sz="1200" b="1">
-                <a:solidFill>
-                  <a:srgbClr val="44CCEE"/>
-                </a:solidFill>
-                <a:latin typeface="游明朝"/>
-              </a:rPr>
-              <a:t>この台の3ポイント</a:t>
-            </a:r>
-          </a:p>
-        </p:txBody>
-      </p:sp>
-      <p:sp>
-        <p:nvSpPr>
-          <p:cNvPr id="24" name="TextBox 23"/>
-          <p:cNvSpPr txBox="1"/>
-          <p:nvPr/>
-        </p:nvSpPr>
-        <p:spPr>
-          <a:xfrm>
-            <a:off x="4846320" y="1078992"/>
-            <a:ext cx="3931920" cy="256032"/>
-          </a:xfrm>
-          <a:prstGeom prst="rect">
-            <a:avLst/>
-          </a:prstGeom>
-          <a:noFill/>
-        </p:spPr>
-        <p:txBody>
-          <a:bodyPr wrap="square">
-            <a:spAutoFit/>
-          </a:bodyPr>
-          <a:lstStyle/>
-          <a:p>
-            <a:pPr algn="l"/>
-            <a:r>
-              <a:rPr sz="1000" b="1">
-                <a:solidFill>
-                  <a:srgbClr val="FFD700"/>
-                </a:solidFill>
-                <a:latin typeface="メイリオ"/>
-              </a:rPr>
-              <a:t>① ストーリー×コンプリート体験</a:t>
-            </a:r>
-          </a:p>
-        </p:txBody>
-      </p:sp>
-      <p:sp>
-        <p:nvSpPr>
-          <p:cNvPr id="25" name="TextBox 24"/>
-          <p:cNvSpPr txBox="1"/>
-          <p:nvPr/>
-        </p:nvSpPr>
-        <p:spPr>
-          <a:xfrm>
-            <a:off x="4846320" y="1335024"/>
-            <a:ext cx="3931920" cy="237744"/>
-          </a:xfrm>
-          <a:prstGeom prst="rect">
-            <a:avLst/>
-          </a:prstGeom>
-          <a:noFill/>
-        </p:spPr>
-        <p:txBody>
-          <a:bodyPr wrap="square">
-            <a:spAutoFit/>
-          </a:bodyPr>
-          <a:lstStyle/>
-          <a:p>
-            <a:pPr algn="l"/>
-            <a:r>
-              <a:rPr sz="800" b="0">
-                <a:solidFill>
-                  <a:srgbClr val="BBBBCC"/>
-                </a:solidFill>
-                <a:latin typeface="メイリオ"/>
-              </a:rPr>
-              <a:t>8種ストーリーを集めてエンディングへ到達する物語体験型AT</a:t>
-            </a:r>
-          </a:p>
-        </p:txBody>
-      </p:sp>
-      <p:sp>
-        <p:nvSpPr>
-          <p:cNvPr id="26" name="TextBox 25"/>
-          <p:cNvSpPr txBox="1"/>
-          <p:nvPr/>
-        </p:nvSpPr>
-        <p:spPr>
-          <a:xfrm>
-            <a:off x="4846320" y="1645919"/>
-            <a:ext cx="3931920" cy="256032"/>
-          </a:xfrm>
-          <a:prstGeom prst="rect">
-            <a:avLst/>
-          </a:prstGeom>
-          <a:noFill/>
-        </p:spPr>
-        <p:txBody>
-          <a:bodyPr wrap="square">
-            <a:spAutoFit/>
-          </a:bodyPr>
-          <a:lstStyle/>
-          <a:p>
-            <a:pPr algn="l"/>
-            <a:r>
-              <a:rPr sz="1000" b="1">
-                <a:solidFill>
-                  <a:srgbClr val="FFD700"/>
-                </a:solidFill>
-                <a:latin typeface="メイリオ"/>
-              </a:rPr>
-              <a:t>② 穢れシステム「ドッペルモード」</a:t>
-            </a:r>
-          </a:p>
-        </p:txBody>
-      </p:sp>
-      <p:sp>
-        <p:nvSpPr>
-          <p:cNvPr id="27" name="TextBox 26"/>
-          <p:cNvSpPr txBox="1"/>
-          <p:nvPr/>
-        </p:nvSpPr>
-        <p:spPr>
-          <a:xfrm>
-            <a:off x="4846320" y="1901952"/>
-            <a:ext cx="3931920" cy="237744"/>
-          </a:xfrm>
-          <a:prstGeom prst="rect">
-            <a:avLst/>
-          </a:prstGeom>
-          <a:noFill/>
-        </p:spPr>
-        <p:txBody>
-          <a:bodyPr wrap="square">
-            <a:spAutoFit/>
-          </a:bodyPr>
-          <a:lstStyle/>
-          <a:p>
-            <a:pPr algn="l"/>
-            <a:r>
-              <a:rPr sz="800" b="0">
-                <a:solidFill>
-                  <a:srgbClr val="BBBBCC"/>
-                </a:solidFill>
-                <a:latin typeface="メイリオ"/>
-              </a:rPr>
-              <a:t>AT中に穢れが溜まると期待枚数3000枚超の爆発モードへ</a:t>
-            </a:r>
-          </a:p>
-        </p:txBody>
-      </p:sp>
-      <p:sp>
-        <p:nvSpPr>
-          <p:cNvPr id="28" name="TextBox 27"/>
-          <p:cNvSpPr txBox="1"/>
-          <p:nvPr/>
-        </p:nvSpPr>
-        <p:spPr>
-          <a:xfrm>
-            <a:off x="4846320" y="2212848"/>
-            <a:ext cx="3931920" cy="256032"/>
-          </a:xfrm>
-          <a:prstGeom prst="rect">
-            <a:avLst/>
-          </a:prstGeom>
-          <a:noFill/>
-        </p:spPr>
-        <p:txBody>
-          <a:bodyPr wrap="square">
-            <a:spAutoFit/>
-          </a:bodyPr>
-          <a:lstStyle/>
-          <a:p>
-            <a:pPr algn="l"/>
-            <a:r>
-              <a:rPr sz="1000" b="1">
-                <a:solidFill>
-                  <a:srgbClr val="FFD700"/>
-                </a:solidFill>
-                <a:latin typeface="メイリオ"/>
-              </a:rPr>
-              <a:t>③ まどマギ世界観を完全再現</a:t>
-            </a:r>
-          </a:p>
-        </p:txBody>
-      </p:sp>
-      <p:sp>
-        <p:nvSpPr>
-          <p:cNvPr id="29" name="TextBox 28"/>
-          <p:cNvSpPr txBox="1"/>
-          <p:nvPr/>
-        </p:nvSpPr>
-        <p:spPr>
-          <a:xfrm>
-            <a:off x="4846320" y="2468880"/>
-            <a:ext cx="3931920" cy="237744"/>
-          </a:xfrm>
-          <a:prstGeom prst="rect">
-            <a:avLst/>
-          </a:prstGeom>
-          <a:noFill/>
-        </p:spPr>
-        <p:txBody>
-          <a:bodyPr wrap="square">
-            <a:spAutoFit/>
-          </a:bodyPr>
-          <a:lstStyle/>
-          <a:p>
-            <a:pPr algn="l"/>
-            <a:r>
-              <a:rPr sz="800" b="0">
-                <a:solidFill>
-                  <a:srgbClr val="BBBBCC"/>
-                </a:solidFill>
-                <a:latin typeface="メイリオ"/>
-              </a:rPr>
-              <a:t>初代ファン向けサウンド・演出・キャラが深く作り込まれた完成度</a:t>
             </a:r>
           </a:p>
         </p:txBody>
@@ -4111,7 +4111,7 @@
         </p:nvSpPr>
         <p:spPr>
           <a:xfrm>
-            <a:off x="182880" y="2606040"/>
+            <a:off x="182880" y="2852928"/>
             <a:ext cx="8778240" cy="475488"/>
           </a:xfrm>
           <a:prstGeom prst="rect">
@@ -4156,7 +4156,7 @@
         </p:nvSpPr>
         <p:spPr>
           <a:xfrm>
-            <a:off x="320040" y="2642616"/>
+            <a:off x="320040" y="2889504"/>
             <a:ext cx="8503920" cy="402336"/>
           </a:xfrm>
           <a:prstGeom prst="rect">
@@ -4191,8 +4191,8 @@
         </p:nvSpPr>
         <p:spPr>
           <a:xfrm>
-            <a:off x="182880" y="3182112"/>
-            <a:ext cx="8778240" cy="1298448"/>
+            <a:off x="182880" y="3410712"/>
+            <a:ext cx="8778240" cy="1234440"/>
           </a:xfrm>
           <a:prstGeom prst="rect">
             <a:avLst/>
@@ -4236,7 +4236,7 @@
         </p:nvSpPr>
         <p:spPr>
           <a:xfrm>
-            <a:off x="320040" y="3218688"/>
+            <a:off x="320040" y="3447288"/>
             <a:ext cx="4572000" cy="274320"/>
           </a:xfrm>
           <a:prstGeom prst="rect">
@@ -4271,8 +4271,8 @@
         </p:nvSpPr>
         <p:spPr>
           <a:xfrm>
-            <a:off x="274320" y="3520440"/>
-            <a:ext cx="2084831" cy="804672"/>
+            <a:off x="274320" y="3749039"/>
+            <a:ext cx="2084831" cy="749808"/>
           </a:xfrm>
           <a:prstGeom prst="rect">
             <a:avLst/>
@@ -4316,8 +4316,8 @@
         </p:nvSpPr>
         <p:spPr>
           <a:xfrm>
-            <a:off x="347472" y="3557016"/>
-            <a:ext cx="1920240" cy="320040"/>
+            <a:off x="347472" y="3785615"/>
+            <a:ext cx="1920240" cy="292608"/>
           </a:xfrm>
           <a:prstGeom prst="rect">
             <a:avLst/>
@@ -4351,7 +4351,7 @@
         </p:nvSpPr>
         <p:spPr>
           <a:xfrm>
-            <a:off x="347472" y="3877056"/>
+            <a:off x="347472" y="4078224"/>
             <a:ext cx="1920240" cy="256032"/>
           </a:xfrm>
           <a:prstGeom prst="rect">
@@ -4386,8 +4386,8 @@
         </p:nvSpPr>
         <p:spPr>
           <a:xfrm>
-            <a:off x="2450591" y="3520440"/>
-            <a:ext cx="2084831" cy="804672"/>
+            <a:off x="2450591" y="3749039"/>
+            <a:ext cx="2084831" cy="749808"/>
           </a:xfrm>
           <a:prstGeom prst="rect">
             <a:avLst/>
@@ -4431,8 +4431,8 @@
         </p:nvSpPr>
         <p:spPr>
           <a:xfrm>
-            <a:off x="2523744" y="3557016"/>
-            <a:ext cx="1920240" cy="320040"/>
+            <a:off x="2523744" y="3785615"/>
+            <a:ext cx="1920240" cy="292608"/>
           </a:xfrm>
           <a:prstGeom prst="rect">
             <a:avLst/>
@@ -4466,7 +4466,7 @@
         </p:nvSpPr>
         <p:spPr>
           <a:xfrm>
-            <a:off x="2523744" y="3877056"/>
+            <a:off x="2523744" y="4078224"/>
             <a:ext cx="1920240" cy="256032"/>
           </a:xfrm>
           <a:prstGeom prst="rect">
@@ -4501,8 +4501,8 @@
         </p:nvSpPr>
         <p:spPr>
           <a:xfrm>
-            <a:off x="4626864" y="3520440"/>
-            <a:ext cx="2084831" cy="804672"/>
+            <a:off x="4626864" y="3749039"/>
+            <a:ext cx="2084831" cy="749808"/>
           </a:xfrm>
           <a:prstGeom prst="rect">
             <a:avLst/>
@@ -4546,8 +4546,8 @@
         </p:nvSpPr>
         <p:spPr>
           <a:xfrm>
-            <a:off x="4700016" y="3557016"/>
-            <a:ext cx="1920240" cy="320040"/>
+            <a:off x="4700016" y="3785615"/>
+            <a:ext cx="1920240" cy="292608"/>
           </a:xfrm>
           <a:prstGeom prst="rect">
             <a:avLst/>
@@ -4581,7 +4581,7 @@
         </p:nvSpPr>
         <p:spPr>
           <a:xfrm>
-            <a:off x="4700016" y="3877056"/>
+            <a:off x="4700016" y="4078224"/>
             <a:ext cx="1920240" cy="256032"/>
           </a:xfrm>
           <a:prstGeom prst="rect">
@@ -4616,8 +4616,8 @@
         </p:nvSpPr>
         <p:spPr>
           <a:xfrm>
-            <a:off x="6803136" y="3520440"/>
-            <a:ext cx="2084831" cy="804672"/>
+            <a:off x="6803136" y="3749039"/>
+            <a:ext cx="2084831" cy="749808"/>
           </a:xfrm>
           <a:prstGeom prst="rect">
             <a:avLst/>
@@ -4661,8 +4661,8 @@
         </p:nvSpPr>
         <p:spPr>
           <a:xfrm>
-            <a:off x="6876288" y="3557016"/>
-            <a:ext cx="1920240" cy="320040"/>
+            <a:off x="6876288" y="3785615"/>
+            <a:ext cx="1920240" cy="292608"/>
           </a:xfrm>
           <a:prstGeom prst="rect">
             <a:avLst/>
@@ -4696,7 +4696,7 @@
         </p:nvSpPr>
         <p:spPr>
           <a:xfrm>
-            <a:off x="6876288" y="3877056"/>
+            <a:off x="6876288" y="4078224"/>
             <a:ext cx="1920240" cy="256032"/>
           </a:xfrm>
           <a:prstGeom prst="rect">
@@ -4964,8 +4964,8 @@
         </p:nvSpPr>
         <p:spPr>
           <a:xfrm>
-            <a:off x="6400800" y="91440"/>
-            <a:ext cx="2560320" cy="411480"/>
+            <a:off x="5486400" y="73152"/>
+            <a:ext cx="3474720" cy="475488"/>
           </a:xfrm>
           <a:prstGeom prst="rect">
             <a:avLst/>
@@ -4980,7 +4980,7 @@
           <a:p>
             <a:pPr algn="r"/>
             <a:r>
-              <a:rPr sz="1100" b="0">
+              <a:rPr sz="1000" b="0">
                 <a:solidFill>
                   <a:srgbClr val="EE88CC"/>
                 </a:solidFill>
@@ -7640,8 +7640,8 @@
         </p:nvSpPr>
         <p:spPr>
           <a:xfrm>
-            <a:off x="6400800" y="91440"/>
-            <a:ext cx="2560320" cy="411480"/>
+            <a:off x="5486400" y="73152"/>
+            <a:ext cx="3474720" cy="475488"/>
           </a:xfrm>
           <a:prstGeom prst="rect">
             <a:avLst/>
@@ -7656,7 +7656,7 @@
           <a:p>
             <a:pPr algn="r"/>
             <a:r>
-              <a:rPr sz="1100" b="0">
+              <a:rPr sz="1000" b="0">
                 <a:solidFill>
                   <a:srgbClr val="EE88CC"/>
                 </a:solidFill>
@@ -7676,7 +7676,7 @@
         <p:spPr>
           <a:xfrm>
             <a:off x="137160" y="713232"/>
-            <a:ext cx="4206240" cy="2331720"/>
+            <a:ext cx="4206240" cy="1828800"/>
           </a:xfrm>
           <a:prstGeom prst="rect">
             <a:avLst/>
@@ -7756,7 +7756,7 @@
         <p:spPr>
           <a:xfrm>
             <a:off x="274320" y="1078992"/>
-            <a:ext cx="3931920" cy="274320"/>
+            <a:ext cx="3931920" cy="256032"/>
           </a:xfrm>
           <a:prstGeom prst="rect">
             <a:avLst/>
@@ -7790,8 +7790,8 @@
         </p:nvSpPr>
         <p:spPr>
           <a:xfrm>
-            <a:off x="274320" y="1371600"/>
-            <a:ext cx="3931920" cy="274320"/>
+            <a:off x="274320" y="1353312"/>
+            <a:ext cx="3931920" cy="256032"/>
           </a:xfrm>
           <a:prstGeom prst="rect">
             <a:avLst/>
@@ -7825,8 +7825,8 @@
         </p:nvSpPr>
         <p:spPr>
           <a:xfrm>
-            <a:off x="274320" y="1664208"/>
-            <a:ext cx="3931920" cy="274320"/>
+            <a:off x="274320" y="1627632"/>
+            <a:ext cx="3931920" cy="256032"/>
           </a:xfrm>
           <a:prstGeom prst="rect">
             <a:avLst/>
@@ -7860,8 +7860,8 @@
         </p:nvSpPr>
         <p:spPr>
           <a:xfrm>
-            <a:off x="274320" y="1956816"/>
-            <a:ext cx="3931920" cy="274320"/>
+            <a:off x="274320" y="1901952"/>
+            <a:ext cx="3931920" cy="256032"/>
           </a:xfrm>
           <a:prstGeom prst="rect">
             <a:avLst/>
@@ -7895,8 +7895,8 @@
         </p:nvSpPr>
         <p:spPr>
           <a:xfrm>
-            <a:off x="274320" y="2249424"/>
-            <a:ext cx="3931920" cy="274320"/>
+            <a:off x="274320" y="2176272"/>
+            <a:ext cx="3931920" cy="256032"/>
           </a:xfrm>
           <a:prstGeom prst="rect">
             <a:avLst/>
@@ -7930,7 +7930,7 @@
         </p:nvSpPr>
         <p:spPr>
           <a:xfrm>
-            <a:off x="137160" y="3090672"/>
+            <a:off x="137160" y="2606040"/>
             <a:ext cx="4206240" cy="594360"/>
           </a:xfrm>
           <a:prstGeom prst="rect">
@@ -7975,7 +7975,7 @@
         </p:nvSpPr>
         <p:spPr>
           <a:xfrm>
-            <a:off x="274320" y="3127248"/>
+            <a:off x="274320" y="2642616"/>
             <a:ext cx="3931920" cy="256032"/>
           </a:xfrm>
           <a:prstGeom prst="rect">
@@ -8010,7 +8010,7 @@
         </p:nvSpPr>
         <p:spPr>
           <a:xfrm>
-            <a:off x="274320" y="3383280"/>
+            <a:off x="274320" y="2898648"/>
             <a:ext cx="3931920" cy="256032"/>
           </a:xfrm>
           <a:prstGeom prst="rect">
@@ -8046,7 +8046,7 @@
         <p:spPr>
           <a:xfrm>
             <a:off x="4526280" y="713232"/>
-            <a:ext cx="4434840" cy="1417320"/>
+            <a:ext cx="4434840" cy="1737360"/>
           </a:xfrm>
           <a:prstGeom prst="rect">
             <a:avLst/>
@@ -8126,7 +8126,7 @@
         <p:spPr>
           <a:xfrm>
             <a:off x="4663440" y="1078992"/>
-            <a:ext cx="4206240" cy="237744"/>
+            <a:ext cx="4206240" cy="219456"/>
           </a:xfrm>
           <a:prstGeom prst="rect">
             <a:avLst/>
@@ -8161,7 +8161,7 @@
         <p:spPr>
           <a:xfrm>
             <a:off x="4663440" y="1298448"/>
-            <a:ext cx="4206240" cy="237744"/>
+            <a:ext cx="4206240" cy="201168"/>
           </a:xfrm>
           <a:prstGeom prst="rect">
             <a:avLst/>
@@ -8195,8 +8195,8 @@
         </p:nvSpPr>
         <p:spPr>
           <a:xfrm>
-            <a:off x="4663440" y="1572768"/>
-            <a:ext cx="4206240" cy="237744"/>
+            <a:off x="4663440" y="1499616"/>
+            <a:ext cx="4206240" cy="219456"/>
           </a:xfrm>
           <a:prstGeom prst="rect">
             <a:avLst/>
@@ -8230,8 +8230,8 @@
         </p:nvSpPr>
         <p:spPr>
           <a:xfrm>
-            <a:off x="4663440" y="1792224"/>
-            <a:ext cx="4206240" cy="237744"/>
+            <a:off x="4663440" y="1719072"/>
+            <a:ext cx="4206240" cy="201168"/>
           </a:xfrm>
           <a:prstGeom prst="rect">
             <a:avLst/>
@@ -8265,8 +8265,8 @@
         </p:nvSpPr>
         <p:spPr>
           <a:xfrm>
-            <a:off x="4663440" y="2066543"/>
-            <a:ext cx="4206240" cy="237744"/>
+            <a:off x="4663440" y="1920240"/>
+            <a:ext cx="4206240" cy="219456"/>
           </a:xfrm>
           <a:prstGeom prst="rect">
             <a:avLst/>
@@ -8300,8 +8300,8 @@
         </p:nvSpPr>
         <p:spPr>
           <a:xfrm>
-            <a:off x="4663440" y="2286000"/>
-            <a:ext cx="4206240" cy="237744"/>
+            <a:off x="4663440" y="2139696"/>
+            <a:ext cx="4206240" cy="201168"/>
           </a:xfrm>
           <a:prstGeom prst="rect">
             <a:avLst/>
@@ -8335,8 +8335,8 @@
         </p:nvSpPr>
         <p:spPr>
           <a:xfrm>
-            <a:off x="4526280" y="2212848"/>
-            <a:ext cx="4434840" cy="1481328"/>
+            <a:off x="4526280" y="2532888"/>
+            <a:ext cx="4434840" cy="1280160"/>
           </a:xfrm>
           <a:prstGeom prst="rect">
             <a:avLst/>
@@ -8380,7 +8380,7 @@
         </p:nvSpPr>
         <p:spPr>
           <a:xfrm>
-            <a:off x="4663440" y="2249424"/>
+            <a:off x="4663440" y="2569464"/>
             <a:ext cx="4206240" cy="292608"/>
           </a:xfrm>
           <a:prstGeom prst="rect">
@@ -8415,7 +8415,7 @@
         </p:nvSpPr>
         <p:spPr>
           <a:xfrm>
-            <a:off x="4663440" y="2578608"/>
+            <a:off x="4663440" y="2898648"/>
             <a:ext cx="1828800" cy="256032"/>
           </a:xfrm>
           <a:prstGeom prst="rect">
@@ -8450,7 +8450,7 @@
         </p:nvSpPr>
         <p:spPr>
           <a:xfrm>
-            <a:off x="6446520" y="2578608"/>
+            <a:off x="6446520" y="2898648"/>
             <a:ext cx="2468880" cy="256032"/>
           </a:xfrm>
           <a:prstGeom prst="rect">
@@ -8485,7 +8485,7 @@
         </p:nvSpPr>
         <p:spPr>
           <a:xfrm>
-            <a:off x="4663440" y="2889503"/>
+            <a:off x="4663440" y="3209544"/>
             <a:ext cx="1828800" cy="256032"/>
           </a:xfrm>
           <a:prstGeom prst="rect">
@@ -8520,7 +8520,7 @@
         </p:nvSpPr>
         <p:spPr>
           <a:xfrm>
-            <a:off x="6446520" y="2889503"/>
+            <a:off x="6446520" y="3209544"/>
             <a:ext cx="2468880" cy="256032"/>
           </a:xfrm>
           <a:prstGeom prst="rect">
@@ -8555,7 +8555,7 @@
         </p:nvSpPr>
         <p:spPr>
           <a:xfrm>
-            <a:off x="4663440" y="3200399"/>
+            <a:off x="4663440" y="3520439"/>
             <a:ext cx="1828800" cy="256032"/>
           </a:xfrm>
           <a:prstGeom prst="rect">
@@ -8590,7 +8590,7 @@
         </p:nvSpPr>
         <p:spPr>
           <a:xfrm>
-            <a:off x="6446520" y="3200399"/>
+            <a:off x="6446520" y="3520439"/>
             <a:ext cx="2468880" cy="256032"/>
           </a:xfrm>
           <a:prstGeom prst="rect">
@@ -8625,8 +8625,8 @@
         </p:nvSpPr>
         <p:spPr>
           <a:xfrm>
-            <a:off x="137160" y="3749039"/>
-            <a:ext cx="8823960" cy="777240"/>
+            <a:off x="137160" y="3877056"/>
+            <a:ext cx="8823960" cy="804672"/>
           </a:xfrm>
           <a:prstGeom prst="rect">
             <a:avLst/>
@@ -8670,7 +8670,7 @@
         </p:nvSpPr>
         <p:spPr>
           <a:xfrm>
-            <a:off x="274320" y="3776472"/>
+            <a:off x="274320" y="3904487"/>
             <a:ext cx="1371600" cy="256032"/>
           </a:xfrm>
           <a:prstGeom prst="rect">
@@ -8705,8 +8705,8 @@
         </p:nvSpPr>
         <p:spPr>
           <a:xfrm>
-            <a:off x="274320" y="4041648"/>
-            <a:ext cx="8503920" cy="210312"/>
+            <a:off x="274320" y="4114800"/>
+            <a:ext cx="8503920" cy="192024"/>
           </a:xfrm>
           <a:prstGeom prst="rect">
             <a:avLst/>
@@ -8740,8 +8740,8 @@
         </p:nvSpPr>
         <p:spPr>
           <a:xfrm>
-            <a:off x="274320" y="4251960"/>
-            <a:ext cx="8503920" cy="210312"/>
+            <a:off x="274320" y="4297680"/>
+            <a:ext cx="8503920" cy="192024"/>
           </a:xfrm>
           <a:prstGeom prst="rect">
             <a:avLst/>
@@ -8775,8 +8775,8 @@
         </p:nvSpPr>
         <p:spPr>
           <a:xfrm>
-            <a:off x="274320" y="4462272"/>
-            <a:ext cx="8503920" cy="210312"/>
+            <a:off x="274320" y="4480560"/>
+            <a:ext cx="8503920" cy="192024"/>
           </a:xfrm>
           <a:prstGeom prst="rect">
             <a:avLst/>
@@ -9043,8 +9043,8 @@
         </p:nvSpPr>
         <p:spPr>
           <a:xfrm>
-            <a:off x="6400800" y="91440"/>
-            <a:ext cx="2560320" cy="411480"/>
+            <a:off x="5486400" y="73152"/>
+            <a:ext cx="3474720" cy="475488"/>
           </a:xfrm>
           <a:prstGeom prst="rect">
             <a:avLst/>
@@ -9059,7 +9059,7 @@
           <a:p>
             <a:pPr algn="r"/>
             <a:r>
-              <a:rPr sz="1100" b="0">
+              <a:rPr sz="1000" b="0">
                 <a:solidFill>
                   <a:srgbClr val="EE88CC"/>
                 </a:solidFill>
@@ -10585,8 +10585,8 @@
         </p:nvSpPr>
         <p:spPr>
           <a:xfrm>
-            <a:off x="6400800" y="91440"/>
-            <a:ext cx="2560320" cy="411480"/>
+            <a:off x="5486400" y="73152"/>
+            <a:ext cx="3474720" cy="475488"/>
           </a:xfrm>
           <a:prstGeom prst="rect">
             <a:avLst/>
@@ -10601,7 +10601,7 @@
           <a:p>
             <a:pPr algn="r"/>
             <a:r>
-              <a:rPr sz="1100" b="0">
+              <a:rPr sz="1000" b="0">
                 <a:solidFill>
                   <a:srgbClr val="EE88CC"/>
                 </a:solidFill>
@@ -12708,8 +12708,8 @@
         </p:nvSpPr>
         <p:spPr>
           <a:xfrm>
-            <a:off x="6400800" y="91440"/>
-            <a:ext cx="2560320" cy="411480"/>
+            <a:off x="5486400" y="73152"/>
+            <a:ext cx="3474720" cy="475488"/>
           </a:xfrm>
           <a:prstGeom prst="rect">
             <a:avLst/>
@@ -12724,7 +12724,7 @@
           <a:p>
             <a:pPr algn="r"/>
             <a:r>
-              <a:rPr sz="1100" b="0">
+              <a:rPr sz="1000" b="0">
                 <a:solidFill>
                   <a:srgbClr val="EE88CC"/>
                 </a:solidFill>
@@ -12903,8 +12903,8 @@
         </p:nvSpPr>
         <p:spPr>
           <a:xfrm>
-            <a:off x="228600" y="1481328"/>
-            <a:ext cx="914400" cy="347472"/>
+            <a:off x="228600" y="1417320"/>
+            <a:ext cx="914400" cy="329184"/>
           </a:xfrm>
           <a:prstGeom prst="rect">
             <a:avLst/>
@@ -12948,7 +12948,7 @@
         </p:nvSpPr>
         <p:spPr>
           <a:xfrm>
-            <a:off x="246888" y="1517904"/>
+            <a:off x="246888" y="1444752"/>
             <a:ext cx="877824" cy="274320"/>
           </a:xfrm>
           <a:prstGeom prst="rect">
@@ -12983,7 +12983,7 @@
         </p:nvSpPr>
         <p:spPr>
           <a:xfrm>
-            <a:off x="1207008" y="1536192"/>
+            <a:off x="1207008" y="1463040"/>
             <a:ext cx="4069080" cy="274320"/>
           </a:xfrm>
           <a:prstGeom prst="rect">
@@ -13018,8 +13018,8 @@
         </p:nvSpPr>
         <p:spPr>
           <a:xfrm>
-            <a:off x="621792" y="1828800"/>
-            <a:ext cx="109728" cy="128016"/>
+            <a:off x="621792" y="1746504"/>
+            <a:ext cx="109728" cy="109728"/>
           </a:xfrm>
           <a:prstGeom prst="rect">
             <a:avLst/>
@@ -13061,8 +13061,8 @@
         </p:nvSpPr>
         <p:spPr>
           <a:xfrm>
-            <a:off x="228600" y="1956816"/>
-            <a:ext cx="914400" cy="347472"/>
+            <a:off x="228600" y="1856232"/>
+            <a:ext cx="914400" cy="329184"/>
           </a:xfrm>
           <a:prstGeom prst="rect">
             <a:avLst/>
@@ -13106,7 +13106,7 @@
         </p:nvSpPr>
         <p:spPr>
           <a:xfrm>
-            <a:off x="246888" y="1993392"/>
+            <a:off x="246888" y="1883664"/>
             <a:ext cx="877824" cy="274320"/>
           </a:xfrm>
           <a:prstGeom prst="rect">
@@ -13141,7 +13141,7 @@
         </p:nvSpPr>
         <p:spPr>
           <a:xfrm>
-            <a:off x="1207008" y="2011680"/>
+            <a:off x="1207008" y="1901952"/>
             <a:ext cx="4069080" cy="274320"/>
           </a:xfrm>
           <a:prstGeom prst="rect">
@@ -13176,8 +13176,8 @@
         </p:nvSpPr>
         <p:spPr>
           <a:xfrm>
-            <a:off x="621792" y="2304288"/>
-            <a:ext cx="109728" cy="128016"/>
+            <a:off x="621792" y="2185416"/>
+            <a:ext cx="109728" cy="109728"/>
           </a:xfrm>
           <a:prstGeom prst="rect">
             <a:avLst/>
@@ -13219,8 +13219,8 @@
         </p:nvSpPr>
         <p:spPr>
           <a:xfrm>
-            <a:off x="228600" y="2432304"/>
-            <a:ext cx="914400" cy="347472"/>
+            <a:off x="228600" y="2295144"/>
+            <a:ext cx="914400" cy="329184"/>
           </a:xfrm>
           <a:prstGeom prst="rect">
             <a:avLst/>
@@ -13264,7 +13264,7 @@
         </p:nvSpPr>
         <p:spPr>
           <a:xfrm>
-            <a:off x="246888" y="2468880"/>
+            <a:off x="246888" y="2322576"/>
             <a:ext cx="877824" cy="274320"/>
           </a:xfrm>
           <a:prstGeom prst="rect">
@@ -13299,7 +13299,7 @@
         </p:nvSpPr>
         <p:spPr>
           <a:xfrm>
-            <a:off x="1207008" y="2487168"/>
+            <a:off x="1207008" y="2340864"/>
             <a:ext cx="4069080" cy="274320"/>
           </a:xfrm>
           <a:prstGeom prst="rect">
@@ -13334,8 +13334,8 @@
         </p:nvSpPr>
         <p:spPr>
           <a:xfrm>
-            <a:off x="621792" y="2779776"/>
-            <a:ext cx="109728" cy="128016"/>
+            <a:off x="621792" y="2624328"/>
+            <a:ext cx="109728" cy="109728"/>
           </a:xfrm>
           <a:prstGeom prst="rect">
             <a:avLst/>
@@ -13377,8 +13377,8 @@
         </p:nvSpPr>
         <p:spPr>
           <a:xfrm>
-            <a:off x="228600" y="2907792"/>
-            <a:ext cx="914400" cy="347472"/>
+            <a:off x="228600" y="2734056"/>
+            <a:ext cx="914400" cy="329184"/>
           </a:xfrm>
           <a:prstGeom prst="rect">
             <a:avLst/>
@@ -13422,7 +13422,7 @@
         </p:nvSpPr>
         <p:spPr>
           <a:xfrm>
-            <a:off x="246888" y="2944368"/>
+            <a:off x="246888" y="2761488"/>
             <a:ext cx="877824" cy="274320"/>
           </a:xfrm>
           <a:prstGeom prst="rect">
@@ -13457,7 +13457,7 @@
         </p:nvSpPr>
         <p:spPr>
           <a:xfrm>
-            <a:off x="1207008" y="2962656"/>
+            <a:off x="1207008" y="2779776"/>
             <a:ext cx="4069080" cy="274320"/>
           </a:xfrm>
           <a:prstGeom prst="rect">
@@ -13492,8 +13492,8 @@
         </p:nvSpPr>
         <p:spPr>
           <a:xfrm>
-            <a:off x="621792" y="3255264"/>
-            <a:ext cx="109728" cy="128016"/>
+            <a:off x="621792" y="3063240"/>
+            <a:ext cx="109728" cy="109728"/>
           </a:xfrm>
           <a:prstGeom prst="rect">
             <a:avLst/>
@@ -13535,8 +13535,8 @@
         </p:nvSpPr>
         <p:spPr>
           <a:xfrm>
-            <a:off x="228600" y="3383280"/>
-            <a:ext cx="914400" cy="347472"/>
+            <a:off x="228600" y="3172968"/>
+            <a:ext cx="914400" cy="329184"/>
           </a:xfrm>
           <a:prstGeom prst="rect">
             <a:avLst/>
@@ -13580,7 +13580,7 @@
         </p:nvSpPr>
         <p:spPr>
           <a:xfrm>
-            <a:off x="246888" y="3419856"/>
+            <a:off x="246888" y="3200400"/>
             <a:ext cx="877824" cy="274320"/>
           </a:xfrm>
           <a:prstGeom prst="rect">
@@ -13615,7 +13615,7 @@
         </p:nvSpPr>
         <p:spPr>
           <a:xfrm>
-            <a:off x="1207008" y="3438144"/>
+            <a:off x="1207008" y="3218688"/>
             <a:ext cx="4069080" cy="274320"/>
           </a:xfrm>
           <a:prstGeom prst="rect">
@@ -13644,14 +13644,57 @@
       </p:sp>
       <p:sp>
         <p:nvSpPr>
-          <p:cNvPr id="29" name="TextBox 28"/>
-          <p:cNvSpPr txBox="1"/>
-          <p:nvPr/>
-        </p:nvSpPr>
-        <p:spPr>
-          <a:xfrm>
-            <a:off x="274320" y="3794760"/>
-            <a:ext cx="5029200" cy="274320"/>
+          <p:cNvPr id="29" name="Rectangle 28"/>
+          <p:cNvSpPr/>
+          <p:nvPr/>
+        </p:nvSpPr>
+        <p:spPr>
+          <a:xfrm>
+            <a:off x="621792" y="3502152"/>
+            <a:ext cx="109728" cy="109728"/>
+          </a:xfrm>
+          <a:prstGeom prst="rect">
+            <a:avLst/>
+          </a:prstGeom>
+          <a:solidFill>
+            <a:srgbClr val="44EE88"/>
+          </a:solidFill>
+          <a:ln>
+            <a:noFill/>
+          </a:ln>
+        </p:spPr>
+        <p:style>
+          <a:lnRef idx="1">
+            <a:schemeClr val="accent1"/>
+          </a:lnRef>
+          <a:fillRef idx="3">
+            <a:schemeClr val="accent1"/>
+          </a:fillRef>
+          <a:effectRef idx="2">
+            <a:schemeClr val="accent1"/>
+          </a:effectRef>
+          <a:fontRef idx="minor">
+            <a:schemeClr val="lt1"/>
+          </a:fontRef>
+        </p:style>
+        <p:txBody>
+          <a:bodyPr rtlCol="0" anchor="ctr"/>
+          <a:lstStyle/>
+          <a:p>
+            <a:pPr algn="ctr"/>
+          </a:p>
+        </p:txBody>
+      </p:sp>
+      <p:sp>
+        <p:nvSpPr>
+          <p:cNvPr id="30" name="TextBox 29"/>
+          <p:cNvSpPr txBox="1"/>
+          <p:nvPr/>
+        </p:nvSpPr>
+        <p:spPr>
+          <a:xfrm>
+            <a:off x="274320" y="3657600"/>
+            <a:ext cx="5029200" cy="256032"/>
           </a:xfrm>
           <a:prstGeom prst="rect">
             <a:avLst/>
@@ -13679,7 +13722,7 @@
       </p:sp>
       <p:sp>
         <p:nvSpPr>
-          <p:cNvPr id="30" name="Rectangle 29"/>
+          <p:cNvPr id="31" name="Rectangle 30"/>
           <p:cNvSpPr/>
           <p:nvPr/>
         </p:nvSpPr>
@@ -13724,7 +13767,7 @@
       </p:sp>
       <p:sp>
         <p:nvSpPr>
-          <p:cNvPr id="31" name="Rectangle 30"/>
+          <p:cNvPr id="32" name="Rectangle 31"/>
           <p:cNvSpPr/>
           <p:nvPr/>
         </p:nvSpPr>
@@ -13769,7 +13812,7 @@
       </p:sp>
       <p:sp>
         <p:nvSpPr>
-          <p:cNvPr id="32" name="TextBox 31"/>
+          <p:cNvPr id="33" name="TextBox 32"/>
           <p:cNvSpPr txBox="1"/>
           <p:nvPr/>
         </p:nvSpPr>
@@ -13804,14 +13847,14 @@
       </p:sp>
       <p:sp>
         <p:nvSpPr>
-          <p:cNvPr id="33" name="TextBox 32"/>
+          <p:cNvPr id="34" name="TextBox 33"/>
           <p:cNvSpPr txBox="1"/>
           <p:nvPr/>
         </p:nvSpPr>
         <p:spPr>
           <a:xfrm>
             <a:off x="5623560" y="1170432"/>
-            <a:ext cx="1463040" cy="274320"/>
+            <a:ext cx="1188720" cy="274320"/>
           </a:xfrm>
           <a:prstGeom prst="rect">
             <a:avLst/>
@@ -13839,29 +13882,29 @@
       </p:sp>
       <p:sp>
         <p:nvSpPr>
-          <p:cNvPr id="34" name="TextBox 33"/>
-          <p:cNvSpPr txBox="1"/>
-          <p:nvPr/>
-        </p:nvSpPr>
-        <p:spPr>
-          <a:xfrm>
-            <a:off x="7040880" y="1170432"/>
-            <a:ext cx="1828800" cy="274320"/>
-          </a:xfrm>
-          <a:prstGeom prst="rect">
-            <a:avLst/>
-          </a:prstGeom>
-          <a:noFill/>
-        </p:spPr>
-        <p:txBody>
-          <a:bodyPr wrap="square">
-            <a:spAutoFit/>
-          </a:bodyPr>
-          <a:lstStyle/>
-          <a:p>
-            <a:pPr algn="l"/>
-            <a:r>
-              <a:rPr sz="900" b="0">
+          <p:cNvPr id="35" name="TextBox 34"/>
+          <p:cNvSpPr txBox="1"/>
+          <p:nvPr/>
+        </p:nvSpPr>
+        <p:spPr>
+          <a:xfrm>
+            <a:off x="6812280" y="1170432"/>
+            <a:ext cx="2103120" cy="274320"/>
+          </a:xfrm>
+          <a:prstGeom prst="rect">
+            <a:avLst/>
+          </a:prstGeom>
+          <a:noFill/>
+        </p:spPr>
+        <p:txBody>
+          <a:bodyPr wrap="square">
+            <a:spAutoFit/>
+          </a:bodyPr>
+          <a:lstStyle/>
+          <a:p>
+            <a:pPr algn="l"/>
+            <a:r>
+              <a:rPr sz="850" b="0">
                 <a:solidFill>
                   <a:srgbClr val="FFFFFF"/>
                 </a:solidFill>
@@ -13874,14 +13917,14 @@
       </p:sp>
       <p:sp>
         <p:nvSpPr>
-          <p:cNvPr id="35" name="TextBox 34"/>
+          <p:cNvPr id="36" name="TextBox 35"/>
           <p:cNvSpPr txBox="1"/>
           <p:nvPr/>
         </p:nvSpPr>
         <p:spPr>
           <a:xfrm>
             <a:off x="5623560" y="1508760"/>
-            <a:ext cx="1463040" cy="274320"/>
+            <a:ext cx="1188720" cy="274320"/>
           </a:xfrm>
           <a:prstGeom prst="rect">
             <a:avLst/>
@@ -13909,29 +13952,29 @@
       </p:sp>
       <p:sp>
         <p:nvSpPr>
-          <p:cNvPr id="36" name="TextBox 35"/>
-          <p:cNvSpPr txBox="1"/>
-          <p:nvPr/>
-        </p:nvSpPr>
-        <p:spPr>
-          <a:xfrm>
-            <a:off x="7040880" y="1508760"/>
-            <a:ext cx="1828800" cy="274320"/>
-          </a:xfrm>
-          <a:prstGeom prst="rect">
-            <a:avLst/>
-          </a:prstGeom>
-          <a:noFill/>
-        </p:spPr>
-        <p:txBody>
-          <a:bodyPr wrap="square">
-            <a:spAutoFit/>
-          </a:bodyPr>
-          <a:lstStyle/>
-          <a:p>
-            <a:pPr algn="l"/>
-            <a:r>
-              <a:rPr sz="900" b="0">
+          <p:cNvPr id="37" name="TextBox 36"/>
+          <p:cNvSpPr txBox="1"/>
+          <p:nvPr/>
+        </p:nvSpPr>
+        <p:spPr>
+          <a:xfrm>
+            <a:off x="6812280" y="1508760"/>
+            <a:ext cx="2103120" cy="274320"/>
+          </a:xfrm>
+          <a:prstGeom prst="rect">
+            <a:avLst/>
+          </a:prstGeom>
+          <a:noFill/>
+        </p:spPr>
+        <p:txBody>
+          <a:bodyPr wrap="square">
+            <a:spAutoFit/>
+          </a:bodyPr>
+          <a:lstStyle/>
+          <a:p>
+            <a:pPr algn="l"/>
+            <a:r>
+              <a:rPr sz="850" b="0">
                 <a:solidFill>
                   <a:srgbClr val="FFFFFF"/>
                 </a:solidFill>
@@ -13944,14 +13987,14 @@
       </p:sp>
       <p:sp>
         <p:nvSpPr>
-          <p:cNvPr id="37" name="TextBox 36"/>
+          <p:cNvPr id="38" name="TextBox 37"/>
           <p:cNvSpPr txBox="1"/>
           <p:nvPr/>
         </p:nvSpPr>
         <p:spPr>
           <a:xfrm>
             <a:off x="5623560" y="1847088"/>
-            <a:ext cx="1463040" cy="274320"/>
+            <a:ext cx="1188720" cy="274320"/>
           </a:xfrm>
           <a:prstGeom prst="rect">
             <a:avLst/>
@@ -13979,29 +14022,29 @@
       </p:sp>
       <p:sp>
         <p:nvSpPr>
-          <p:cNvPr id="38" name="TextBox 37"/>
-          <p:cNvSpPr txBox="1"/>
-          <p:nvPr/>
-        </p:nvSpPr>
-        <p:spPr>
-          <a:xfrm>
-            <a:off x="7040880" y="1847088"/>
-            <a:ext cx="1828800" cy="274320"/>
-          </a:xfrm>
-          <a:prstGeom prst="rect">
-            <a:avLst/>
-          </a:prstGeom>
-          <a:noFill/>
-        </p:spPr>
-        <p:txBody>
-          <a:bodyPr wrap="square">
-            <a:spAutoFit/>
-          </a:bodyPr>
-          <a:lstStyle/>
-          <a:p>
-            <a:pPr algn="l"/>
-            <a:r>
-              <a:rPr sz="900" b="0">
+          <p:cNvPr id="39" name="TextBox 38"/>
+          <p:cNvSpPr txBox="1"/>
+          <p:nvPr/>
+        </p:nvSpPr>
+        <p:spPr>
+          <a:xfrm>
+            <a:off x="6812280" y="1847088"/>
+            <a:ext cx="2103120" cy="274320"/>
+          </a:xfrm>
+          <a:prstGeom prst="rect">
+            <a:avLst/>
+          </a:prstGeom>
+          <a:noFill/>
+        </p:spPr>
+        <p:txBody>
+          <a:bodyPr wrap="square">
+            <a:spAutoFit/>
+          </a:bodyPr>
+          <a:lstStyle/>
+          <a:p>
+            <a:pPr algn="l"/>
+            <a:r>
+              <a:rPr sz="850" b="0">
                 <a:solidFill>
                   <a:srgbClr val="FFFFFF"/>
                 </a:solidFill>
@@ -14014,14 +14057,14 @@
       </p:sp>
       <p:sp>
         <p:nvSpPr>
-          <p:cNvPr id="39" name="TextBox 38"/>
+          <p:cNvPr id="40" name="TextBox 39"/>
           <p:cNvSpPr txBox="1"/>
           <p:nvPr/>
         </p:nvSpPr>
         <p:spPr>
           <a:xfrm>
             <a:off x="5623560" y="2185416"/>
-            <a:ext cx="1463040" cy="274320"/>
+            <a:ext cx="1188720" cy="274320"/>
           </a:xfrm>
           <a:prstGeom prst="rect">
             <a:avLst/>
@@ -14049,29 +14092,29 @@
       </p:sp>
       <p:sp>
         <p:nvSpPr>
-          <p:cNvPr id="40" name="TextBox 39"/>
-          <p:cNvSpPr txBox="1"/>
-          <p:nvPr/>
-        </p:nvSpPr>
-        <p:spPr>
-          <a:xfrm>
-            <a:off x="7040880" y="2185416"/>
-            <a:ext cx="1828800" cy="274320"/>
-          </a:xfrm>
-          <a:prstGeom prst="rect">
-            <a:avLst/>
-          </a:prstGeom>
-          <a:noFill/>
-        </p:spPr>
-        <p:txBody>
-          <a:bodyPr wrap="square">
-            <a:spAutoFit/>
-          </a:bodyPr>
-          <a:lstStyle/>
-          <a:p>
-            <a:pPr algn="l"/>
-            <a:r>
-              <a:rPr sz="900" b="0">
+          <p:cNvPr id="41" name="TextBox 40"/>
+          <p:cNvSpPr txBox="1"/>
+          <p:nvPr/>
+        </p:nvSpPr>
+        <p:spPr>
+          <a:xfrm>
+            <a:off x="6812280" y="2185416"/>
+            <a:ext cx="2103120" cy="274320"/>
+          </a:xfrm>
+          <a:prstGeom prst="rect">
+            <a:avLst/>
+          </a:prstGeom>
+          <a:noFill/>
+        </p:spPr>
+        <p:txBody>
+          <a:bodyPr wrap="square">
+            <a:spAutoFit/>
+          </a:bodyPr>
+          <a:lstStyle/>
+          <a:p>
+            <a:pPr algn="l"/>
+            <a:r>
+              <a:rPr sz="850" b="0">
                 <a:solidFill>
                   <a:srgbClr val="FFFFFF"/>
                 </a:solidFill>
@@ -14084,14 +14127,14 @@
       </p:sp>
       <p:sp>
         <p:nvSpPr>
-          <p:cNvPr id="41" name="TextBox 40"/>
+          <p:cNvPr id="42" name="TextBox 41"/>
           <p:cNvSpPr txBox="1"/>
           <p:nvPr/>
         </p:nvSpPr>
         <p:spPr>
           <a:xfrm>
             <a:off x="5623560" y="2523744"/>
-            <a:ext cx="1463040" cy="274320"/>
+            <a:ext cx="1188720" cy="274320"/>
           </a:xfrm>
           <a:prstGeom prst="rect">
             <a:avLst/>
@@ -14119,29 +14162,29 @@
       </p:sp>
       <p:sp>
         <p:nvSpPr>
-          <p:cNvPr id="42" name="TextBox 41"/>
-          <p:cNvSpPr txBox="1"/>
-          <p:nvPr/>
-        </p:nvSpPr>
-        <p:spPr>
-          <a:xfrm>
-            <a:off x="7040880" y="2523744"/>
-            <a:ext cx="1828800" cy="274320"/>
-          </a:xfrm>
-          <a:prstGeom prst="rect">
-            <a:avLst/>
-          </a:prstGeom>
-          <a:noFill/>
-        </p:spPr>
-        <p:txBody>
-          <a:bodyPr wrap="square">
-            <a:spAutoFit/>
-          </a:bodyPr>
-          <a:lstStyle/>
-          <a:p>
-            <a:pPr algn="l"/>
-            <a:r>
-              <a:rPr sz="900" b="0">
+          <p:cNvPr id="43" name="TextBox 42"/>
+          <p:cNvSpPr txBox="1"/>
+          <p:nvPr/>
+        </p:nvSpPr>
+        <p:spPr>
+          <a:xfrm>
+            <a:off x="6812280" y="2523744"/>
+            <a:ext cx="2103120" cy="274320"/>
+          </a:xfrm>
+          <a:prstGeom prst="rect">
+            <a:avLst/>
+          </a:prstGeom>
+          <a:noFill/>
+        </p:spPr>
+        <p:txBody>
+          <a:bodyPr wrap="square">
+            <a:spAutoFit/>
+          </a:bodyPr>
+          <a:lstStyle/>
+          <a:p>
+            <a:pPr algn="l"/>
+            <a:r>
+              <a:rPr sz="850" b="0">
                 <a:solidFill>
                   <a:srgbClr val="FFFFFF"/>
                 </a:solidFill>
@@ -14154,7 +14197,7 @@
       </p:sp>
       <p:sp>
         <p:nvSpPr>
-          <p:cNvPr id="43" name="Rectangle 42"/>
+          <p:cNvPr id="44" name="Rectangle 43"/>
           <p:cNvSpPr/>
           <p:nvPr/>
         </p:nvSpPr>
@@ -14199,7 +14242,7 @@
       </p:sp>
       <p:sp>
         <p:nvSpPr>
-          <p:cNvPr id="44" name="TextBox 43"/>
+          <p:cNvPr id="45" name="TextBox 44"/>
           <p:cNvSpPr txBox="1"/>
           <p:nvPr/>
         </p:nvSpPr>
@@ -14234,7 +14277,7 @@
       </p:sp>
       <p:sp>
         <p:nvSpPr>
-          <p:cNvPr id="45" name="TextBox 44"/>
+          <p:cNvPr id="46" name="TextBox 45"/>
           <p:cNvSpPr txBox="1"/>
           <p:nvPr/>
         </p:nvSpPr>
@@ -14271,7 +14314,7 @@
       </p:sp>
       <p:sp>
         <p:nvSpPr>
-          <p:cNvPr id="46" name="Rectangle 45"/>
+          <p:cNvPr id="47" name="Rectangle 46"/>
           <p:cNvSpPr/>
           <p:nvPr/>
         </p:nvSpPr>
@@ -14314,7 +14357,7 @@
       </p:sp>
       <p:sp>
         <p:nvSpPr>
-          <p:cNvPr id="47" name="TextBox 46"/>
+          <p:cNvPr id="48" name="TextBox 47"/>
           <p:cNvSpPr txBox="1"/>
           <p:nvPr/>
         </p:nvSpPr>
@@ -14349,7 +14392,7 @@
       </p:sp>
       <p:sp>
         <p:nvSpPr>
-          <p:cNvPr id="48" name="TextBox 47"/>
+          <p:cNvPr id="49" name="TextBox 48"/>
           <p:cNvSpPr txBox="1"/>
           <p:nvPr/>
         </p:nvSpPr>
@@ -14510,8 +14553,8 @@
         </p:nvSpPr>
         <p:spPr>
           <a:xfrm>
-            <a:off x="6400800" y="91440"/>
-            <a:ext cx="2560320" cy="411480"/>
+            <a:off x="5486400" y="73152"/>
+            <a:ext cx="3474720" cy="475488"/>
           </a:xfrm>
           <a:prstGeom prst="rect">
             <a:avLst/>
@@ -14526,7 +14569,7 @@
           <a:p>
             <a:pPr algn="r"/>
             <a:r>
-              <a:rPr sz="1100" b="0">
+              <a:rPr sz="1000" b="0">
                 <a:solidFill>
                   <a:srgbClr val="EE88CC"/>
                 </a:solidFill>
@@ -15433,8 +15476,8 @@
         </p:nvSpPr>
         <p:spPr>
           <a:xfrm>
-            <a:off x="6400800" y="91440"/>
-            <a:ext cx="2560320" cy="411480"/>
+            <a:off x="5486400" y="73152"/>
+            <a:ext cx="3474720" cy="475488"/>
           </a:xfrm>
           <a:prstGeom prst="rect">
             <a:avLst/>
@@ -15449,7 +15492,7 @@
           <a:p>
             <a:pPr algn="r"/>
             <a:r>
-              <a:rPr sz="1100" b="0">
+              <a:rPr sz="1000" b="0">
                 <a:solidFill>
                   <a:srgbClr val="EE88CC"/>
                 </a:solidFill>
@@ -17331,8 +17374,8 @@
         </p:nvSpPr>
         <p:spPr>
           <a:xfrm>
-            <a:off x="6400800" y="91440"/>
-            <a:ext cx="2560320" cy="411480"/>
+            <a:off x="5486400" y="73152"/>
+            <a:ext cx="3474720" cy="475488"/>
           </a:xfrm>
           <a:prstGeom prst="rect">
             <a:avLst/>
@@ -17347,7 +17390,7 @@
           <a:p>
             <a:pPr algn="r"/>
             <a:r>
-              <a:rPr sz="1100" b="0">
+              <a:rPr sz="1000" b="0">
                 <a:solidFill>
                   <a:srgbClr val="EE88CC"/>
                 </a:solidFill>

--- a/proposals/機種分析/まどか外伝/madoka_guide_v1.pptx
+++ b/proposals/機種分析/まどか外伝/madoka_guide_v1.pptx
@@ -3224,7 +3224,7 @@
             <a:r>
               <a:rPr sz="1000" b="0">
                 <a:solidFill>
-                  <a:srgbClr val="EE88CC"/>
+                  <a:srgbClr val="FFCCEE"/>
                 </a:solidFill>
                 <a:latin typeface="メイリオ"/>
               </a:rPr>
@@ -3248,11 +3248,11 @@
             <a:avLst/>
           </a:prstGeom>
           <a:solidFill>
-            <a:srgbClr val="14143A"/>
+            <a:srgbClr val="FFEEF8"/>
           </a:solidFill>
-          <a:ln w="19050">
+          <a:ln w="22860">
             <a:solidFill>
-              <a:srgbClr val="CC44AA"/>
+              <a:srgbClr val="CC22AA"/>
             </a:solidFill>
           </a:ln>
         </p:spPr>
@@ -3304,7 +3304,7 @@
             <a:r>
               <a:rPr sz="1200" b="1">
                 <a:solidFill>
-                  <a:srgbClr val="EE88CC"/>
+                  <a:srgbClr val="CC22AA"/>
                 </a:solidFill>
                 <a:latin typeface="游明朝"/>
               </a:rPr>
@@ -3339,7 +3339,7 @@
             <a:r>
               <a:rPr sz="900" b="1">
                 <a:solidFill>
-                  <a:srgbClr val="EE88CC"/>
+                  <a:srgbClr val="CC22AA"/>
                 </a:solidFill>
                 <a:latin typeface="メイリオ"/>
               </a:rPr>
@@ -3374,7 +3374,7 @@
             <a:r>
               <a:rPr sz="900" b="0">
                 <a:solidFill>
-                  <a:srgbClr val="FFFFFF"/>
+                  <a:srgbClr val="1A1A2E"/>
                 </a:solidFill>
                 <a:latin typeface="メイリオ"/>
               </a:rPr>
@@ -3409,7 +3409,7 @@
             <a:r>
               <a:rPr sz="900" b="1">
                 <a:solidFill>
-                  <a:srgbClr val="EE88CC"/>
+                  <a:srgbClr val="CC22AA"/>
                 </a:solidFill>
                 <a:latin typeface="メイリオ"/>
               </a:rPr>
@@ -3444,7 +3444,7 @@
             <a:r>
               <a:rPr sz="900" b="0">
                 <a:solidFill>
-                  <a:srgbClr val="FFFFFF"/>
+                  <a:srgbClr val="1A1A2E"/>
                 </a:solidFill>
                 <a:latin typeface="メイリオ"/>
               </a:rPr>
@@ -3479,7 +3479,7 @@
             <a:r>
               <a:rPr sz="900" b="1">
                 <a:solidFill>
-                  <a:srgbClr val="EE88CC"/>
+                  <a:srgbClr val="CC22AA"/>
                 </a:solidFill>
                 <a:latin typeface="メイリオ"/>
               </a:rPr>
@@ -3514,7 +3514,7 @@
             <a:r>
               <a:rPr sz="900" b="0">
                 <a:solidFill>
-                  <a:srgbClr val="FFFFFF"/>
+                  <a:srgbClr val="1A1A2E"/>
                 </a:solidFill>
                 <a:latin typeface="メイリオ"/>
               </a:rPr>
@@ -3549,7 +3549,7 @@
             <a:r>
               <a:rPr sz="900" b="1">
                 <a:solidFill>
-                  <a:srgbClr val="EE88CC"/>
+                  <a:srgbClr val="CC22AA"/>
                 </a:solidFill>
                 <a:latin typeface="メイリオ"/>
               </a:rPr>
@@ -3584,7 +3584,7 @@
             <a:r>
               <a:rPr sz="900" b="0">
                 <a:solidFill>
-                  <a:srgbClr val="FFFFFF"/>
+                  <a:srgbClr val="1A1A2E"/>
                 </a:solidFill>
                 <a:latin typeface="メイリオ"/>
               </a:rPr>
@@ -3619,7 +3619,7 @@
             <a:r>
               <a:rPr sz="900" b="1">
                 <a:solidFill>
-                  <a:srgbClr val="EE88CC"/>
+                  <a:srgbClr val="CC22AA"/>
                 </a:solidFill>
                 <a:latin typeface="メイリオ"/>
               </a:rPr>
@@ -3654,7 +3654,7 @@
             <a:r>
               <a:rPr sz="900" b="0">
                 <a:solidFill>
-                  <a:srgbClr val="FFFFFF"/>
+                  <a:srgbClr val="1A1A2E"/>
                 </a:solidFill>
                 <a:latin typeface="メイリオ"/>
               </a:rPr>
@@ -3689,7 +3689,7 @@
             <a:r>
               <a:rPr sz="900" b="1">
                 <a:solidFill>
-                  <a:srgbClr val="EE88CC"/>
+                  <a:srgbClr val="CC22AA"/>
                 </a:solidFill>
                 <a:latin typeface="メイリオ"/>
               </a:rPr>
@@ -3724,7 +3724,7 @@
             <a:r>
               <a:rPr sz="900" b="0">
                 <a:solidFill>
-                  <a:srgbClr val="FFFFFF"/>
+                  <a:srgbClr val="1A1A2E"/>
                 </a:solidFill>
                 <a:latin typeface="メイリオ"/>
               </a:rPr>
@@ -3748,11 +3748,11 @@
             <a:avLst/>
           </a:prstGeom>
           <a:solidFill>
-            <a:srgbClr val="14143A"/>
+            <a:srgbClr val="EEF6FF"/>
           </a:solidFill>
-          <a:ln w="19050">
+          <a:ln w="22860">
             <a:solidFill>
-              <a:srgbClr val="44CCEE"/>
+              <a:srgbClr val="1199BB"/>
             </a:solidFill>
           </a:ln>
         </p:spPr>
@@ -3804,7 +3804,7 @@
             <a:r>
               <a:rPr sz="1200" b="1">
                 <a:solidFill>
-                  <a:srgbClr val="44CCEE"/>
+                  <a:srgbClr val="1199BB"/>
                 </a:solidFill>
                 <a:latin typeface="游明朝"/>
               </a:rPr>
@@ -3839,7 +3839,7 @@
             <a:r>
               <a:rPr sz="1000" b="1">
                 <a:solidFill>
-                  <a:srgbClr val="FFD700"/>
+                  <a:srgbClr val="BB8800"/>
                 </a:solidFill>
                 <a:latin typeface="メイリオ"/>
               </a:rPr>
@@ -3874,7 +3874,7 @@
             <a:r>
               <a:rPr sz="800" b="0">
                 <a:solidFill>
-                  <a:srgbClr val="BBBBCC"/>
+                  <a:srgbClr val="555570"/>
                 </a:solidFill>
                 <a:latin typeface="メイリオ"/>
               </a:rPr>
@@ -3909,7 +3909,7 @@
             <a:r>
               <a:rPr sz="1000" b="1">
                 <a:solidFill>
-                  <a:srgbClr val="FFD700"/>
+                  <a:srgbClr val="BB8800"/>
                 </a:solidFill>
                 <a:latin typeface="メイリオ"/>
               </a:rPr>
@@ -3944,7 +3944,7 @@
             <a:r>
               <a:rPr sz="800" b="0">
                 <a:solidFill>
-                  <a:srgbClr val="BBBBCC"/>
+                  <a:srgbClr val="555570"/>
                 </a:solidFill>
                 <a:latin typeface="メイリオ"/>
               </a:rPr>
@@ -3979,7 +3979,7 @@
             <a:r>
               <a:rPr sz="1000" b="1">
                 <a:solidFill>
-                  <a:srgbClr val="FFD700"/>
+                  <a:srgbClr val="BB8800"/>
                 </a:solidFill>
                 <a:latin typeface="メイリオ"/>
               </a:rPr>
@@ -4014,7 +4014,7 @@
             <a:r>
               <a:rPr sz="800" b="0">
                 <a:solidFill>
-                  <a:srgbClr val="BBBBCC"/>
+                  <a:srgbClr val="555570"/>
                 </a:solidFill>
                 <a:latin typeface="メイリオ"/>
               </a:rPr>
@@ -4042,7 +4042,7 @@
           </a:solidFill>
           <a:ln w="12700">
             <a:solidFill>
-              <a:srgbClr val="FFD700"/>
+              <a:srgbClr val="BB8800"/>
             </a:solidFill>
           </a:ln>
         </p:spPr>
@@ -4094,7 +4094,7 @@
             <a:r>
               <a:rPr sz="900" b="1">
                 <a:solidFill>
-                  <a:srgbClr val="FFD700"/>
+                  <a:srgbClr val="BB8800"/>
                 </a:solidFill>
                 <a:latin typeface="メイリオ"/>
               </a:rPr>
@@ -4118,11 +4118,11 @@
             <a:avLst/>
           </a:prstGeom>
           <a:solidFill>
-            <a:srgbClr val="220022"/>
+            <a:srgbClr val="FFEEF8"/>
           </a:solidFill>
           <a:ln w="12700">
             <a:solidFill>
-              <a:srgbClr val="CC44AA"/>
+              <a:srgbClr val="CC22AA"/>
             </a:solidFill>
           </a:ln>
         </p:spPr>
@@ -4174,7 +4174,7 @@
             <a:r>
               <a:rPr sz="950" b="0">
                 <a:solidFill>
-                  <a:srgbClr val="FFFFFF"/>
+                  <a:srgbClr val="1A1A2E"/>
                 </a:solidFill>
                 <a:latin typeface="メイリオ"/>
               </a:rPr>
@@ -4198,11 +4198,11 @@
             <a:avLst/>
           </a:prstGeom>
           <a:solidFill>
-            <a:srgbClr val="14143A"/>
+            <a:srgbClr val="F5F0FA"/>
           </a:solidFill>
           <a:ln w="15240">
             <a:solidFill>
-              <a:srgbClr val="44CCEE"/>
+              <a:srgbClr val="1199BB"/>
             </a:solidFill>
           </a:ln>
         </p:spPr>
@@ -4254,7 +4254,7 @@
             <a:r>
               <a:rPr sz="1000" b="1">
                 <a:solidFill>
-                  <a:srgbClr val="44CCEE"/>
+                  <a:srgbClr val="1199BB"/>
                 </a:solidFill>
                 <a:latin typeface="メイリオ"/>
               </a:rPr>
@@ -4278,11 +4278,11 @@
             <a:avLst/>
           </a:prstGeom>
           <a:solidFill>
-            <a:srgbClr val="180828"/>
+            <a:srgbClr val="FFEEF8"/>
           </a:solidFill>
           <a:ln w="19050">
             <a:solidFill>
-              <a:srgbClr val="CC44AA"/>
+              <a:srgbClr val="CC22AA"/>
             </a:solidFill>
           </a:ln>
         </p:spPr>
@@ -4334,7 +4334,7 @@
             <a:r>
               <a:rPr sz="900" b="1">
                 <a:solidFill>
-                  <a:srgbClr val="CC44AA"/>
+                  <a:srgbClr val="CC22AA"/>
                 </a:solidFill>
                 <a:latin typeface="メイリオ"/>
               </a:rPr>
@@ -4369,7 +4369,7 @@
             <a:r>
               <a:rPr sz="850" b="0">
                 <a:solidFill>
-                  <a:srgbClr val="FFFFFF"/>
+                  <a:srgbClr val="1A1A2E"/>
                 </a:solidFill>
                 <a:latin typeface="メイリオ"/>
               </a:rPr>
@@ -4393,11 +4393,11 @@
             <a:avLst/>
           </a:prstGeom>
           <a:solidFill>
-            <a:srgbClr val="180828"/>
+            <a:srgbClr val="FFFBEE"/>
           </a:solidFill>
           <a:ln w="19050">
             <a:solidFill>
-              <a:srgbClr val="FFD700"/>
+              <a:srgbClr val="BB8800"/>
             </a:solidFill>
           </a:ln>
         </p:spPr>
@@ -4449,7 +4449,7 @@
             <a:r>
               <a:rPr sz="900" b="1">
                 <a:solidFill>
-                  <a:srgbClr val="FFD700"/>
+                  <a:srgbClr val="BB8800"/>
                 </a:solidFill>
                 <a:latin typeface="メイリオ"/>
               </a:rPr>
@@ -4484,7 +4484,7 @@
             <a:r>
               <a:rPr sz="850" b="0">
                 <a:solidFill>
-                  <a:srgbClr val="FFFFFF"/>
+                  <a:srgbClr val="1A1A2E"/>
                 </a:solidFill>
                 <a:latin typeface="メイリオ"/>
               </a:rPr>
@@ -4508,11 +4508,11 @@
             <a:avLst/>
           </a:prstGeom>
           <a:solidFill>
-            <a:srgbClr val="180828"/>
+            <a:srgbClr val="EEF6FF"/>
           </a:solidFill>
           <a:ln w="19050">
             <a:solidFill>
-              <a:srgbClr val="44CCEE"/>
+              <a:srgbClr val="1199BB"/>
             </a:solidFill>
           </a:ln>
         </p:spPr>
@@ -4564,7 +4564,7 @@
             <a:r>
               <a:rPr sz="900" b="1">
                 <a:solidFill>
-                  <a:srgbClr val="44CCEE"/>
+                  <a:srgbClr val="1199BB"/>
                 </a:solidFill>
                 <a:latin typeface="メイリオ"/>
               </a:rPr>
@@ -4599,7 +4599,7 @@
             <a:r>
               <a:rPr sz="850" b="0">
                 <a:solidFill>
-                  <a:srgbClr val="FFFFFF"/>
+                  <a:srgbClr val="1A1A2E"/>
                 </a:solidFill>
                 <a:latin typeface="メイリオ"/>
               </a:rPr>
@@ -4623,11 +4623,11 @@
             <a:avLst/>
           </a:prstGeom>
           <a:solidFill>
-            <a:srgbClr val="180828"/>
+            <a:srgbClr val="FFEEF8"/>
           </a:solidFill>
           <a:ln w="19050">
             <a:solidFill>
-              <a:srgbClr val="EE88CC"/>
+              <a:srgbClr val="DD55BB"/>
             </a:solidFill>
           </a:ln>
         </p:spPr>
@@ -4679,7 +4679,7 @@
             <a:r>
               <a:rPr sz="900" b="1">
                 <a:solidFill>
-                  <a:srgbClr val="EE88CC"/>
+                  <a:srgbClr val="DD55BB"/>
                 </a:solidFill>
                 <a:latin typeface="メイリオ"/>
               </a:rPr>
@@ -4714,7 +4714,7 @@
             <a:r>
               <a:rPr sz="850" b="0">
                 <a:solidFill>
-                  <a:srgbClr val="FFFFFF"/>
+                  <a:srgbClr val="1A1A2E"/>
                 </a:solidFill>
                 <a:latin typeface="メイリオ"/>
               </a:rPr>
@@ -4738,7 +4738,7 @@
             <a:avLst/>
           </a:prstGeom>
           <a:solidFill>
-            <a:srgbClr val="05051A"/>
+            <a:srgbClr val="221030"/>
           </a:solidFill>
           <a:ln>
             <a:noFill/>
@@ -4792,7 +4792,7 @@
             <a:r>
               <a:rPr sz="900" b="1">
                 <a:solidFill>
-                  <a:srgbClr val="FFD700"/>
+                  <a:srgbClr val="BB8800"/>
                 </a:solidFill>
                 <a:latin typeface="メイリオ"/>
               </a:rPr>
@@ -4827,7 +4827,7 @@
             <a:r>
               <a:rPr sz="800" b="0">
                 <a:solidFill>
-                  <a:srgbClr val="BBBBCC"/>
+                  <a:srgbClr val="888899"/>
                 </a:solidFill>
                 <a:latin typeface="メイリオ"/>
               </a:rPr>
@@ -4982,7 +4982,7 @@
             <a:r>
               <a:rPr sz="1000" b="0">
                 <a:solidFill>
-                  <a:srgbClr val="EE88CC"/>
+                  <a:srgbClr val="FFCCEE"/>
                 </a:solidFill>
                 <a:latin typeface="メイリオ"/>
               </a:rPr>
@@ -5017,7 +5017,7 @@
             <a:r>
               <a:rPr sz="900" b="1">
                 <a:solidFill>
-                  <a:srgbClr val="EE88CC"/>
+                  <a:srgbClr val="CC22AA"/>
                 </a:solidFill>
                 <a:latin typeface="メイリオ"/>
               </a:rPr>
@@ -5041,11 +5041,11 @@
             <a:avLst/>
           </a:prstGeom>
           <a:solidFill>
-            <a:srgbClr val="14143A"/>
+            <a:srgbClr val="F5F0FA"/>
           </a:solidFill>
           <a:ln w="19050">
             <a:solidFill>
-              <a:srgbClr val="CC44AA"/>
+              <a:srgbClr val="CC22AA"/>
             </a:solidFill>
           </a:ln>
         </p:spPr>
@@ -5097,7 +5097,7 @@
             <a:r>
               <a:rPr sz="950" b="0">
                 <a:solidFill>
-                  <a:srgbClr val="FFFFFF"/>
+                  <a:srgbClr val="1A1A2E"/>
                 </a:solidFill>
                 <a:latin typeface="メイリオ"/>
               </a:rPr>
@@ -5122,11 +5122,11 @@
             <a:avLst/>
           </a:prstGeom>
           <a:solidFill>
-            <a:srgbClr val="201030"/>
+            <a:srgbClr val="FFEEF8"/>
           </a:solidFill>
           <a:ln w="19050">
             <a:solidFill>
-              <a:srgbClr val="CC44AA"/>
+              <a:srgbClr val="CC22AA"/>
             </a:solidFill>
           </a:ln>
         </p:spPr>
@@ -5178,7 +5178,7 @@
             <a:r>
               <a:rPr sz="950" b="0">
                 <a:solidFill>
-                  <a:srgbClr val="FFFFFF"/>
+                  <a:srgbClr val="1A1A2E"/>
                 </a:solidFill>
                 <a:latin typeface="メイリオ"/>
               </a:rPr>
@@ -5203,11 +5203,11 @@
             <a:avLst/>
           </a:prstGeom>
           <a:solidFill>
-            <a:srgbClr val="101035"/>
+            <a:srgbClr val="EEF6FF"/>
           </a:solidFill>
           <a:ln w="19050">
             <a:solidFill>
-              <a:srgbClr val="44CCEE"/>
+              <a:srgbClr val="1199BB"/>
             </a:solidFill>
           </a:ln>
         </p:spPr>
@@ -5259,7 +5259,7 @@
             <a:r>
               <a:rPr sz="950" b="0">
                 <a:solidFill>
-                  <a:srgbClr val="FFFFFF"/>
+                  <a:srgbClr val="1A1A2E"/>
                 </a:solidFill>
                 <a:latin typeface="メイリオ"/>
               </a:rPr>
@@ -5284,11 +5284,11 @@
             <a:avLst/>
           </a:prstGeom>
           <a:solidFill>
-            <a:srgbClr val="300030"/>
+            <a:srgbClr val="FFEEF8"/>
           </a:solidFill>
           <a:ln w="19050">
             <a:solidFill>
-              <a:srgbClr val="FFD700"/>
+              <a:srgbClr val="CC22AA"/>
             </a:solidFill>
           </a:ln>
         </p:spPr>
@@ -5340,7 +5340,7 @@
             <a:r>
               <a:rPr sz="950" b="0">
                 <a:solidFill>
-                  <a:srgbClr val="FFFFFF"/>
+                  <a:srgbClr val="1A1A2E"/>
                 </a:solidFill>
                 <a:latin typeface="メイリオ"/>
               </a:rPr>
@@ -5365,11 +5365,11 @@
             <a:avLst/>
           </a:prstGeom>
           <a:solidFill>
-            <a:srgbClr val="152510"/>
+            <a:srgbClr val="EEFFF5"/>
           </a:solidFill>
           <a:ln w="19050">
             <a:solidFill>
-              <a:srgbClr val="44EE88"/>
+              <a:srgbClr val="22AA66"/>
             </a:solidFill>
           </a:ln>
         </p:spPr>
@@ -5421,7 +5421,7 @@
             <a:r>
               <a:rPr sz="950" b="0">
                 <a:solidFill>
-                  <a:srgbClr val="FFFFFF"/>
+                  <a:srgbClr val="1A1A2E"/>
                 </a:solidFill>
                 <a:latin typeface="メイリオ"/>
               </a:rPr>
@@ -5446,11 +5446,11 @@
             <a:avLst/>
           </a:prstGeom>
           <a:solidFill>
-            <a:srgbClr val="301000"/>
+            <a:srgbClr val="FFFBEE"/>
           </a:solidFill>
           <a:ln w="19050">
             <a:solidFill>
-              <a:srgbClr val="FFD700"/>
+              <a:srgbClr val="BB8800"/>
             </a:solidFill>
           </a:ln>
         </p:spPr>
@@ -5502,7 +5502,7 @@
             <a:r>
               <a:rPr sz="950" b="0">
                 <a:solidFill>
-                  <a:srgbClr val="FFFFFF"/>
+                  <a:srgbClr val="1A1A2E"/>
                 </a:solidFill>
                 <a:latin typeface="メイリオ"/>
               </a:rPr>
@@ -5538,7 +5538,7 @@
             <a:r>
               <a:rPr sz="800" b="1">
                 <a:solidFill>
-                  <a:srgbClr val="FFD700"/>
+                  <a:srgbClr val="BB8800"/>
                 </a:solidFill>
                 <a:latin typeface="メイリオ"/>
               </a:rPr>
@@ -5562,7 +5562,7 @@
             <a:avLst/>
           </a:prstGeom>
           <a:solidFill>
-            <a:srgbClr val="CC44AA"/>
+            <a:srgbClr val="CC22AA"/>
           </a:solidFill>
           <a:ln>
             <a:noFill/>
@@ -5605,7 +5605,7 @@
             <a:avLst/>
           </a:prstGeom>
           <a:solidFill>
-            <a:srgbClr val="CC44AA"/>
+            <a:srgbClr val="CC22AA"/>
           </a:solidFill>
           <a:ln>
             <a:noFill/>
@@ -5648,7 +5648,7 @@
             <a:avLst/>
           </a:prstGeom>
           <a:solidFill>
-            <a:srgbClr val="CC44AA"/>
+            <a:srgbClr val="CC22AA"/>
           </a:solidFill>
           <a:ln>
             <a:noFill/>
@@ -5691,7 +5691,7 @@
             <a:avLst/>
           </a:prstGeom>
           <a:solidFill>
-            <a:srgbClr val="CC44AA"/>
+            <a:srgbClr val="CC22AA"/>
           </a:solidFill>
           <a:ln>
             <a:noFill/>
@@ -5734,7 +5734,7 @@
             <a:avLst/>
           </a:prstGeom>
           <a:solidFill>
-            <a:srgbClr val="CC44AA"/>
+            <a:srgbClr val="CC22AA"/>
           </a:solidFill>
           <a:ln>
             <a:noFill/>
@@ -5777,7 +5777,7 @@
             <a:avLst/>
           </a:prstGeom>
           <a:solidFill>
-            <a:srgbClr val="CC44AA"/>
+            <a:srgbClr val="CC22AA"/>
           </a:solidFill>
           <a:ln>
             <a:noFill/>
@@ -5820,7 +5820,7 @@
             <a:avLst/>
           </a:prstGeom>
           <a:solidFill>
-            <a:srgbClr val="CC44AA"/>
+            <a:srgbClr val="CC22AA"/>
           </a:solidFill>
           <a:ln>
             <a:noFill/>
@@ -5863,7 +5863,7 @@
             <a:avLst/>
           </a:prstGeom>
           <a:solidFill>
-            <a:srgbClr val="CC44AA"/>
+            <a:srgbClr val="CC22AA"/>
           </a:solidFill>
           <a:ln>
             <a:noFill/>
@@ -5906,7 +5906,7 @@
             <a:avLst/>
           </a:prstGeom>
           <a:solidFill>
-            <a:srgbClr val="CC44AA"/>
+            <a:srgbClr val="CC22AA"/>
           </a:solidFill>
           <a:ln>
             <a:noFill/>
@@ -5949,7 +5949,7 @@
             <a:avLst/>
           </a:prstGeom>
           <a:solidFill>
-            <a:srgbClr val="CC44AA"/>
+            <a:srgbClr val="CC22AA"/>
           </a:solidFill>
           <a:ln>
             <a:noFill/>
@@ -5992,7 +5992,7 @@
             <a:avLst/>
           </a:prstGeom>
           <a:solidFill>
-            <a:srgbClr val="CC44AA"/>
+            <a:srgbClr val="CC22AA"/>
           </a:solidFill>
           <a:ln>
             <a:noFill/>
@@ -6035,7 +6035,7 @@
             <a:avLst/>
           </a:prstGeom>
           <a:solidFill>
-            <a:srgbClr val="CC44AA"/>
+            <a:srgbClr val="CC22AA"/>
           </a:solidFill>
           <a:ln>
             <a:noFill/>
@@ -6089,7 +6089,7 @@
             <a:r>
               <a:rPr sz="800" b="0">
                 <a:solidFill>
-                  <a:srgbClr val="CC44AA"/>
+                  <a:srgbClr val="CC22AA"/>
                 </a:solidFill>
                 <a:latin typeface="メイリオ"/>
               </a:rPr>
@@ -6124,7 +6124,7 @@
             <a:r>
               <a:rPr sz="900" b="1">
                 <a:solidFill>
-                  <a:srgbClr val="FFD700"/>
+                  <a:srgbClr val="BB8800"/>
                 </a:solidFill>
                 <a:latin typeface="メイリオ"/>
               </a:rPr>
@@ -6148,11 +6148,11 @@
             <a:avLst/>
           </a:prstGeom>
           <a:solidFill>
-            <a:srgbClr val="351030"/>
+            <a:srgbClr val="FFFBEE"/>
           </a:solidFill>
           <a:ln w="19050">
             <a:solidFill>
-              <a:srgbClr val="FFD700"/>
+              <a:srgbClr val="BB8800"/>
             </a:solidFill>
           </a:ln>
         </p:spPr>
@@ -6204,7 +6204,7 @@
             <a:r>
               <a:rPr sz="900" b="0">
                 <a:solidFill>
-                  <a:srgbClr val="FFFFFF"/>
+                  <a:srgbClr val="1A1A2E"/>
                 </a:solidFill>
                 <a:latin typeface="メイリオ"/>
               </a:rPr>
@@ -6230,11 +6230,11 @@
             <a:avLst/>
           </a:prstGeom>
           <a:solidFill>
-            <a:srgbClr val="301500"/>
+            <a:srgbClr val="FFFBEE"/>
           </a:solidFill>
           <a:ln w="19050">
             <a:solidFill>
-              <a:srgbClr val="FFD700"/>
+              <a:srgbClr val="BB8800"/>
             </a:solidFill>
           </a:ln>
         </p:spPr>
@@ -6286,7 +6286,7 @@
             <a:r>
               <a:rPr sz="900" b="0">
                 <a:solidFill>
-                  <a:srgbClr val="FFFFFF"/>
+                  <a:srgbClr val="1A1A2E"/>
                 </a:solidFill>
                 <a:latin typeface="メイリオ"/>
               </a:rPr>
@@ -6312,11 +6312,11 @@
             <a:avLst/>
           </a:prstGeom>
           <a:solidFill>
-            <a:srgbClr val="001535"/>
+            <a:srgbClr val="EEF6FF"/>
           </a:solidFill>
           <a:ln w="19050">
             <a:solidFill>
-              <a:srgbClr val="44CCEE"/>
+              <a:srgbClr val="1199BB"/>
             </a:solidFill>
           </a:ln>
         </p:spPr>
@@ -6368,7 +6368,7 @@
             <a:r>
               <a:rPr sz="900" b="0">
                 <a:solidFill>
-                  <a:srgbClr val="FFFFFF"/>
+                  <a:srgbClr val="1A1A2E"/>
                 </a:solidFill>
                 <a:latin typeface="メイリオ"/>
               </a:rPr>
@@ -6394,11 +6394,11 @@
             <a:avLst/>
           </a:prstGeom>
           <a:solidFill>
-            <a:srgbClr val="350008"/>
+            <a:srgbClr val="FFEEEE"/>
           </a:solidFill>
           <a:ln w="31750">
             <a:solidFill>
-              <a:srgbClr val="FF5555"/>
+              <a:srgbClr val="CC3333"/>
             </a:solidFill>
           </a:ln>
         </p:spPr>
@@ -6450,7 +6450,7 @@
             <a:r>
               <a:rPr sz="900" b="0">
                 <a:solidFill>
-                  <a:srgbClr val="FFFFFF"/>
+                  <a:srgbClr val="1A1A2E"/>
                 </a:solidFill>
                 <a:latin typeface="メイリオ"/>
               </a:rPr>
@@ -6476,11 +6476,11 @@
             <a:avLst/>
           </a:prstGeom>
           <a:solidFill>
-            <a:srgbClr val="250025"/>
+            <a:srgbClr val="FFEEF8"/>
           </a:solidFill>
           <a:ln w="19050">
             <a:solidFill>
-              <a:srgbClr val="CC44AA"/>
+              <a:srgbClr val="CC22AA"/>
             </a:solidFill>
           </a:ln>
         </p:spPr>
@@ -6532,7 +6532,7 @@
             <a:r>
               <a:rPr sz="900" b="0">
                 <a:solidFill>
-                  <a:srgbClr val="FFFFFF"/>
+                  <a:srgbClr val="1A1A2E"/>
                 </a:solidFill>
                 <a:latin typeface="メイリオ"/>
               </a:rPr>
@@ -6557,11 +6557,11 @@
             <a:avLst/>
           </a:prstGeom>
           <a:solidFill>
-            <a:srgbClr val="101010"/>
+            <a:srgbClr val="F2F2F5"/>
           </a:solidFill>
           <a:ln w="19050">
             <a:solidFill>
-              <a:srgbClr val="BBBBCC"/>
+              <a:srgbClr val="888899"/>
             </a:solidFill>
           </a:ln>
         </p:spPr>
@@ -6613,7 +6613,7 @@
             <a:r>
               <a:rPr sz="900" b="0">
                 <a:solidFill>
-                  <a:srgbClr val="FFFFFF"/>
+                  <a:srgbClr val="1A1A2E"/>
                 </a:solidFill>
                 <a:latin typeface="メイリオ"/>
               </a:rPr>
@@ -6639,7 +6639,7 @@
             <a:avLst/>
           </a:prstGeom>
           <a:solidFill>
-            <a:srgbClr val="CC44AA"/>
+            <a:srgbClr val="CC22AA"/>
           </a:solidFill>
           <a:ln>
             <a:noFill/>
@@ -6682,7 +6682,7 @@
             <a:avLst/>
           </a:prstGeom>
           <a:solidFill>
-            <a:srgbClr val="CC44AA"/>
+            <a:srgbClr val="CC22AA"/>
           </a:solidFill>
           <a:ln>
             <a:noFill/>
@@ -6725,7 +6725,7 @@
             <a:avLst/>
           </a:prstGeom>
           <a:solidFill>
-            <a:srgbClr val="CC44AA"/>
+            <a:srgbClr val="CC22AA"/>
           </a:solidFill>
           <a:ln>
             <a:noFill/>
@@ -6768,7 +6768,7 @@
             <a:avLst/>
           </a:prstGeom>
           <a:solidFill>
-            <a:srgbClr val="CC44AA"/>
+            <a:srgbClr val="CC22AA"/>
           </a:solidFill>
           <a:ln>
             <a:noFill/>
@@ -6811,7 +6811,7 @@
             <a:avLst/>
           </a:prstGeom>
           <a:solidFill>
-            <a:srgbClr val="CC44AA"/>
+            <a:srgbClr val="CC22AA"/>
           </a:solidFill>
           <a:ln>
             <a:noFill/>
@@ -6854,7 +6854,7 @@
             <a:avLst/>
           </a:prstGeom>
           <a:solidFill>
-            <a:srgbClr val="CC44AA"/>
+            <a:srgbClr val="CC22AA"/>
           </a:solidFill>
           <a:ln>
             <a:noFill/>
@@ -6897,7 +6897,7 @@
             <a:avLst/>
           </a:prstGeom>
           <a:solidFill>
-            <a:srgbClr val="CC44AA"/>
+            <a:srgbClr val="CC22AA"/>
           </a:solidFill>
           <a:ln>
             <a:noFill/>
@@ -6940,7 +6940,7 @@
             <a:avLst/>
           </a:prstGeom>
           <a:solidFill>
-            <a:srgbClr val="CC44AA"/>
+            <a:srgbClr val="CC22AA"/>
           </a:solidFill>
           <a:ln>
             <a:noFill/>
@@ -6983,7 +6983,7 @@
             <a:avLst/>
           </a:prstGeom>
           <a:solidFill>
-            <a:srgbClr val="CC44AA"/>
+            <a:srgbClr val="CC22AA"/>
           </a:solidFill>
           <a:ln>
             <a:noFill/>
@@ -7026,7 +7026,7 @@
             <a:avLst/>
           </a:prstGeom>
           <a:solidFill>
-            <a:srgbClr val="CC44AA"/>
+            <a:srgbClr val="CC22AA"/>
           </a:solidFill>
           <a:ln>
             <a:noFill/>
@@ -7069,11 +7069,11 @@
             <a:avLst/>
           </a:prstGeom>
           <a:solidFill>
-            <a:srgbClr val="080820"/>
+            <a:srgbClr val="FFFBEE"/>
           </a:solidFill>
           <a:ln w="12700">
             <a:solidFill>
-              <a:srgbClr val="FFD700"/>
+              <a:srgbClr val="BB8800"/>
             </a:solidFill>
           </a:ln>
         </p:spPr>
@@ -7125,7 +7125,7 @@
             <a:r>
               <a:rPr sz="950" b="1">
                 <a:solidFill>
-                  <a:srgbClr val="FFD700"/>
+                  <a:srgbClr val="BB8800"/>
                 </a:solidFill>
                 <a:latin typeface="メイリオ"/>
               </a:rPr>
@@ -7160,7 +7160,7 @@
             <a:r>
               <a:rPr sz="750" b="0">
                 <a:solidFill>
-                  <a:srgbClr val="BBBBCC"/>
+                  <a:srgbClr val="555570"/>
                 </a:solidFill>
                 <a:latin typeface="メイリオ"/>
               </a:rPr>
@@ -7184,11 +7184,11 @@
             <a:avLst/>
           </a:prstGeom>
           <a:solidFill>
-            <a:srgbClr val="080820"/>
+            <a:srgbClr val="FFEEEE"/>
           </a:solidFill>
           <a:ln w="12700">
             <a:solidFill>
-              <a:srgbClr val="FF5555"/>
+              <a:srgbClr val="CC3333"/>
             </a:solidFill>
           </a:ln>
         </p:spPr>
@@ -7240,7 +7240,7 @@
             <a:r>
               <a:rPr sz="950" b="1">
                 <a:solidFill>
-                  <a:srgbClr val="FF5555"/>
+                  <a:srgbClr val="CC3333"/>
                 </a:solidFill>
                 <a:latin typeface="メイリオ"/>
               </a:rPr>
@@ -7275,7 +7275,7 @@
             <a:r>
               <a:rPr sz="750" b="0">
                 <a:solidFill>
-                  <a:srgbClr val="BBBBCC"/>
+                  <a:srgbClr val="555570"/>
                 </a:solidFill>
                 <a:latin typeface="メイリオ"/>
               </a:rPr>
@@ -7299,11 +7299,11 @@
             <a:avLst/>
           </a:prstGeom>
           <a:solidFill>
-            <a:srgbClr val="080820"/>
+            <a:srgbClr val="EEF6FF"/>
           </a:solidFill>
           <a:ln w="12700">
             <a:solidFill>
-              <a:srgbClr val="44CCEE"/>
+              <a:srgbClr val="1199BB"/>
             </a:solidFill>
           </a:ln>
         </p:spPr>
@@ -7355,7 +7355,7 @@
             <a:r>
               <a:rPr sz="950" b="1">
                 <a:solidFill>
-                  <a:srgbClr val="44CCEE"/>
+                  <a:srgbClr val="1199BB"/>
                 </a:solidFill>
                 <a:latin typeface="メイリオ"/>
               </a:rPr>
@@ -7390,7 +7390,7 @@
             <a:r>
               <a:rPr sz="750" b="0">
                 <a:solidFill>
-                  <a:srgbClr val="BBBBCC"/>
+                  <a:srgbClr val="555570"/>
                 </a:solidFill>
                 <a:latin typeface="メイリオ"/>
               </a:rPr>
@@ -7414,7 +7414,7 @@
             <a:avLst/>
           </a:prstGeom>
           <a:solidFill>
-            <a:srgbClr val="05051A"/>
+            <a:srgbClr val="221030"/>
           </a:solidFill>
           <a:ln>
             <a:noFill/>
@@ -7468,7 +7468,7 @@
             <a:r>
               <a:rPr sz="900" b="1">
                 <a:solidFill>
-                  <a:srgbClr val="FFD700"/>
+                  <a:srgbClr val="BB8800"/>
                 </a:solidFill>
                 <a:latin typeface="メイリオ"/>
               </a:rPr>
@@ -7503,7 +7503,7 @@
             <a:r>
               <a:rPr sz="800" b="0">
                 <a:solidFill>
-                  <a:srgbClr val="BBBBCC"/>
+                  <a:srgbClr val="888899"/>
                 </a:solidFill>
                 <a:latin typeface="メイリオ"/>
               </a:rPr>
@@ -7658,7 +7658,7 @@
             <a:r>
               <a:rPr sz="1000" b="0">
                 <a:solidFill>
-                  <a:srgbClr val="EE88CC"/>
+                  <a:srgbClr val="FFCCEE"/>
                 </a:solidFill>
                 <a:latin typeface="メイリオ"/>
               </a:rPr>
@@ -7682,11 +7682,11 @@
             <a:avLst/>
           </a:prstGeom>
           <a:solidFill>
-            <a:srgbClr val="14143A"/>
+            <a:srgbClr val="FFEEF8"/>
           </a:solidFill>
           <a:ln w="19050">
             <a:solidFill>
-              <a:srgbClr val="CC44AA"/>
+              <a:srgbClr val="CC22AA"/>
             </a:solidFill>
           </a:ln>
         </p:spPr>
@@ -7738,7 +7738,7 @@
             <a:r>
               <a:rPr sz="1000" b="1">
                 <a:solidFill>
-                  <a:srgbClr val="CC44AA"/>
+                  <a:srgbClr val="CC22AA"/>
                 </a:solidFill>
                 <a:latin typeface="メイリオ"/>
               </a:rPr>
@@ -7773,7 +7773,7 @@
             <a:r>
               <a:rPr sz="850" b="0">
                 <a:solidFill>
-                  <a:srgbClr val="FFFFFF"/>
+                  <a:srgbClr val="1A1A2E"/>
                 </a:solidFill>
                 <a:latin typeface="メイリオ"/>
               </a:rPr>
@@ -7808,7 +7808,7 @@
             <a:r>
               <a:rPr sz="850" b="0">
                 <a:solidFill>
-                  <a:srgbClr val="FFFFFF"/>
+                  <a:srgbClr val="1A1A2E"/>
                 </a:solidFill>
                 <a:latin typeface="メイリオ"/>
               </a:rPr>
@@ -7843,7 +7843,7 @@
             <a:r>
               <a:rPr sz="850" b="0">
                 <a:solidFill>
-                  <a:srgbClr val="FFFFFF"/>
+                  <a:srgbClr val="1A1A2E"/>
                 </a:solidFill>
                 <a:latin typeface="メイリオ"/>
               </a:rPr>
@@ -7878,7 +7878,7 @@
             <a:r>
               <a:rPr sz="850" b="0">
                 <a:solidFill>
-                  <a:srgbClr val="FFFFFF"/>
+                  <a:srgbClr val="1A1A2E"/>
                 </a:solidFill>
                 <a:latin typeface="メイリオ"/>
               </a:rPr>
@@ -7913,7 +7913,7 @@
             <a:r>
               <a:rPr sz="850" b="0">
                 <a:solidFill>
-                  <a:srgbClr val="FFFFFF"/>
+                  <a:srgbClr val="1A1A2E"/>
                 </a:solidFill>
                 <a:latin typeface="メイリオ"/>
               </a:rPr>
@@ -7937,11 +7937,11 @@
             <a:avLst/>
           </a:prstGeom>
           <a:solidFill>
-            <a:srgbClr val="200020"/>
+            <a:srgbClr val="FFFBEE"/>
           </a:solidFill>
           <a:ln w="22860">
             <a:solidFill>
-              <a:srgbClr val="FFD700"/>
+              <a:srgbClr val="BB8800"/>
             </a:solidFill>
           </a:ln>
         </p:spPr>
@@ -7993,7 +7993,7 @@
             <a:r>
               <a:rPr sz="950" b="1">
                 <a:solidFill>
-                  <a:srgbClr val="FFD700"/>
+                  <a:srgbClr val="BB8800"/>
                 </a:solidFill>
                 <a:latin typeface="メイリオ"/>
               </a:rPr>
@@ -8028,7 +8028,7 @@
             <a:r>
               <a:rPr sz="800" b="0">
                 <a:solidFill>
-                  <a:srgbClr val="BBBBCC"/>
+                  <a:srgbClr val="555570"/>
                 </a:solidFill>
                 <a:latin typeface="メイリオ"/>
               </a:rPr>
@@ -8052,11 +8052,11 @@
             <a:avLst/>
           </a:prstGeom>
           <a:solidFill>
-            <a:srgbClr val="14143A"/>
+            <a:srgbClr val="EEF6FF"/>
           </a:solidFill>
           <a:ln w="19050">
             <a:solidFill>
-              <a:srgbClr val="44CCEE"/>
+              <a:srgbClr val="1199BB"/>
             </a:solidFill>
           </a:ln>
         </p:spPr>
@@ -8108,7 +8108,7 @@
             <a:r>
               <a:rPr sz="1000" b="1">
                 <a:solidFill>
-                  <a:srgbClr val="44CCEE"/>
+                  <a:srgbClr val="1199BB"/>
                 </a:solidFill>
                 <a:latin typeface="メイリオ"/>
               </a:rPr>
@@ -8143,7 +8143,7 @@
             <a:r>
               <a:rPr sz="900" b="1">
                 <a:solidFill>
-                  <a:srgbClr val="FFFFFF"/>
+                  <a:srgbClr val="1A1A2E"/>
                 </a:solidFill>
                 <a:latin typeface="メイリオ"/>
               </a:rPr>
@@ -8178,7 +8178,7 @@
             <a:r>
               <a:rPr sz="800" b="0">
                 <a:solidFill>
-                  <a:srgbClr val="BBBBCC"/>
+                  <a:srgbClr val="555570"/>
                 </a:solidFill>
                 <a:latin typeface="メイリオ"/>
               </a:rPr>
@@ -8213,7 +8213,7 @@
             <a:r>
               <a:rPr sz="900" b="1">
                 <a:solidFill>
-                  <a:srgbClr val="FFD700"/>
+                  <a:srgbClr val="BB8800"/>
                 </a:solidFill>
                 <a:latin typeface="メイリオ"/>
               </a:rPr>
@@ -8248,7 +8248,7 @@
             <a:r>
               <a:rPr sz="800" b="0">
                 <a:solidFill>
-                  <a:srgbClr val="BBBBCC"/>
+                  <a:srgbClr val="555570"/>
                 </a:solidFill>
                 <a:latin typeface="メイリオ"/>
               </a:rPr>
@@ -8283,7 +8283,7 @@
             <a:r>
               <a:rPr sz="900" b="1">
                 <a:solidFill>
-                  <a:srgbClr val="EE88CC"/>
+                  <a:srgbClr val="DD55BB"/>
                 </a:solidFill>
                 <a:latin typeface="メイリオ"/>
               </a:rPr>
@@ -8318,7 +8318,7 @@
             <a:r>
               <a:rPr sz="800" b="0">
                 <a:solidFill>
-                  <a:srgbClr val="BBBBCC"/>
+                  <a:srgbClr val="555570"/>
                 </a:solidFill>
                 <a:latin typeface="メイリオ"/>
               </a:rPr>
@@ -8342,11 +8342,11 @@
             <a:avLst/>
           </a:prstGeom>
           <a:solidFill>
-            <a:srgbClr val="14143A"/>
+            <a:srgbClr val="FFEEF8"/>
           </a:solidFill>
           <a:ln w="19050">
             <a:solidFill>
-              <a:srgbClr val="CC44AA"/>
+              <a:srgbClr val="CC22AA"/>
             </a:solidFill>
           </a:ln>
         </p:spPr>
@@ -8398,7 +8398,7 @@
             <a:r>
               <a:rPr sz="1000" b="1">
                 <a:solidFill>
-                  <a:srgbClr val="CC44AA"/>
+                  <a:srgbClr val="CC22AA"/>
                 </a:solidFill>
                 <a:latin typeface="メイリオ"/>
               </a:rPr>
@@ -8433,7 +8433,7 @@
             <a:r>
               <a:rPr sz="900" b="1">
                 <a:solidFill>
-                  <a:srgbClr val="EE88CC"/>
+                  <a:srgbClr val="CC22AA"/>
                 </a:solidFill>
                 <a:latin typeface="メイリオ"/>
               </a:rPr>
@@ -8468,7 +8468,7 @@
             <a:r>
               <a:rPr sz="900" b="0">
                 <a:solidFill>
-                  <a:srgbClr val="FFFFFF"/>
+                  <a:srgbClr val="1A1A2E"/>
                 </a:solidFill>
                 <a:latin typeface="メイリオ"/>
               </a:rPr>
@@ -8503,7 +8503,7 @@
             <a:r>
               <a:rPr sz="900" b="1">
                 <a:solidFill>
-                  <a:srgbClr val="EE88CC"/>
+                  <a:srgbClr val="CC22AA"/>
                 </a:solidFill>
                 <a:latin typeface="メイリオ"/>
               </a:rPr>
@@ -8538,7 +8538,7 @@
             <a:r>
               <a:rPr sz="900" b="0">
                 <a:solidFill>
-                  <a:srgbClr val="FFFFFF"/>
+                  <a:srgbClr val="1A1A2E"/>
                 </a:solidFill>
                 <a:latin typeface="メイリオ"/>
               </a:rPr>
@@ -8573,7 +8573,7 @@
             <a:r>
               <a:rPr sz="900" b="1">
                 <a:solidFill>
-                  <a:srgbClr val="EE88CC"/>
+                  <a:srgbClr val="CC22AA"/>
                 </a:solidFill>
                 <a:latin typeface="メイリオ"/>
               </a:rPr>
@@ -8608,7 +8608,7 @@
             <a:r>
               <a:rPr sz="900" b="0">
                 <a:solidFill>
-                  <a:srgbClr val="FFFFFF"/>
+                  <a:srgbClr val="1A1A2E"/>
                 </a:solidFill>
                 <a:latin typeface="メイリオ"/>
               </a:rPr>
@@ -8632,11 +8632,11 @@
             <a:avLst/>
           </a:prstGeom>
           <a:solidFill>
-            <a:srgbClr val="0C0C28"/>
+            <a:srgbClr val="EEF6FF"/>
           </a:solidFill>
           <a:ln w="12700">
             <a:solidFill>
-              <a:srgbClr val="44CCEE"/>
+              <a:srgbClr val="1199BB"/>
             </a:solidFill>
           </a:ln>
         </p:spPr>
@@ -8688,7 +8688,7 @@
             <a:r>
               <a:rPr sz="900" b="1">
                 <a:solidFill>
-                  <a:srgbClr val="44CCEE"/>
+                  <a:srgbClr val="1199BB"/>
                 </a:solidFill>
                 <a:latin typeface="メイリオ"/>
               </a:rPr>
@@ -8723,7 +8723,7 @@
             <a:r>
               <a:rPr sz="800" b="0">
                 <a:solidFill>
-                  <a:srgbClr val="BBBBCC"/>
+                  <a:srgbClr val="555570"/>
                 </a:solidFill>
                 <a:latin typeface="メイリオ"/>
               </a:rPr>
@@ -8758,7 +8758,7 @@
             <a:r>
               <a:rPr sz="800" b="0">
                 <a:solidFill>
-                  <a:srgbClr val="BBBBCC"/>
+                  <a:srgbClr val="555570"/>
                 </a:solidFill>
                 <a:latin typeface="メイリオ"/>
               </a:rPr>
@@ -8793,7 +8793,7 @@
             <a:r>
               <a:rPr sz="800" b="0">
                 <a:solidFill>
-                  <a:srgbClr val="BBBBCC"/>
+                  <a:srgbClr val="555570"/>
                 </a:solidFill>
                 <a:latin typeface="メイリオ"/>
               </a:rPr>
@@ -8817,7 +8817,7 @@
             <a:avLst/>
           </a:prstGeom>
           <a:solidFill>
-            <a:srgbClr val="05051A"/>
+            <a:srgbClr val="221030"/>
           </a:solidFill>
           <a:ln>
             <a:noFill/>
@@ -8871,7 +8871,7 @@
             <a:r>
               <a:rPr sz="900" b="1">
                 <a:solidFill>
-                  <a:srgbClr val="FFD700"/>
+                  <a:srgbClr val="BB8800"/>
                 </a:solidFill>
                 <a:latin typeface="メイリオ"/>
               </a:rPr>
@@ -8906,7 +8906,7 @@
             <a:r>
               <a:rPr sz="800" b="0">
                 <a:solidFill>
-                  <a:srgbClr val="BBBBCC"/>
+                  <a:srgbClr val="888899"/>
                 </a:solidFill>
                 <a:latin typeface="メイリオ"/>
               </a:rPr>
@@ -9061,7 +9061,7 @@
             <a:r>
               <a:rPr sz="1000" b="0">
                 <a:solidFill>
-                  <a:srgbClr val="EE88CC"/>
+                  <a:srgbClr val="FFCCEE"/>
                 </a:solidFill>
                 <a:latin typeface="メイリオ"/>
               </a:rPr>
@@ -9085,11 +9085,11 @@
             <a:avLst/>
           </a:prstGeom>
           <a:solidFill>
-            <a:srgbClr val="14143A"/>
+            <a:srgbClr val="FFEEF8"/>
           </a:solidFill>
           <a:ln w="19050">
             <a:solidFill>
-              <a:srgbClr val="CC44AA"/>
+              <a:srgbClr val="CC22AA"/>
             </a:solidFill>
           </a:ln>
         </p:spPr>
@@ -9141,7 +9141,7 @@
             <a:r>
               <a:rPr sz="1200" b="1">
                 <a:solidFill>
-                  <a:srgbClr val="CC44AA"/>
+                  <a:srgbClr val="CC22AA"/>
                 </a:solidFill>
                 <a:latin typeface="游明朝"/>
               </a:rPr>
@@ -9176,7 +9176,7 @@
             <a:r>
               <a:rPr sz="900" b="1">
                 <a:solidFill>
-                  <a:srgbClr val="EE88CC"/>
+                  <a:srgbClr val="CC22AA"/>
                 </a:solidFill>
                 <a:latin typeface="メイリオ"/>
               </a:rPr>
@@ -9211,7 +9211,7 @@
             <a:r>
               <a:rPr sz="900" b="0">
                 <a:solidFill>
-                  <a:srgbClr val="FFFFFF"/>
+                  <a:srgbClr val="1A1A2E"/>
                 </a:solidFill>
                 <a:latin typeface="メイリオ"/>
               </a:rPr>
@@ -9246,7 +9246,7 @@
             <a:r>
               <a:rPr sz="900" b="1">
                 <a:solidFill>
-                  <a:srgbClr val="EE88CC"/>
+                  <a:srgbClr val="CC22AA"/>
                 </a:solidFill>
                 <a:latin typeface="メイリオ"/>
               </a:rPr>
@@ -9281,7 +9281,7 @@
             <a:r>
               <a:rPr sz="900" b="0">
                 <a:solidFill>
-                  <a:srgbClr val="FFFFFF"/>
+                  <a:srgbClr val="1A1A2E"/>
                 </a:solidFill>
                 <a:latin typeface="メイリオ"/>
               </a:rPr>
@@ -9316,7 +9316,7 @@
             <a:r>
               <a:rPr sz="900" b="1">
                 <a:solidFill>
-                  <a:srgbClr val="EE88CC"/>
+                  <a:srgbClr val="CC22AA"/>
                 </a:solidFill>
                 <a:latin typeface="メイリオ"/>
               </a:rPr>
@@ -9351,7 +9351,7 @@
             <a:r>
               <a:rPr sz="900" b="0">
                 <a:solidFill>
-                  <a:srgbClr val="FFFFFF"/>
+                  <a:srgbClr val="1A1A2E"/>
                 </a:solidFill>
                 <a:latin typeface="メイリオ"/>
               </a:rPr>
@@ -9386,7 +9386,7 @@
             <a:r>
               <a:rPr sz="900" b="1">
                 <a:solidFill>
-                  <a:srgbClr val="EE88CC"/>
+                  <a:srgbClr val="CC22AA"/>
                 </a:solidFill>
                 <a:latin typeface="メイリオ"/>
               </a:rPr>
@@ -9421,7 +9421,7 @@
             <a:r>
               <a:rPr sz="900" b="0">
                 <a:solidFill>
-                  <a:srgbClr val="FFD700"/>
+                  <a:srgbClr val="BB8800"/>
                 </a:solidFill>
                 <a:latin typeface="メイリオ"/>
               </a:rPr>
@@ -9456,7 +9456,7 @@
             <a:r>
               <a:rPr sz="900" b="1">
                 <a:solidFill>
-                  <a:srgbClr val="EE88CC"/>
+                  <a:srgbClr val="CC22AA"/>
                 </a:solidFill>
                 <a:latin typeface="メイリオ"/>
               </a:rPr>
@@ -9491,7 +9491,7 @@
             <a:r>
               <a:rPr sz="900" b="0">
                 <a:solidFill>
-                  <a:srgbClr val="BBBBCC"/>
+                  <a:srgbClr val="555570"/>
                 </a:solidFill>
                 <a:latin typeface="メイリオ"/>
               </a:rPr>
@@ -9515,11 +9515,11 @@
             <a:avLst/>
           </a:prstGeom>
           <a:solidFill>
-            <a:srgbClr val="281800"/>
+            <a:srgbClr val="FFFBEE"/>
           </a:solidFill>
           <a:ln w="25400">
             <a:solidFill>
-              <a:srgbClr val="FFD700"/>
+              <a:srgbClr val="BB8800"/>
             </a:solidFill>
           </a:ln>
         </p:spPr>
@@ -9571,7 +9571,7 @@
             <a:r>
               <a:rPr sz="1000" b="1">
                 <a:solidFill>
-                  <a:srgbClr val="FFD700"/>
+                  <a:srgbClr val="BB8800"/>
                 </a:solidFill>
                 <a:latin typeface="メイリオ"/>
               </a:rPr>
@@ -9606,7 +9606,7 @@
             <a:r>
               <a:rPr sz="850" b="0">
                 <a:solidFill>
-                  <a:srgbClr val="FFFFFF"/>
+                  <a:srgbClr val="1A1A2E"/>
                 </a:solidFill>
                 <a:latin typeface="メイリオ"/>
               </a:rPr>
@@ -9630,11 +9630,11 @@
             <a:avLst/>
           </a:prstGeom>
           <a:solidFill>
-            <a:srgbClr val="14143A"/>
+            <a:srgbClr val="EEF6FF"/>
           </a:solidFill>
           <a:ln w="12700">
             <a:solidFill>
-              <a:srgbClr val="44CCEE"/>
+              <a:srgbClr val="1199BB"/>
             </a:solidFill>
           </a:ln>
         </p:spPr>
@@ -9686,7 +9686,7 @@
             <a:r>
               <a:rPr sz="900" b="1">
                 <a:solidFill>
-                  <a:srgbClr val="44CCEE"/>
+                  <a:srgbClr val="1199BB"/>
                 </a:solidFill>
                 <a:latin typeface="メイリオ"/>
               </a:rPr>
@@ -9721,7 +9721,7 @@
             <a:r>
               <a:rPr sz="850" b="0">
                 <a:solidFill>
-                  <a:srgbClr val="FFFFFF"/>
+                  <a:srgbClr val="1A1A2E"/>
                 </a:solidFill>
                 <a:latin typeface="メイリオ"/>
               </a:rPr>
@@ -9756,7 +9756,7 @@
             <a:r>
               <a:rPr sz="850" b="0">
                 <a:solidFill>
-                  <a:srgbClr val="FFFFFF"/>
+                  <a:srgbClr val="1A1A2E"/>
                 </a:solidFill>
                 <a:latin typeface="メイリオ"/>
               </a:rPr>
@@ -9791,7 +9791,7 @@
             <a:r>
               <a:rPr sz="850" b="0">
                 <a:solidFill>
-                  <a:srgbClr val="FFFFFF"/>
+                  <a:srgbClr val="1A1A2E"/>
                 </a:solidFill>
                 <a:latin typeface="メイリオ"/>
               </a:rPr>
@@ -9815,11 +9815,11 @@
             <a:avLst/>
           </a:prstGeom>
           <a:solidFill>
-            <a:srgbClr val="14143A"/>
+            <a:srgbClr val="EEF6FF"/>
           </a:solidFill>
           <a:ln w="19050">
             <a:solidFill>
-              <a:srgbClr val="44CCEE"/>
+              <a:srgbClr val="1199BB"/>
             </a:solidFill>
           </a:ln>
         </p:spPr>
@@ -9871,7 +9871,7 @@
             <a:r>
               <a:rPr sz="1100" b="1">
                 <a:solidFill>
-                  <a:srgbClr val="44CCEE"/>
+                  <a:srgbClr val="1199BB"/>
                 </a:solidFill>
                 <a:latin typeface="游明朝"/>
               </a:rPr>
@@ -9895,11 +9895,11 @@
             <a:avLst/>
           </a:prstGeom>
           <a:solidFill>
-            <a:srgbClr val="12122E"/>
+            <a:srgbClr val="F2F2F5"/>
           </a:solidFill>
           <a:ln w="12700">
             <a:solidFill>
-              <a:srgbClr val="FFFFFF"/>
+              <a:srgbClr val="888899"/>
             </a:solidFill>
           </a:ln>
         </p:spPr>
@@ -9951,7 +9951,7 @@
             <a:r>
               <a:rPr sz="900" b="1">
                 <a:solidFill>
-                  <a:srgbClr val="FFFFFF"/>
+                  <a:srgbClr val="888899"/>
                 </a:solidFill>
                 <a:latin typeface="メイリオ"/>
               </a:rPr>
@@ -9986,7 +9986,7 @@
             <a:r>
               <a:rPr sz="800" b="0">
                 <a:solidFill>
-                  <a:srgbClr val="FFFFFF"/>
+                  <a:srgbClr val="1A1A2E"/>
                 </a:solidFill>
                 <a:latin typeface="メイリオ"/>
               </a:rPr>
@@ -10011,11 +10011,11 @@
             <a:avLst/>
           </a:prstGeom>
           <a:solidFill>
-            <a:srgbClr val="12122E"/>
+            <a:srgbClr val="FFFBEE"/>
           </a:solidFill>
           <a:ln w="12700">
             <a:solidFill>
-              <a:srgbClr val="FFD700"/>
+              <a:srgbClr val="BB8800"/>
             </a:solidFill>
           </a:ln>
         </p:spPr>
@@ -10067,7 +10067,7 @@
             <a:r>
               <a:rPr sz="900" b="1">
                 <a:solidFill>
-                  <a:srgbClr val="FFD700"/>
+                  <a:srgbClr val="BB8800"/>
                 </a:solidFill>
                 <a:latin typeface="メイリオ"/>
               </a:rPr>
@@ -10102,7 +10102,7 @@
             <a:r>
               <a:rPr sz="800" b="0">
                 <a:solidFill>
-                  <a:srgbClr val="FFFFFF"/>
+                  <a:srgbClr val="1A1A2E"/>
                 </a:solidFill>
                 <a:latin typeface="メイリオ"/>
               </a:rPr>
@@ -10127,11 +10127,11 @@
             <a:avLst/>
           </a:prstGeom>
           <a:solidFill>
-            <a:srgbClr val="12122E"/>
+            <a:srgbClr val="F2F2F5"/>
           </a:solidFill>
           <a:ln w="12700">
             <a:solidFill>
-              <a:srgbClr val="BBBBCC"/>
+              <a:srgbClr val="888899"/>
             </a:solidFill>
           </a:ln>
         </p:spPr>
@@ -10183,7 +10183,7 @@
             <a:r>
               <a:rPr sz="900" b="1">
                 <a:solidFill>
-                  <a:srgbClr val="BBBBCC"/>
+                  <a:srgbClr val="888899"/>
                 </a:solidFill>
                 <a:latin typeface="メイリオ"/>
               </a:rPr>
@@ -10218,7 +10218,7 @@
             <a:r>
               <a:rPr sz="800" b="0">
                 <a:solidFill>
-                  <a:srgbClr val="FFFFFF"/>
+                  <a:srgbClr val="1A1A2E"/>
                 </a:solidFill>
                 <a:latin typeface="メイリオ"/>
               </a:rPr>
@@ -10243,11 +10243,11 @@
             <a:avLst/>
           </a:prstGeom>
           <a:solidFill>
-            <a:srgbClr val="12122E"/>
+            <a:srgbClr val="FFFBEE"/>
           </a:solidFill>
           <a:ln w="12700">
             <a:solidFill>
-              <a:srgbClr val="FFD700"/>
+              <a:srgbClr val="BB8800"/>
             </a:solidFill>
           </a:ln>
         </p:spPr>
@@ -10299,7 +10299,7 @@
             <a:r>
               <a:rPr sz="900" b="1">
                 <a:solidFill>
-                  <a:srgbClr val="FFD700"/>
+                  <a:srgbClr val="BB8800"/>
                 </a:solidFill>
                 <a:latin typeface="メイリオ"/>
               </a:rPr>
@@ -10334,7 +10334,7 @@
             <a:r>
               <a:rPr sz="800" b="0">
                 <a:solidFill>
-                  <a:srgbClr val="FFFFFF"/>
+                  <a:srgbClr val="1A1A2E"/>
                 </a:solidFill>
                 <a:latin typeface="メイリオ"/>
               </a:rPr>
@@ -10359,7 +10359,7 @@
             <a:avLst/>
           </a:prstGeom>
           <a:solidFill>
-            <a:srgbClr val="05051A"/>
+            <a:srgbClr val="221030"/>
           </a:solidFill>
           <a:ln>
             <a:noFill/>
@@ -10413,7 +10413,7 @@
             <a:r>
               <a:rPr sz="900" b="1">
                 <a:solidFill>
-                  <a:srgbClr val="FFD700"/>
+                  <a:srgbClr val="BB8800"/>
                 </a:solidFill>
                 <a:latin typeface="メイリオ"/>
               </a:rPr>
@@ -10448,7 +10448,7 @@
             <a:r>
               <a:rPr sz="800" b="0">
                 <a:solidFill>
-                  <a:srgbClr val="BBBBCC"/>
+                  <a:srgbClr val="888899"/>
                 </a:solidFill>
                 <a:latin typeface="メイリオ"/>
               </a:rPr>
@@ -10603,7 +10603,7 @@
             <a:r>
               <a:rPr sz="1000" b="0">
                 <a:solidFill>
-                  <a:srgbClr val="EE88CC"/>
+                  <a:srgbClr val="FFCCEE"/>
                 </a:solidFill>
                 <a:latin typeface="メイリオ"/>
               </a:rPr>
@@ -10627,11 +10627,11 @@
             <a:avLst/>
           </a:prstGeom>
           <a:solidFill>
-            <a:srgbClr val="200028"/>
+            <a:srgbClr val="FFEEF8"/>
           </a:solidFill>
           <a:ln w="19050">
             <a:solidFill>
-              <a:srgbClr val="CC44AA"/>
+              <a:srgbClr val="CC22AA"/>
             </a:solidFill>
           </a:ln>
         </p:spPr>
@@ -10683,7 +10683,7 @@
             <a:r>
               <a:rPr sz="800" b="1">
                 <a:solidFill>
-                  <a:srgbClr val="EE88CC"/>
+                  <a:srgbClr val="CC22AA"/>
                 </a:solidFill>
                 <a:latin typeface="メイリオ"/>
               </a:rPr>
@@ -10718,7 +10718,7 @@
             <a:r>
               <a:rPr sz="900" b="0">
                 <a:solidFill>
-                  <a:srgbClr val="FFFFFF"/>
+                  <a:srgbClr val="1A1A2E"/>
                 </a:solidFill>
                 <a:latin typeface="メイリオ"/>
               </a:rPr>
@@ -10753,7 +10753,7 @@
             <a:r>
               <a:rPr sz="800" b="1">
                 <a:solidFill>
-                  <a:srgbClr val="EE88CC"/>
+                  <a:srgbClr val="CC22AA"/>
                 </a:solidFill>
                 <a:latin typeface="メイリオ"/>
               </a:rPr>
@@ -10788,7 +10788,7 @@
             <a:r>
               <a:rPr sz="900" b="0">
                 <a:solidFill>
-                  <a:srgbClr val="FFFFFF"/>
+                  <a:srgbClr val="1A1A2E"/>
                 </a:solidFill>
                 <a:latin typeface="メイリオ"/>
               </a:rPr>
@@ -10823,7 +10823,7 @@
             <a:r>
               <a:rPr sz="800" b="1">
                 <a:solidFill>
-                  <a:srgbClr val="EE88CC"/>
+                  <a:srgbClr val="CC22AA"/>
                 </a:solidFill>
                 <a:latin typeface="メイリオ"/>
               </a:rPr>
@@ -10858,7 +10858,7 @@
             <a:r>
               <a:rPr sz="900" b="0">
                 <a:solidFill>
-                  <a:srgbClr val="FFFFFF"/>
+                  <a:srgbClr val="1A1A2E"/>
                 </a:solidFill>
                 <a:latin typeface="メイリオ"/>
               </a:rPr>
@@ -10893,7 +10893,7 @@
             <a:r>
               <a:rPr sz="800" b="1">
                 <a:solidFill>
-                  <a:srgbClr val="EE88CC"/>
+                  <a:srgbClr val="CC22AA"/>
                 </a:solidFill>
                 <a:latin typeface="メイリオ"/>
               </a:rPr>
@@ -10928,7 +10928,7 @@
             <a:r>
               <a:rPr sz="900" b="0">
                 <a:solidFill>
-                  <a:srgbClr val="FFFFFF"/>
+                  <a:srgbClr val="1A1A2E"/>
                 </a:solidFill>
                 <a:latin typeface="メイリオ"/>
               </a:rPr>
@@ -10952,11 +10952,11 @@
             <a:avLst/>
           </a:prstGeom>
           <a:solidFill>
-            <a:srgbClr val="14143A"/>
+            <a:srgbClr val="FFFBEE"/>
           </a:solidFill>
           <a:ln w="19050">
             <a:solidFill>
-              <a:srgbClr val="FFD700"/>
+              <a:srgbClr val="BB8800"/>
             </a:solidFill>
           </a:ln>
         </p:spPr>
@@ -11008,7 +11008,7 @@
             <a:r>
               <a:rPr sz="1000" b="1">
                 <a:solidFill>
-                  <a:srgbClr val="FFD700"/>
+                  <a:srgbClr val="BB8800"/>
                 </a:solidFill>
                 <a:latin typeface="メイリオ"/>
               </a:rPr>
@@ -11032,11 +11032,11 @@
             <a:avLst/>
           </a:prstGeom>
           <a:solidFill>
-            <a:srgbClr val="121028"/>
+            <a:srgbClr val="F5F0FA"/>
           </a:solidFill>
           <a:ln w="12700">
             <a:solidFill>
-              <a:srgbClr val="FFFFFF"/>
+              <a:srgbClr val="1A1A2E"/>
             </a:solidFill>
           </a:ln>
         </p:spPr>
@@ -11088,7 +11088,7 @@
             <a:r>
               <a:rPr sz="900" b="1">
                 <a:solidFill>
-                  <a:srgbClr val="FFFFFF"/>
+                  <a:srgbClr val="1A1A2E"/>
                 </a:solidFill>
                 <a:latin typeface="メイリオ"/>
               </a:rPr>
@@ -11123,7 +11123,7 @@
             <a:r>
               <a:rPr sz="800" b="0">
                 <a:solidFill>
-                  <a:srgbClr val="FFFFFF"/>
+                  <a:srgbClr val="1A1A2E"/>
                 </a:solidFill>
                 <a:latin typeface="メイリオ"/>
               </a:rPr>
@@ -11148,11 +11148,11 @@
             <a:avLst/>
           </a:prstGeom>
           <a:solidFill>
-            <a:srgbClr val="121028"/>
+            <a:srgbClr val="F5F0FA"/>
           </a:solidFill>
           <a:ln w="12700">
             <a:solidFill>
-              <a:srgbClr val="44CCEE"/>
+              <a:srgbClr val="1199BB"/>
             </a:solidFill>
           </a:ln>
         </p:spPr>
@@ -11204,7 +11204,7 @@
             <a:r>
               <a:rPr sz="900" b="1">
                 <a:solidFill>
-                  <a:srgbClr val="44CCEE"/>
+                  <a:srgbClr val="1199BB"/>
                 </a:solidFill>
                 <a:latin typeface="メイリオ"/>
               </a:rPr>
@@ -11239,7 +11239,7 @@
             <a:r>
               <a:rPr sz="800" b="0">
                 <a:solidFill>
-                  <a:srgbClr val="FFFFFF"/>
+                  <a:srgbClr val="1A1A2E"/>
                 </a:solidFill>
                 <a:latin typeface="メイリオ"/>
               </a:rPr>
@@ -11264,11 +11264,11 @@
             <a:avLst/>
           </a:prstGeom>
           <a:solidFill>
-            <a:srgbClr val="121028"/>
+            <a:srgbClr val="F5F0FA"/>
           </a:solidFill>
           <a:ln w="12700">
             <a:solidFill>
-              <a:srgbClr val="FFD700"/>
+              <a:srgbClr val="BB8800"/>
             </a:solidFill>
           </a:ln>
         </p:spPr>
@@ -11320,7 +11320,7 @@
             <a:r>
               <a:rPr sz="900" b="1">
                 <a:solidFill>
-                  <a:srgbClr val="FFD700"/>
+                  <a:srgbClr val="BB8800"/>
                 </a:solidFill>
                 <a:latin typeface="メイリオ"/>
               </a:rPr>
@@ -11355,7 +11355,7 @@
             <a:r>
               <a:rPr sz="800" b="0">
                 <a:solidFill>
-                  <a:srgbClr val="FFFFFF"/>
+                  <a:srgbClr val="1A1A2E"/>
                 </a:solidFill>
                 <a:latin typeface="メイリオ"/>
               </a:rPr>
@@ -11380,11 +11380,11 @@
             <a:avLst/>
           </a:prstGeom>
           <a:solidFill>
-            <a:srgbClr val="121028"/>
+            <a:srgbClr val="F5F0FA"/>
           </a:solidFill>
           <a:ln w="12700">
             <a:solidFill>
-              <a:srgbClr val="CC44AA"/>
+              <a:srgbClr val="CC22AA"/>
             </a:solidFill>
           </a:ln>
         </p:spPr>
@@ -11436,7 +11436,7 @@
             <a:r>
               <a:rPr sz="900" b="1">
                 <a:solidFill>
-                  <a:srgbClr val="CC44AA"/>
+                  <a:srgbClr val="CC22AA"/>
                 </a:solidFill>
                 <a:latin typeface="メイリオ"/>
               </a:rPr>
@@ -11471,7 +11471,7 @@
             <a:r>
               <a:rPr sz="800" b="0">
                 <a:solidFill>
-                  <a:srgbClr val="FFFFFF"/>
+                  <a:srgbClr val="1A1A2E"/>
                 </a:solidFill>
                 <a:latin typeface="メイリオ"/>
               </a:rPr>
@@ -11496,11 +11496,11 @@
             <a:avLst/>
           </a:prstGeom>
           <a:solidFill>
-            <a:srgbClr val="121028"/>
+            <a:srgbClr val="F5F0FA"/>
           </a:solidFill>
           <a:ln w="12700">
             <a:solidFill>
-              <a:srgbClr val="FF5555"/>
+              <a:srgbClr val="CC3333"/>
             </a:solidFill>
           </a:ln>
         </p:spPr>
@@ -11552,7 +11552,7 @@
             <a:r>
               <a:rPr sz="900" b="1">
                 <a:solidFill>
-                  <a:srgbClr val="FF5555"/>
+                  <a:srgbClr val="CC3333"/>
                 </a:solidFill>
                 <a:latin typeface="メイリオ"/>
               </a:rPr>
@@ -11587,7 +11587,7 @@
             <a:r>
               <a:rPr sz="800" b="0">
                 <a:solidFill>
-                  <a:srgbClr val="FFFFFF"/>
+                  <a:srgbClr val="1A1A2E"/>
                 </a:solidFill>
                 <a:latin typeface="メイリオ"/>
               </a:rPr>
@@ -11612,11 +11612,11 @@
             <a:avLst/>
           </a:prstGeom>
           <a:solidFill>
-            <a:srgbClr val="14143A"/>
+            <a:srgbClr val="EEF6FF"/>
           </a:solidFill>
           <a:ln w="19050">
             <a:solidFill>
-              <a:srgbClr val="44CCEE"/>
+              <a:srgbClr val="1199BB"/>
             </a:solidFill>
           </a:ln>
         </p:spPr>
@@ -11668,7 +11668,7 @@
             <a:r>
               <a:rPr sz="1000" b="1">
                 <a:solidFill>
-                  <a:srgbClr val="44CCEE"/>
+                  <a:srgbClr val="1199BB"/>
                 </a:solidFill>
                 <a:latin typeface="メイリオ"/>
               </a:rPr>
@@ -11703,7 +11703,7 @@
             <a:r>
               <a:rPr sz="850" b="0">
                 <a:solidFill>
-                  <a:srgbClr val="FFFFFF"/>
+                  <a:srgbClr val="1A1A2E"/>
                 </a:solidFill>
                 <a:latin typeface="メイリオ"/>
               </a:rPr>
@@ -11727,11 +11727,11 @@
             <a:avLst/>
           </a:prstGeom>
           <a:solidFill>
-            <a:srgbClr val="121230"/>
+            <a:srgbClr val="F5F0FA"/>
           </a:solidFill>
           <a:ln w="10160">
             <a:solidFill>
-              <a:srgbClr val="FFFFFF"/>
+              <a:srgbClr val="1199BB"/>
             </a:solidFill>
           </a:ln>
         </p:spPr>
@@ -11783,7 +11783,7 @@
             <a:r>
               <a:rPr sz="850" b="0">
                 <a:solidFill>
-                  <a:srgbClr val="FFFFFF"/>
+                  <a:srgbClr val="1A1A2E"/>
                 </a:solidFill>
                 <a:latin typeface="メイリオ"/>
               </a:rPr>
@@ -11807,11 +11807,11 @@
             <a:avLst/>
           </a:prstGeom>
           <a:solidFill>
-            <a:srgbClr val="121230"/>
+            <a:srgbClr val="F5F0FA"/>
           </a:solidFill>
           <a:ln w="10160">
             <a:solidFill>
-              <a:srgbClr val="FFFFFF"/>
+              <a:srgbClr val="1199BB"/>
             </a:solidFill>
           </a:ln>
         </p:spPr>
@@ -11863,7 +11863,7 @@
             <a:r>
               <a:rPr sz="850" b="0">
                 <a:solidFill>
-                  <a:srgbClr val="FFFFFF"/>
+                  <a:srgbClr val="1A1A2E"/>
                 </a:solidFill>
                 <a:latin typeface="メイリオ"/>
               </a:rPr>
@@ -11887,11 +11887,11 @@
             <a:avLst/>
           </a:prstGeom>
           <a:solidFill>
-            <a:srgbClr val="121230"/>
+            <a:srgbClr val="F5F0FA"/>
           </a:solidFill>
           <a:ln w="10160">
             <a:solidFill>
-              <a:srgbClr val="FFFFFF"/>
+              <a:srgbClr val="1199BB"/>
             </a:solidFill>
           </a:ln>
         </p:spPr>
@@ -11943,7 +11943,7 @@
             <a:r>
               <a:rPr sz="850" b="0">
                 <a:solidFill>
-                  <a:srgbClr val="FFFFFF"/>
+                  <a:srgbClr val="1A1A2E"/>
                 </a:solidFill>
                 <a:latin typeface="メイリオ"/>
               </a:rPr>
@@ -11967,11 +11967,11 @@
             <a:avLst/>
           </a:prstGeom>
           <a:solidFill>
-            <a:srgbClr val="121230"/>
+            <a:srgbClr val="F5F0FA"/>
           </a:solidFill>
           <a:ln w="10160">
             <a:solidFill>
-              <a:srgbClr val="FFFFFF"/>
+              <a:srgbClr val="1199BB"/>
             </a:solidFill>
           </a:ln>
         </p:spPr>
@@ -12023,7 +12023,7 @@
             <a:r>
               <a:rPr sz="850" b="0">
                 <a:solidFill>
-                  <a:srgbClr val="FFFFFF"/>
+                  <a:srgbClr val="1A1A2E"/>
                 </a:solidFill>
                 <a:latin typeface="メイリオ"/>
               </a:rPr>
@@ -12047,11 +12047,11 @@
             <a:avLst/>
           </a:prstGeom>
           <a:solidFill>
-            <a:srgbClr val="121230"/>
+            <a:srgbClr val="F5F0FA"/>
           </a:solidFill>
           <a:ln w="10160">
             <a:solidFill>
-              <a:srgbClr val="FFFFFF"/>
+              <a:srgbClr val="1199BB"/>
             </a:solidFill>
           </a:ln>
         </p:spPr>
@@ -12103,7 +12103,7 @@
             <a:r>
               <a:rPr sz="850" b="0">
                 <a:solidFill>
-                  <a:srgbClr val="FFFFFF"/>
+                  <a:srgbClr val="1A1A2E"/>
                 </a:solidFill>
                 <a:latin typeface="メイリオ"/>
               </a:rPr>
@@ -12127,11 +12127,11 @@
             <a:avLst/>
           </a:prstGeom>
           <a:solidFill>
-            <a:srgbClr val="121230"/>
+            <a:srgbClr val="F5F0FA"/>
           </a:solidFill>
           <a:ln w="10160">
             <a:solidFill>
-              <a:srgbClr val="FFFFFF"/>
+              <a:srgbClr val="1199BB"/>
             </a:solidFill>
           </a:ln>
         </p:spPr>
@@ -12183,7 +12183,7 @@
             <a:r>
               <a:rPr sz="850" b="0">
                 <a:solidFill>
-                  <a:srgbClr val="FFFFFF"/>
+                  <a:srgbClr val="1A1A2E"/>
                 </a:solidFill>
                 <a:latin typeface="メイリオ"/>
               </a:rPr>
@@ -12207,11 +12207,11 @@
             <a:avLst/>
           </a:prstGeom>
           <a:solidFill>
-            <a:srgbClr val="121230"/>
+            <a:srgbClr val="F5F0FA"/>
           </a:solidFill>
           <a:ln w="10160">
             <a:solidFill>
-              <a:srgbClr val="FFFFFF"/>
+              <a:srgbClr val="1199BB"/>
             </a:solidFill>
           </a:ln>
         </p:spPr>
@@ -12263,7 +12263,7 @@
             <a:r>
               <a:rPr sz="850" b="0">
                 <a:solidFill>
-                  <a:srgbClr val="FFFFFF"/>
+                  <a:srgbClr val="1A1A2E"/>
                 </a:solidFill>
                 <a:latin typeface="メイリオ"/>
               </a:rPr>
@@ -12287,11 +12287,11 @@
             <a:avLst/>
           </a:prstGeom>
           <a:solidFill>
-            <a:srgbClr val="301500"/>
+            <a:srgbClr val="FFFBEE"/>
           </a:solidFill>
           <a:ln w="10160">
             <a:solidFill>
-              <a:srgbClr val="FFD700"/>
+              <a:srgbClr val="BB8800"/>
             </a:solidFill>
           </a:ln>
         </p:spPr>
@@ -12343,7 +12343,7 @@
             <a:r>
               <a:rPr sz="850" b="0">
                 <a:solidFill>
-                  <a:srgbClr val="FFD700"/>
+                  <a:srgbClr val="BB8800"/>
                 </a:solidFill>
                 <a:latin typeface="メイリオ"/>
               </a:rPr>
@@ -12367,11 +12367,11 @@
             <a:avLst/>
           </a:prstGeom>
           <a:solidFill>
-            <a:srgbClr val="1A001A"/>
+            <a:srgbClr val="FFEEF8"/>
           </a:solidFill>
           <a:ln w="12700">
             <a:solidFill>
-              <a:srgbClr val="CC44AA"/>
+              <a:srgbClr val="CC22AA"/>
             </a:solidFill>
           </a:ln>
         </p:spPr>
@@ -12423,7 +12423,7 @@
             <a:r>
               <a:rPr sz="950" b="1">
                 <a:solidFill>
-                  <a:srgbClr val="CC44AA"/>
+                  <a:srgbClr val="CC22AA"/>
                 </a:solidFill>
                 <a:latin typeface="メイリオ"/>
               </a:rPr>
@@ -12458,7 +12458,7 @@
             <a:r>
               <a:rPr sz="800" b="0">
                 <a:solidFill>
-                  <a:srgbClr val="BBBBCC"/>
+                  <a:srgbClr val="555570"/>
                 </a:solidFill>
                 <a:latin typeface="メイリオ"/>
               </a:rPr>
@@ -12482,7 +12482,7 @@
             <a:avLst/>
           </a:prstGeom>
           <a:solidFill>
-            <a:srgbClr val="05051A"/>
+            <a:srgbClr val="221030"/>
           </a:solidFill>
           <a:ln>
             <a:noFill/>
@@ -12536,7 +12536,7 @@
             <a:r>
               <a:rPr sz="900" b="1">
                 <a:solidFill>
-                  <a:srgbClr val="FFD700"/>
+                  <a:srgbClr val="BB8800"/>
                 </a:solidFill>
                 <a:latin typeface="メイリオ"/>
               </a:rPr>
@@ -12571,7 +12571,7 @@
             <a:r>
               <a:rPr sz="800" b="0">
                 <a:solidFill>
-                  <a:srgbClr val="BBBBCC"/>
+                  <a:srgbClr val="888899"/>
                 </a:solidFill>
                 <a:latin typeface="メイリオ"/>
               </a:rPr>
@@ -12726,7 +12726,7 @@
             <a:r>
               <a:rPr sz="1000" b="0">
                 <a:solidFill>
-                  <a:srgbClr val="EE88CC"/>
+                  <a:srgbClr val="FFCCEE"/>
                 </a:solidFill>
                 <a:latin typeface="メイリオ"/>
               </a:rPr>
@@ -12750,11 +12750,11 @@
             <a:avLst/>
           </a:prstGeom>
           <a:solidFill>
-            <a:srgbClr val="14143A"/>
+            <a:srgbClr val="FFFBEE"/>
           </a:solidFill>
           <a:ln w="25400">
             <a:solidFill>
-              <a:srgbClr val="FFD700"/>
+              <a:srgbClr val="BB8800"/>
             </a:solidFill>
           </a:ln>
         </p:spPr>
@@ -12799,7 +12799,7 @@
           </a:solidFill>
           <a:ln w="12700">
             <a:solidFill>
-              <a:srgbClr val="FFD700"/>
+              <a:srgbClr val="BB8800"/>
             </a:solidFill>
           </a:ln>
         </p:spPr>
@@ -12851,7 +12851,7 @@
             <a:r>
               <a:rPr sz="900" b="1">
                 <a:solidFill>
-                  <a:srgbClr val="FFD700"/>
+                  <a:srgbClr val="BB8800"/>
                 </a:solidFill>
                 <a:latin typeface="メイリオ"/>
               </a:rPr>
@@ -12886,7 +12886,7 @@
             <a:r>
               <a:rPr sz="900" b="0">
                 <a:solidFill>
-                  <a:srgbClr val="FFFFFF"/>
+                  <a:srgbClr val="1A1A2E"/>
                 </a:solidFill>
                 <a:latin typeface="メイリオ"/>
               </a:rPr>
@@ -12910,11 +12910,11 @@
             <a:avLst/>
           </a:prstGeom>
           <a:solidFill>
-            <a:srgbClr val="281000"/>
+            <a:srgbClr val="FFFBEE"/>
           </a:solidFill>
           <a:ln w="12700">
             <a:solidFill>
-              <a:srgbClr val="FFD700"/>
+              <a:srgbClr val="BB8800"/>
             </a:solidFill>
           </a:ln>
         </p:spPr>
@@ -12966,7 +12966,7 @@
             <a:r>
               <a:rPr sz="850" b="1">
                 <a:solidFill>
-                  <a:srgbClr val="FFD700"/>
+                  <a:srgbClr val="BB8800"/>
                 </a:solidFill>
                 <a:latin typeface="メイリオ"/>
               </a:rPr>
@@ -13001,7 +13001,7 @@
             <a:r>
               <a:rPr sz="850" b="0">
                 <a:solidFill>
-                  <a:srgbClr val="FFFFFF"/>
+                  <a:srgbClr val="1A1A2E"/>
                 </a:solidFill>
                 <a:latin typeface="メイリオ"/>
               </a:rPr>
@@ -13025,7 +13025,7 @@
             <a:avLst/>
           </a:prstGeom>
           <a:solidFill>
-            <a:srgbClr val="FFD700"/>
+            <a:srgbClr val="BB8800"/>
           </a:solidFill>
           <a:ln>
             <a:noFill/>
@@ -13068,11 +13068,11 @@
             <a:avLst/>
           </a:prstGeom>
           <a:solidFill>
-            <a:srgbClr val="281000"/>
+            <a:srgbClr val="FFFBEE"/>
           </a:solidFill>
           <a:ln w="12700">
             <a:solidFill>
-              <a:srgbClr val="FFD700"/>
+              <a:srgbClr val="BB8800"/>
             </a:solidFill>
           </a:ln>
         </p:spPr>
@@ -13124,7 +13124,7 @@
             <a:r>
               <a:rPr sz="850" b="1">
                 <a:solidFill>
-                  <a:srgbClr val="FFD700"/>
+                  <a:srgbClr val="BB8800"/>
                 </a:solidFill>
                 <a:latin typeface="メイリオ"/>
               </a:rPr>
@@ -13159,7 +13159,7 @@
             <a:r>
               <a:rPr sz="850" b="0">
                 <a:solidFill>
-                  <a:srgbClr val="FFFFFF"/>
+                  <a:srgbClr val="1A1A2E"/>
                 </a:solidFill>
                 <a:latin typeface="メイリオ"/>
               </a:rPr>
@@ -13183,7 +13183,7 @@
             <a:avLst/>
           </a:prstGeom>
           <a:solidFill>
-            <a:srgbClr val="FFD700"/>
+            <a:srgbClr val="BB8800"/>
           </a:solidFill>
           <a:ln>
             <a:noFill/>
@@ -13226,11 +13226,11 @@
             <a:avLst/>
           </a:prstGeom>
           <a:solidFill>
-            <a:srgbClr val="281000"/>
+            <a:srgbClr val="FFFBEE"/>
           </a:solidFill>
           <a:ln w="12700">
             <a:solidFill>
-              <a:srgbClr val="EE88CC"/>
+              <a:srgbClr val="DD55BB"/>
             </a:solidFill>
           </a:ln>
         </p:spPr>
@@ -13282,7 +13282,7 @@
             <a:r>
               <a:rPr sz="850" b="1">
                 <a:solidFill>
-                  <a:srgbClr val="EE88CC"/>
+                  <a:srgbClr val="DD55BB"/>
                 </a:solidFill>
                 <a:latin typeface="メイリオ"/>
               </a:rPr>
@@ -13317,7 +13317,7 @@
             <a:r>
               <a:rPr sz="850" b="0">
                 <a:solidFill>
-                  <a:srgbClr val="FFFFFF"/>
+                  <a:srgbClr val="1A1A2E"/>
                 </a:solidFill>
                 <a:latin typeface="メイリオ"/>
               </a:rPr>
@@ -13341,7 +13341,7 @@
             <a:avLst/>
           </a:prstGeom>
           <a:solidFill>
-            <a:srgbClr val="EE88CC"/>
+            <a:srgbClr val="DD55BB"/>
           </a:solidFill>
           <a:ln>
             <a:noFill/>
@@ -13384,11 +13384,11 @@
             <a:avLst/>
           </a:prstGeom>
           <a:solidFill>
-            <a:srgbClr val="281000"/>
+            <a:srgbClr val="FFFBEE"/>
           </a:solidFill>
           <a:ln w="12700">
             <a:solidFill>
-              <a:srgbClr val="FFD700"/>
+              <a:srgbClr val="BB8800"/>
             </a:solidFill>
           </a:ln>
         </p:spPr>
@@ -13440,7 +13440,7 @@
             <a:r>
               <a:rPr sz="850" b="1">
                 <a:solidFill>
-                  <a:srgbClr val="FFD700"/>
+                  <a:srgbClr val="BB8800"/>
                 </a:solidFill>
                 <a:latin typeface="メイリオ"/>
               </a:rPr>
@@ -13475,7 +13475,7 @@
             <a:r>
               <a:rPr sz="850" b="0">
                 <a:solidFill>
-                  <a:srgbClr val="FFFFFF"/>
+                  <a:srgbClr val="1A1A2E"/>
                 </a:solidFill>
                 <a:latin typeface="メイリオ"/>
               </a:rPr>
@@ -13499,7 +13499,7 @@
             <a:avLst/>
           </a:prstGeom>
           <a:solidFill>
-            <a:srgbClr val="FFD700"/>
+            <a:srgbClr val="BB8800"/>
           </a:solidFill>
           <a:ln>
             <a:noFill/>
@@ -13542,11 +13542,11 @@
             <a:avLst/>
           </a:prstGeom>
           <a:solidFill>
-            <a:srgbClr val="281000"/>
+            <a:srgbClr val="FFFBEE"/>
           </a:solidFill>
           <a:ln w="12700">
             <a:solidFill>
-              <a:srgbClr val="44EE88"/>
+              <a:srgbClr val="22AA66"/>
             </a:solidFill>
           </a:ln>
         </p:spPr>
@@ -13598,7 +13598,7 @@
             <a:r>
               <a:rPr sz="850" b="1">
                 <a:solidFill>
-                  <a:srgbClr val="44EE88"/>
+                  <a:srgbClr val="22AA66"/>
                 </a:solidFill>
                 <a:latin typeface="メイリオ"/>
               </a:rPr>
@@ -13633,7 +13633,7 @@
             <a:r>
               <a:rPr sz="850" b="0">
                 <a:solidFill>
-                  <a:srgbClr val="FFFFFF"/>
+                  <a:srgbClr val="1A1A2E"/>
                 </a:solidFill>
                 <a:latin typeface="メイリオ"/>
               </a:rPr>
@@ -13657,7 +13657,7 @@
             <a:avLst/>
           </a:prstGeom>
           <a:solidFill>
-            <a:srgbClr val="44EE88"/>
+            <a:srgbClr val="22AA66"/>
           </a:solidFill>
           <a:ln>
             <a:noFill/>
@@ -13711,7 +13711,7 @@
             <a:r>
               <a:rPr sz="800" b="1">
                 <a:solidFill>
-                  <a:srgbClr val="FF5555"/>
+                  <a:srgbClr val="CC3333"/>
                 </a:solidFill>
                 <a:latin typeface="メイリオ"/>
               </a:rPr>
@@ -13735,11 +13735,11 @@
             <a:avLst/>
           </a:prstGeom>
           <a:solidFill>
-            <a:srgbClr val="14143A"/>
+            <a:srgbClr val="FFEEEE"/>
           </a:solidFill>
           <a:ln w="25400">
             <a:solidFill>
-              <a:srgbClr val="FF5555"/>
+              <a:srgbClr val="CC3333"/>
             </a:solidFill>
           </a:ln>
         </p:spPr>
@@ -13784,7 +13784,7 @@
           </a:solidFill>
           <a:ln w="12700">
             <a:solidFill>
-              <a:srgbClr val="FFD700"/>
+              <a:srgbClr val="BB8800"/>
             </a:solidFill>
           </a:ln>
         </p:spPr>
@@ -13836,7 +13836,7 @@
             <a:r>
               <a:rPr sz="900" b="1">
                 <a:solidFill>
-                  <a:srgbClr val="FF5555"/>
+                  <a:srgbClr val="CC3333"/>
                 </a:solidFill>
                 <a:latin typeface="メイリオ"/>
               </a:rPr>
@@ -13871,7 +13871,7 @@
             <a:r>
               <a:rPr sz="900" b="1">
                 <a:solidFill>
-                  <a:srgbClr val="EE88CC"/>
+                  <a:srgbClr val="CC22AA"/>
                 </a:solidFill>
                 <a:latin typeface="メイリオ"/>
               </a:rPr>
@@ -13906,7 +13906,7 @@
             <a:r>
               <a:rPr sz="850" b="0">
                 <a:solidFill>
-                  <a:srgbClr val="FFFFFF"/>
+                  <a:srgbClr val="1A1A2E"/>
                 </a:solidFill>
                 <a:latin typeface="メイリオ"/>
               </a:rPr>
@@ -13941,7 +13941,7 @@
             <a:r>
               <a:rPr sz="900" b="1">
                 <a:solidFill>
-                  <a:srgbClr val="EE88CC"/>
+                  <a:srgbClr val="CC22AA"/>
                 </a:solidFill>
                 <a:latin typeface="メイリオ"/>
               </a:rPr>
@@ -13976,7 +13976,7 @@
             <a:r>
               <a:rPr sz="850" b="0">
                 <a:solidFill>
-                  <a:srgbClr val="FFFFFF"/>
+                  <a:srgbClr val="1A1A2E"/>
                 </a:solidFill>
                 <a:latin typeface="メイリオ"/>
               </a:rPr>
@@ -14011,7 +14011,7 @@
             <a:r>
               <a:rPr sz="900" b="1">
                 <a:solidFill>
-                  <a:srgbClr val="EE88CC"/>
+                  <a:srgbClr val="CC22AA"/>
                 </a:solidFill>
                 <a:latin typeface="メイリオ"/>
               </a:rPr>
@@ -14046,7 +14046,7 @@
             <a:r>
               <a:rPr sz="850" b="0">
                 <a:solidFill>
-                  <a:srgbClr val="FFFFFF"/>
+                  <a:srgbClr val="1A1A2E"/>
                 </a:solidFill>
                 <a:latin typeface="メイリオ"/>
               </a:rPr>
@@ -14081,7 +14081,7 @@
             <a:r>
               <a:rPr sz="900" b="1">
                 <a:solidFill>
-                  <a:srgbClr val="EE88CC"/>
+                  <a:srgbClr val="CC22AA"/>
                 </a:solidFill>
                 <a:latin typeface="メイリオ"/>
               </a:rPr>
@@ -14116,7 +14116,7 @@
             <a:r>
               <a:rPr sz="850" b="0">
                 <a:solidFill>
-                  <a:srgbClr val="FFFFFF"/>
+                  <a:srgbClr val="1A1A2E"/>
                 </a:solidFill>
                 <a:latin typeface="メイリオ"/>
               </a:rPr>
@@ -14151,7 +14151,7 @@
             <a:r>
               <a:rPr sz="900" b="1">
                 <a:solidFill>
-                  <a:srgbClr val="EE88CC"/>
+                  <a:srgbClr val="CC22AA"/>
                 </a:solidFill>
                 <a:latin typeface="メイリオ"/>
               </a:rPr>
@@ -14186,7 +14186,7 @@
             <a:r>
               <a:rPr sz="850" b="0">
                 <a:solidFill>
-                  <a:srgbClr val="FFFFFF"/>
+                  <a:srgbClr val="1A1A2E"/>
                 </a:solidFill>
                 <a:latin typeface="メイリオ"/>
               </a:rPr>
@@ -14210,11 +14210,11 @@
             <a:avLst/>
           </a:prstGeom>
           <a:solidFill>
-            <a:srgbClr val="250008"/>
+            <a:srgbClr val="FFEEEE"/>
           </a:solidFill>
           <a:ln w="12700">
             <a:solidFill>
-              <a:srgbClr val="FF5555"/>
+              <a:srgbClr val="CC3333"/>
             </a:solidFill>
           </a:ln>
         </p:spPr>
@@ -14266,7 +14266,7 @@
             <a:r>
               <a:rPr sz="900" b="1">
                 <a:solidFill>
-                  <a:srgbClr val="FF5555"/>
+                  <a:srgbClr val="CC3333"/>
                 </a:solidFill>
                 <a:latin typeface="メイリオ"/>
               </a:rPr>
@@ -14301,7 +14301,7 @@
             <a:r>
               <a:rPr sz="800" b="0">
                 <a:solidFill>
-                  <a:srgbClr val="FFFFFF"/>
+                  <a:srgbClr val="1A1A2E"/>
                 </a:solidFill>
                 <a:latin typeface="メイリオ"/>
               </a:rPr>
@@ -14327,7 +14327,7 @@
             <a:avLst/>
           </a:prstGeom>
           <a:solidFill>
-            <a:srgbClr val="05051A"/>
+            <a:srgbClr val="221030"/>
           </a:solidFill>
           <a:ln>
             <a:noFill/>
@@ -14381,7 +14381,7 @@
             <a:r>
               <a:rPr sz="900" b="1">
                 <a:solidFill>
-                  <a:srgbClr val="FFD700"/>
+                  <a:srgbClr val="BB8800"/>
                 </a:solidFill>
                 <a:latin typeface="メイリオ"/>
               </a:rPr>
@@ -14416,7 +14416,7 @@
             <a:r>
               <a:rPr sz="800" b="0">
                 <a:solidFill>
-                  <a:srgbClr val="BBBBCC"/>
+                  <a:srgbClr val="888899"/>
                 </a:solidFill>
                 <a:latin typeface="メイリオ"/>
               </a:rPr>
@@ -14571,7 +14571,7 @@
             <a:r>
               <a:rPr sz="1000" b="0">
                 <a:solidFill>
-                  <a:srgbClr val="EE88CC"/>
+                  <a:srgbClr val="FFCCEE"/>
                 </a:solidFill>
                 <a:latin typeface="メイリオ"/>
               </a:rPr>
@@ -14595,11 +14595,11 @@
             <a:avLst/>
           </a:prstGeom>
           <a:solidFill>
-            <a:srgbClr val="301500"/>
+            <a:srgbClr val="FFFBEE"/>
           </a:solidFill>
           <a:ln w="19050">
             <a:solidFill>
-              <a:srgbClr val="FFD700"/>
+              <a:srgbClr val="BB8800"/>
             </a:solidFill>
           </a:ln>
         </p:spPr>
@@ -14651,7 +14651,7 @@
             <a:r>
               <a:rPr sz="950" b="1">
                 <a:solidFill>
-                  <a:srgbClr val="FFD700"/>
+                  <a:srgbClr val="BB8800"/>
                 </a:solidFill>
                 <a:latin typeface="メイリオ"/>
               </a:rPr>
@@ -14675,11 +14675,11 @@
             <a:avLst/>
           </a:prstGeom>
           <a:solidFill>
-            <a:srgbClr val="14143A"/>
+            <a:srgbClr val="EEF6FF"/>
           </a:solidFill>
           <a:ln w="19050">
             <a:solidFill>
-              <a:srgbClr val="44CCEE"/>
+              <a:srgbClr val="1199BB"/>
             </a:solidFill>
           </a:ln>
         </p:spPr>
@@ -14731,7 +14731,7 @@
             <a:r>
               <a:rPr sz="950" b="1">
                 <a:solidFill>
-                  <a:srgbClr val="44CCEE"/>
+                  <a:srgbClr val="1199BB"/>
                 </a:solidFill>
                 <a:latin typeface="メイリオ"/>
               </a:rPr>
@@ -14766,7 +14766,7 @@
             <a:r>
               <a:rPr sz="800" b="0">
                 <a:solidFill>
-                  <a:srgbClr val="FFFFFF"/>
+                  <a:srgbClr val="1A1A2E"/>
                 </a:solidFill>
                 <a:latin typeface="メイリオ"/>
               </a:rPr>
@@ -14790,11 +14790,11 @@
             <a:avLst/>
           </a:prstGeom>
           <a:solidFill>
-            <a:srgbClr val="14143A"/>
+            <a:srgbClr val="FFEEEE"/>
           </a:solidFill>
           <a:ln w="19050">
             <a:solidFill>
-              <a:srgbClr val="FF5555"/>
+              <a:srgbClr val="CC3333"/>
             </a:solidFill>
           </a:ln>
         </p:spPr>
@@ -14846,7 +14846,7 @@
             <a:r>
               <a:rPr sz="950" b="1">
                 <a:solidFill>
-                  <a:srgbClr val="FF5555"/>
+                  <a:srgbClr val="CC3333"/>
                 </a:solidFill>
                 <a:latin typeface="メイリオ"/>
               </a:rPr>
@@ -14881,7 +14881,7 @@
             <a:r>
               <a:rPr sz="800" b="0">
                 <a:solidFill>
-                  <a:srgbClr val="FFFFFF"/>
+                  <a:srgbClr val="1A1A2E"/>
                 </a:solidFill>
                 <a:latin typeface="メイリオ"/>
               </a:rPr>
@@ -14905,11 +14905,11 @@
             <a:avLst/>
           </a:prstGeom>
           <a:solidFill>
-            <a:srgbClr val="14143A"/>
+            <a:srgbClr val="EEFFF5"/>
           </a:solidFill>
           <a:ln w="19050">
             <a:solidFill>
-              <a:srgbClr val="44EE88"/>
+              <a:srgbClr val="22AA66"/>
             </a:solidFill>
           </a:ln>
         </p:spPr>
@@ -14961,7 +14961,7 @@
             <a:r>
               <a:rPr sz="950" b="1">
                 <a:solidFill>
-                  <a:srgbClr val="44EE88"/>
+                  <a:srgbClr val="22AA66"/>
                 </a:solidFill>
                 <a:latin typeface="メイリオ"/>
               </a:rPr>
@@ -14996,7 +14996,7 @@
             <a:r>
               <a:rPr sz="800" b="0">
                 <a:solidFill>
-                  <a:srgbClr val="FFFFFF"/>
+                  <a:srgbClr val="1A1A2E"/>
                 </a:solidFill>
                 <a:latin typeface="メイリオ"/>
               </a:rPr>
@@ -15020,11 +15020,11 @@
             <a:avLst/>
           </a:prstGeom>
           <a:solidFill>
-            <a:srgbClr val="14143A"/>
+            <a:srgbClr val="FFEEF8"/>
           </a:solidFill>
           <a:ln w="19050">
             <a:solidFill>
-              <a:srgbClr val="EE88CC"/>
+              <a:srgbClr val="DD55BB"/>
             </a:solidFill>
           </a:ln>
         </p:spPr>
@@ -15076,7 +15076,7 @@
             <a:r>
               <a:rPr sz="950" b="1">
                 <a:solidFill>
-                  <a:srgbClr val="EE88CC"/>
+                  <a:srgbClr val="DD55BB"/>
                 </a:solidFill>
                 <a:latin typeface="メイリオ"/>
               </a:rPr>
@@ -15111,7 +15111,7 @@
             <a:r>
               <a:rPr sz="800" b="0">
                 <a:solidFill>
-                  <a:srgbClr val="FFFFFF"/>
+                  <a:srgbClr val="1A1A2E"/>
                 </a:solidFill>
                 <a:latin typeface="メイリオ"/>
               </a:rPr>
@@ -15135,11 +15135,11 @@
             <a:avLst/>
           </a:prstGeom>
           <a:solidFill>
-            <a:srgbClr val="14143A"/>
+            <a:srgbClr val="FFFBEE"/>
           </a:solidFill>
           <a:ln w="19050">
             <a:solidFill>
-              <a:srgbClr val="FFD700"/>
+              <a:srgbClr val="BB8800"/>
             </a:solidFill>
           </a:ln>
         </p:spPr>
@@ -15191,7 +15191,7 @@
             <a:r>
               <a:rPr sz="950" b="1">
                 <a:solidFill>
-                  <a:srgbClr val="FFD700"/>
+                  <a:srgbClr val="BB8800"/>
                 </a:solidFill>
                 <a:latin typeface="メイリオ"/>
               </a:rPr>
@@ -15226,7 +15226,7 @@
             <a:r>
               <a:rPr sz="800" b="0">
                 <a:solidFill>
-                  <a:srgbClr val="FFFFFF"/>
+                  <a:srgbClr val="1A1A2E"/>
                 </a:solidFill>
                 <a:latin typeface="メイリオ"/>
               </a:rPr>
@@ -15250,7 +15250,7 @@
             <a:avLst/>
           </a:prstGeom>
           <a:solidFill>
-            <a:srgbClr val="05051A"/>
+            <a:srgbClr val="221030"/>
           </a:solidFill>
           <a:ln>
             <a:noFill/>
@@ -15304,7 +15304,7 @@
             <a:r>
               <a:rPr sz="900" b="1">
                 <a:solidFill>
-                  <a:srgbClr val="FFD700"/>
+                  <a:srgbClr val="BB8800"/>
                 </a:solidFill>
                 <a:latin typeface="メイリオ"/>
               </a:rPr>
@@ -15339,7 +15339,7 @@
             <a:r>
               <a:rPr sz="800" b="0">
                 <a:solidFill>
-                  <a:srgbClr val="BBBBCC"/>
+                  <a:srgbClr val="888899"/>
                 </a:solidFill>
                 <a:latin typeface="メイリオ"/>
               </a:rPr>
@@ -15494,7 +15494,7 @@
             <a:r>
               <a:rPr sz="1000" b="0">
                 <a:solidFill>
-                  <a:srgbClr val="EE88CC"/>
+                  <a:srgbClr val="FFCCEE"/>
                 </a:solidFill>
                 <a:latin typeface="メイリオ"/>
               </a:rPr>
@@ -15518,11 +15518,11 @@
             <a:avLst/>
           </a:prstGeom>
           <a:solidFill>
-            <a:srgbClr val="14143A"/>
+            <a:srgbClr val="EEFFF5"/>
           </a:solidFill>
           <a:ln w="25400">
             <a:solidFill>
-              <a:srgbClr val="44EE88"/>
+              <a:srgbClr val="22AA66"/>
             </a:solidFill>
           </a:ln>
         </p:spPr>
@@ -15567,7 +15567,7 @@
           </a:solidFill>
           <a:ln w="12700">
             <a:solidFill>
-              <a:srgbClr val="FFD700"/>
+              <a:srgbClr val="BB8800"/>
             </a:solidFill>
           </a:ln>
         </p:spPr>
@@ -15619,7 +15619,7 @@
             <a:r>
               <a:rPr sz="900" b="1">
                 <a:solidFill>
-                  <a:srgbClr val="44EE88"/>
+                  <a:srgbClr val="22AA66"/>
                 </a:solidFill>
                 <a:latin typeface="メイリオ"/>
               </a:rPr>
@@ -15643,11 +15643,11 @@
             <a:avLst/>
           </a:prstGeom>
           <a:solidFill>
-            <a:srgbClr val="081E10"/>
+            <a:srgbClr val="EEFFF5"/>
           </a:solidFill>
           <a:ln w="10160">
             <a:solidFill>
-              <a:srgbClr val="44EE88"/>
+              <a:srgbClr val="22AA66"/>
             </a:solidFill>
           </a:ln>
         </p:spPr>
@@ -15699,7 +15699,7 @@
             <a:r>
               <a:rPr sz="900" b="1">
                 <a:solidFill>
-                  <a:srgbClr val="44EE88"/>
+                  <a:srgbClr val="22AA66"/>
                 </a:solidFill>
                 <a:latin typeface="メイリオ"/>
               </a:rPr>
@@ -15734,7 +15734,7 @@
             <a:r>
               <a:rPr sz="800" b="0">
                 <a:solidFill>
-                  <a:srgbClr val="FFFFFF"/>
+                  <a:srgbClr val="1A1A2E"/>
                 </a:solidFill>
                 <a:latin typeface="メイリオ"/>
               </a:rPr>
@@ -15758,11 +15758,11 @@
             <a:avLst/>
           </a:prstGeom>
           <a:solidFill>
-            <a:srgbClr val="081E10"/>
+            <a:srgbClr val="EEFFF5"/>
           </a:solidFill>
           <a:ln w="10160">
             <a:solidFill>
-              <a:srgbClr val="44EE88"/>
+              <a:srgbClr val="22AA66"/>
             </a:solidFill>
           </a:ln>
         </p:spPr>
@@ -15814,7 +15814,7 @@
             <a:r>
               <a:rPr sz="900" b="1">
                 <a:solidFill>
-                  <a:srgbClr val="44EE88"/>
+                  <a:srgbClr val="22AA66"/>
                 </a:solidFill>
                 <a:latin typeface="メイリオ"/>
               </a:rPr>
@@ -15849,7 +15849,7 @@
             <a:r>
               <a:rPr sz="800" b="0">
                 <a:solidFill>
-                  <a:srgbClr val="FFFFFF"/>
+                  <a:srgbClr val="1A1A2E"/>
                 </a:solidFill>
                 <a:latin typeface="メイリオ"/>
               </a:rPr>
@@ -15873,11 +15873,11 @@
             <a:avLst/>
           </a:prstGeom>
           <a:solidFill>
-            <a:srgbClr val="081E10"/>
+            <a:srgbClr val="EEFFF5"/>
           </a:solidFill>
           <a:ln w="10160">
             <a:solidFill>
-              <a:srgbClr val="44EE88"/>
+              <a:srgbClr val="22AA66"/>
             </a:solidFill>
           </a:ln>
         </p:spPr>
@@ -15929,7 +15929,7 @@
             <a:r>
               <a:rPr sz="900" b="1">
                 <a:solidFill>
-                  <a:srgbClr val="44EE88"/>
+                  <a:srgbClr val="22AA66"/>
                 </a:solidFill>
                 <a:latin typeface="メイリオ"/>
               </a:rPr>
@@ -15964,7 +15964,7 @@
             <a:r>
               <a:rPr sz="800" b="0">
                 <a:solidFill>
-                  <a:srgbClr val="FFFFFF"/>
+                  <a:srgbClr val="1A1A2E"/>
                 </a:solidFill>
                 <a:latin typeface="メイリオ"/>
               </a:rPr>
@@ -15988,11 +15988,11 @@
             <a:avLst/>
           </a:prstGeom>
           <a:solidFill>
-            <a:srgbClr val="081E10"/>
+            <a:srgbClr val="EEFFF5"/>
           </a:solidFill>
           <a:ln w="10160">
             <a:solidFill>
-              <a:srgbClr val="44EE88"/>
+              <a:srgbClr val="22AA66"/>
             </a:solidFill>
           </a:ln>
         </p:spPr>
@@ -16044,7 +16044,7 @@
             <a:r>
               <a:rPr sz="900" b="1">
                 <a:solidFill>
-                  <a:srgbClr val="44EE88"/>
+                  <a:srgbClr val="22AA66"/>
                 </a:solidFill>
                 <a:latin typeface="メイリオ"/>
               </a:rPr>
@@ -16079,7 +16079,7 @@
             <a:r>
               <a:rPr sz="800" b="0">
                 <a:solidFill>
-                  <a:srgbClr val="FFFFFF"/>
+                  <a:srgbClr val="1A1A2E"/>
                 </a:solidFill>
                 <a:latin typeface="メイリオ"/>
               </a:rPr>
@@ -16103,11 +16103,11 @@
             <a:avLst/>
           </a:prstGeom>
           <a:solidFill>
-            <a:srgbClr val="081E10"/>
+            <a:srgbClr val="EEFFF5"/>
           </a:solidFill>
           <a:ln w="10160">
             <a:solidFill>
-              <a:srgbClr val="44EE88"/>
+              <a:srgbClr val="22AA66"/>
             </a:solidFill>
           </a:ln>
         </p:spPr>
@@ -16159,7 +16159,7 @@
             <a:r>
               <a:rPr sz="900" b="1">
                 <a:solidFill>
-                  <a:srgbClr val="44EE88"/>
+                  <a:srgbClr val="22AA66"/>
                 </a:solidFill>
                 <a:latin typeface="メイリオ"/>
               </a:rPr>
@@ -16194,7 +16194,7 @@
             <a:r>
               <a:rPr sz="800" b="0">
                 <a:solidFill>
-                  <a:srgbClr val="FFFFFF"/>
+                  <a:srgbClr val="1A1A2E"/>
                 </a:solidFill>
                 <a:latin typeface="メイリオ"/>
               </a:rPr>
@@ -16218,11 +16218,11 @@
             <a:avLst/>
           </a:prstGeom>
           <a:solidFill>
-            <a:srgbClr val="081E10"/>
+            <a:srgbClr val="EEFFF5"/>
           </a:solidFill>
           <a:ln w="10160">
             <a:solidFill>
-              <a:srgbClr val="44EE88"/>
+              <a:srgbClr val="22AA66"/>
             </a:solidFill>
           </a:ln>
         </p:spPr>
@@ -16274,7 +16274,7 @@
             <a:r>
               <a:rPr sz="900" b="1">
                 <a:solidFill>
-                  <a:srgbClr val="44EE88"/>
+                  <a:srgbClr val="22AA66"/>
                 </a:solidFill>
                 <a:latin typeface="メイリオ"/>
               </a:rPr>
@@ -16309,7 +16309,7 @@
             <a:r>
               <a:rPr sz="800" b="0">
                 <a:solidFill>
-                  <a:srgbClr val="FFFFFF"/>
+                  <a:srgbClr val="1A1A2E"/>
                 </a:solidFill>
                 <a:latin typeface="メイリオ"/>
               </a:rPr>
@@ -16333,11 +16333,11 @@
             <a:avLst/>
           </a:prstGeom>
           <a:solidFill>
-            <a:srgbClr val="14143A"/>
+            <a:srgbClr val="FFEEEE"/>
           </a:solidFill>
           <a:ln w="25400">
             <a:solidFill>
-              <a:srgbClr val="FF5555"/>
+              <a:srgbClr val="CC3333"/>
             </a:solidFill>
           </a:ln>
         </p:spPr>
@@ -16382,7 +16382,7 @@
           </a:solidFill>
           <a:ln w="12700">
             <a:solidFill>
-              <a:srgbClr val="FFD700"/>
+              <a:srgbClr val="BB8800"/>
             </a:solidFill>
           </a:ln>
         </p:spPr>
@@ -16434,7 +16434,7 @@
             <a:r>
               <a:rPr sz="900" b="1">
                 <a:solidFill>
-                  <a:srgbClr val="FF5555"/>
+                  <a:srgbClr val="CC3333"/>
                 </a:solidFill>
                 <a:latin typeface="メイリオ"/>
               </a:rPr>
@@ -16458,11 +16458,11 @@
             <a:avLst/>
           </a:prstGeom>
           <a:solidFill>
-            <a:srgbClr val="1E0606"/>
+            <a:srgbClr val="FFEEEE"/>
           </a:solidFill>
           <a:ln w="10160">
             <a:solidFill>
-              <a:srgbClr val="FF5555"/>
+              <a:srgbClr val="CC3333"/>
             </a:solidFill>
           </a:ln>
         </p:spPr>
@@ -16514,7 +16514,7 @@
             <a:r>
               <a:rPr sz="900" b="1">
                 <a:solidFill>
-                  <a:srgbClr val="FF5555"/>
+                  <a:srgbClr val="CC3333"/>
                 </a:solidFill>
                 <a:latin typeface="メイリオ"/>
               </a:rPr>
@@ -16549,7 +16549,7 @@
             <a:r>
               <a:rPr sz="800" b="0">
                 <a:solidFill>
-                  <a:srgbClr val="FFFFFF"/>
+                  <a:srgbClr val="1A1A2E"/>
                 </a:solidFill>
                 <a:latin typeface="メイリオ"/>
               </a:rPr>
@@ -16573,11 +16573,11 @@
             <a:avLst/>
           </a:prstGeom>
           <a:solidFill>
-            <a:srgbClr val="1E0606"/>
+            <a:srgbClr val="FFEEEE"/>
           </a:solidFill>
           <a:ln w="10160">
             <a:solidFill>
-              <a:srgbClr val="FF5555"/>
+              <a:srgbClr val="CC3333"/>
             </a:solidFill>
           </a:ln>
         </p:spPr>
@@ -16629,7 +16629,7 @@
             <a:r>
               <a:rPr sz="900" b="1">
                 <a:solidFill>
-                  <a:srgbClr val="FF5555"/>
+                  <a:srgbClr val="CC3333"/>
                 </a:solidFill>
                 <a:latin typeface="メイリオ"/>
               </a:rPr>
@@ -16664,7 +16664,7 @@
             <a:r>
               <a:rPr sz="800" b="0">
                 <a:solidFill>
-                  <a:srgbClr val="FFFFFF"/>
+                  <a:srgbClr val="1A1A2E"/>
                 </a:solidFill>
                 <a:latin typeface="メイリオ"/>
               </a:rPr>
@@ -16688,11 +16688,11 @@
             <a:avLst/>
           </a:prstGeom>
           <a:solidFill>
-            <a:srgbClr val="1E0606"/>
+            <a:srgbClr val="FFEEEE"/>
           </a:solidFill>
           <a:ln w="10160">
             <a:solidFill>
-              <a:srgbClr val="FF5555"/>
+              <a:srgbClr val="CC3333"/>
             </a:solidFill>
           </a:ln>
         </p:spPr>
@@ -16744,7 +16744,7 @@
             <a:r>
               <a:rPr sz="900" b="1">
                 <a:solidFill>
-                  <a:srgbClr val="FF5555"/>
+                  <a:srgbClr val="CC3333"/>
                 </a:solidFill>
                 <a:latin typeface="メイリオ"/>
               </a:rPr>
@@ -16779,7 +16779,7 @@
             <a:r>
               <a:rPr sz="800" b="0">
                 <a:solidFill>
-                  <a:srgbClr val="FFFFFF"/>
+                  <a:srgbClr val="1A1A2E"/>
                 </a:solidFill>
                 <a:latin typeface="メイリオ"/>
               </a:rPr>
@@ -16803,11 +16803,11 @@
             <a:avLst/>
           </a:prstGeom>
           <a:solidFill>
-            <a:srgbClr val="1E0606"/>
+            <a:srgbClr val="FFEEEE"/>
           </a:solidFill>
           <a:ln w="10160">
             <a:solidFill>
-              <a:srgbClr val="FF5555"/>
+              <a:srgbClr val="CC3333"/>
             </a:solidFill>
           </a:ln>
         </p:spPr>
@@ -16859,7 +16859,7 @@
             <a:r>
               <a:rPr sz="900" b="1">
                 <a:solidFill>
-                  <a:srgbClr val="FF5555"/>
+                  <a:srgbClr val="CC3333"/>
                 </a:solidFill>
                 <a:latin typeface="メイリオ"/>
               </a:rPr>
@@ -16894,7 +16894,7 @@
             <a:r>
               <a:rPr sz="800" b="0">
                 <a:solidFill>
-                  <a:srgbClr val="FFFFFF"/>
+                  <a:srgbClr val="1A1A2E"/>
                 </a:solidFill>
                 <a:latin typeface="メイリオ"/>
               </a:rPr>
@@ -16918,11 +16918,11 @@
             <a:avLst/>
           </a:prstGeom>
           <a:solidFill>
-            <a:srgbClr val="1E0606"/>
+            <a:srgbClr val="FFEEEE"/>
           </a:solidFill>
           <a:ln w="10160">
             <a:solidFill>
-              <a:srgbClr val="FF5555"/>
+              <a:srgbClr val="CC3333"/>
             </a:solidFill>
           </a:ln>
         </p:spPr>
@@ -16974,7 +16974,7 @@
             <a:r>
               <a:rPr sz="900" b="1">
                 <a:solidFill>
-                  <a:srgbClr val="FF5555"/>
+                  <a:srgbClr val="CC3333"/>
                 </a:solidFill>
                 <a:latin typeface="メイリオ"/>
               </a:rPr>
@@ -17009,7 +17009,7 @@
             <a:r>
               <a:rPr sz="800" b="0">
                 <a:solidFill>
-                  <a:srgbClr val="FFFFFF"/>
+                  <a:srgbClr val="1A1A2E"/>
                 </a:solidFill>
                 <a:latin typeface="メイリオ"/>
               </a:rPr>
@@ -17033,11 +17033,11 @@
             <a:avLst/>
           </a:prstGeom>
           <a:solidFill>
-            <a:srgbClr val="1E0606"/>
+            <a:srgbClr val="FFEEEE"/>
           </a:solidFill>
           <a:ln w="10160">
             <a:solidFill>
-              <a:srgbClr val="FF5555"/>
+              <a:srgbClr val="CC3333"/>
             </a:solidFill>
           </a:ln>
         </p:spPr>
@@ -17089,7 +17089,7 @@
             <a:r>
               <a:rPr sz="900" b="1">
                 <a:solidFill>
-                  <a:srgbClr val="FF5555"/>
+                  <a:srgbClr val="CC3333"/>
                 </a:solidFill>
                 <a:latin typeface="メイリオ"/>
               </a:rPr>
@@ -17124,7 +17124,7 @@
             <a:r>
               <a:rPr sz="800" b="0">
                 <a:solidFill>
-                  <a:srgbClr val="FFFFFF"/>
+                  <a:srgbClr val="1A1A2E"/>
                 </a:solidFill>
                 <a:latin typeface="メイリオ"/>
               </a:rPr>
@@ -17148,7 +17148,7 @@
             <a:avLst/>
           </a:prstGeom>
           <a:solidFill>
-            <a:srgbClr val="05051A"/>
+            <a:srgbClr val="221030"/>
           </a:solidFill>
           <a:ln>
             <a:noFill/>
@@ -17202,7 +17202,7 @@
             <a:r>
               <a:rPr sz="900" b="1">
                 <a:solidFill>
-                  <a:srgbClr val="FFD700"/>
+                  <a:srgbClr val="BB8800"/>
                 </a:solidFill>
                 <a:latin typeface="メイリオ"/>
               </a:rPr>
@@ -17237,7 +17237,7 @@
             <a:r>
               <a:rPr sz="800" b="0">
                 <a:solidFill>
-                  <a:srgbClr val="BBBBCC"/>
+                  <a:srgbClr val="888899"/>
                 </a:solidFill>
                 <a:latin typeface="メイリオ"/>
               </a:rPr>
@@ -17392,7 +17392,7 @@
             <a:r>
               <a:rPr sz="1000" b="0">
                 <a:solidFill>
-                  <a:srgbClr val="EE88CC"/>
+                  <a:srgbClr val="FFCCEE"/>
                 </a:solidFill>
                 <a:latin typeface="メイリオ"/>
               </a:rPr>
@@ -17427,7 +17427,7 @@
             <a:r>
               <a:rPr sz="1300" b="1">
                 <a:solidFill>
-                  <a:srgbClr val="FFD700"/>
+                  <a:srgbClr val="BB8800"/>
                 </a:solidFill>
                 <a:latin typeface="游明朝"/>
               </a:rPr>
@@ -17451,11 +17451,11 @@
             <a:avLst/>
           </a:prstGeom>
           <a:solidFill>
-            <a:srgbClr val="14143A"/>
+            <a:srgbClr val="EEF6FF"/>
           </a:solidFill>
           <a:ln w="25400">
             <a:solidFill>
-              <a:srgbClr val="44CCEE"/>
+              <a:srgbClr val="1199BB"/>
             </a:solidFill>
           </a:ln>
         </p:spPr>
@@ -17507,7 +17507,7 @@
             <a:r>
               <a:rPr sz="1200" b="1">
                 <a:solidFill>
-                  <a:srgbClr val="44CCEE"/>
+                  <a:srgbClr val="1199BB"/>
                 </a:solidFill>
                 <a:latin typeface="游明朝"/>
               </a:rPr>
@@ -17543,7 +17543,7 @@
             <a:r>
               <a:rPr sz="800" b="0">
                 <a:solidFill>
-                  <a:srgbClr val="FFFFFF"/>
+                  <a:srgbClr val="1A1A2E"/>
                 </a:solidFill>
                 <a:latin typeface="メイリオ"/>
               </a:rPr>
@@ -17567,11 +17567,11 @@
             <a:avLst/>
           </a:prstGeom>
           <a:solidFill>
-            <a:srgbClr val="14143A"/>
+            <a:srgbClr val="FFEEEE"/>
           </a:solidFill>
           <a:ln w="25400">
             <a:solidFill>
-              <a:srgbClr val="FF5555"/>
+              <a:srgbClr val="CC3333"/>
             </a:solidFill>
           </a:ln>
         </p:spPr>
@@ -17623,7 +17623,7 @@
             <a:r>
               <a:rPr sz="1200" b="1">
                 <a:solidFill>
-                  <a:srgbClr val="FF5555"/>
+                  <a:srgbClr val="CC3333"/>
                 </a:solidFill>
                 <a:latin typeface="游明朝"/>
               </a:rPr>
@@ -17659,7 +17659,7 @@
             <a:r>
               <a:rPr sz="800" b="0">
                 <a:solidFill>
-                  <a:srgbClr val="FFFFFF"/>
+                  <a:srgbClr val="1A1A2E"/>
                 </a:solidFill>
                 <a:latin typeface="メイリオ"/>
               </a:rPr>
@@ -17683,11 +17683,11 @@
             <a:avLst/>
           </a:prstGeom>
           <a:solidFill>
-            <a:srgbClr val="14143A"/>
+            <a:srgbClr val="FFFBEE"/>
           </a:solidFill>
           <a:ln w="25400">
             <a:solidFill>
-              <a:srgbClr val="FFD700"/>
+              <a:srgbClr val="BB8800"/>
             </a:solidFill>
           </a:ln>
         </p:spPr>
@@ -17739,7 +17739,7 @@
             <a:r>
               <a:rPr sz="1200" b="1">
                 <a:solidFill>
-                  <a:srgbClr val="FFD700"/>
+                  <a:srgbClr val="BB8800"/>
                 </a:solidFill>
                 <a:latin typeface="游明朝"/>
               </a:rPr>
@@ -17775,7 +17775,7 @@
             <a:r>
               <a:rPr sz="800" b="0">
                 <a:solidFill>
-                  <a:srgbClr val="FFFFFF"/>
+                  <a:srgbClr val="1A1A2E"/>
                 </a:solidFill>
                 <a:latin typeface="メイリオ"/>
               </a:rPr>
@@ -17799,11 +17799,11 @@
             <a:avLst/>
           </a:prstGeom>
           <a:solidFill>
-            <a:srgbClr val="080820"/>
+            <a:srgbClr val="F5F0FA"/>
           </a:solidFill>
           <a:ln w="10160">
             <a:solidFill>
-              <a:srgbClr val="BBBBCC"/>
+              <a:srgbClr val="888899"/>
             </a:solidFill>
           </a:ln>
         </p:spPr>
@@ -17855,7 +17855,7 @@
             <a:r>
               <a:rPr sz="1000" b="1">
                 <a:solidFill>
-                  <a:srgbClr val="BBBBCC"/>
+                  <a:srgbClr val="555570"/>
                 </a:solidFill>
                 <a:latin typeface="メイリオ"/>
               </a:rPr>
@@ -17890,7 +17890,7 @@
             <a:r>
               <a:rPr sz="850" b="1">
                 <a:solidFill>
-                  <a:srgbClr val="BBBBCC"/>
+                  <a:srgbClr val="555570"/>
                 </a:solidFill>
                 <a:latin typeface="メイリオ"/>
               </a:rPr>
@@ -17925,7 +17925,7 @@
             <a:r>
               <a:rPr sz="1000" b="1">
                 <a:solidFill>
-                  <a:srgbClr val="FFD700"/>
+                  <a:srgbClr val="BB8800"/>
                 </a:solidFill>
                 <a:latin typeface="メイリオ"/>
               </a:rPr>
@@ -17960,7 +17960,7 @@
             <a:r>
               <a:rPr sz="850" b="1">
                 <a:solidFill>
-                  <a:srgbClr val="BBBBCC"/>
+                  <a:srgbClr val="555570"/>
                 </a:solidFill>
                 <a:latin typeface="メイリオ"/>
               </a:rPr>
@@ -17995,7 +17995,7 @@
             <a:r>
               <a:rPr sz="1000" b="1">
                 <a:solidFill>
-                  <a:srgbClr val="44EE88"/>
+                  <a:srgbClr val="22AA66"/>
                 </a:solidFill>
                 <a:latin typeface="メイリオ"/>
               </a:rPr>
@@ -18030,7 +18030,7 @@
             <a:r>
               <a:rPr sz="850" b="1">
                 <a:solidFill>
-                  <a:srgbClr val="BBBBCC"/>
+                  <a:srgbClr val="555570"/>
                 </a:solidFill>
                 <a:latin typeface="メイリオ"/>
               </a:rPr>
@@ -18065,7 +18065,7 @@
             <a:r>
               <a:rPr sz="1000" b="1">
                 <a:solidFill>
-                  <a:srgbClr val="CC44AA"/>
+                  <a:srgbClr val="CC22AA"/>
                 </a:solidFill>
                 <a:latin typeface="メイリオ"/>
               </a:rPr>
@@ -18100,7 +18100,7 @@
             <a:r>
               <a:rPr sz="850" b="1">
                 <a:solidFill>
-                  <a:srgbClr val="BBBBCC"/>
+                  <a:srgbClr val="555570"/>
                 </a:solidFill>
                 <a:latin typeface="メイリオ"/>
               </a:rPr>
@@ -18135,7 +18135,7 @@
             <a:r>
               <a:rPr sz="1000" b="1">
                 <a:solidFill>
-                  <a:srgbClr val="44CCEE"/>
+                  <a:srgbClr val="1199BB"/>
                 </a:solidFill>
                 <a:latin typeface="メイリオ"/>
               </a:rPr>
@@ -18170,7 +18170,7 @@
             <a:r>
               <a:rPr sz="850" b="1">
                 <a:solidFill>
-                  <a:srgbClr val="BBBBCC"/>
+                  <a:srgbClr val="555570"/>
                 </a:solidFill>
                 <a:latin typeface="メイリオ"/>
               </a:rPr>
@@ -18205,7 +18205,7 @@
             <a:r>
               <a:rPr sz="1000" b="1">
                 <a:solidFill>
-                  <a:srgbClr val="EE88CC"/>
+                  <a:srgbClr val="DD55BB"/>
                 </a:solidFill>
                 <a:latin typeface="メイリオ"/>
               </a:rPr>
@@ -18229,11 +18229,11 @@
             <a:avLst/>
           </a:prstGeom>
           <a:solidFill>
-            <a:srgbClr val="301000"/>
+            <a:srgbClr val="FFFBEE"/>
           </a:solidFill>
           <a:ln w="19050">
             <a:solidFill>
-              <a:srgbClr val="FFD700"/>
+              <a:srgbClr val="BB8800"/>
             </a:solidFill>
           </a:ln>
         </p:spPr>
@@ -18285,7 +18285,7 @@
             <a:r>
               <a:rPr sz="900" b="0">
                 <a:solidFill>
-                  <a:srgbClr val="FFD700"/>
+                  <a:srgbClr val="BB8800"/>
                 </a:solidFill>
                 <a:latin typeface="メイリオ"/>
               </a:rPr>
@@ -18309,7 +18309,7 @@
             <a:avLst/>
           </a:prstGeom>
           <a:solidFill>
-            <a:srgbClr val="05051A"/>
+            <a:srgbClr val="221030"/>
           </a:solidFill>
           <a:ln>
             <a:noFill/>
@@ -18363,7 +18363,7 @@
             <a:r>
               <a:rPr sz="900" b="1">
                 <a:solidFill>
-                  <a:srgbClr val="FFD700"/>
+                  <a:srgbClr val="BB8800"/>
                 </a:solidFill>
                 <a:latin typeface="メイリオ"/>
               </a:rPr>
@@ -18398,7 +18398,7 @@
             <a:r>
               <a:rPr sz="800" b="0">
                 <a:solidFill>
-                  <a:srgbClr val="BBBBCC"/>
+                  <a:srgbClr val="888899"/>
                 </a:solidFill>
                 <a:latin typeface="メイリオ"/>
               </a:rPr>
